--- a/преза колледж.pptx
+++ b/преза колледж.pptx
@@ -1,18 +1,20 @@
 
 <file path=ppt/presentation.xml><?xml version="1.0" encoding="utf-8"?>
-<p:presentation xmlns:a="http://schemas.openxmlformats.org/drawingml/2006/main" xmlns:r="http://schemas.openxmlformats.org/officeDocument/2006/relationships" xmlns:p="http://schemas.openxmlformats.org/presentationml/2006/main" xmlns:m="http://schemas.openxmlformats.org/officeDocument/2006/math" xmlns:a14="http://schemas.microsoft.com/office/drawing/2010/main">
+<p:presentation xmlns:a="http://schemas.openxmlformats.org/drawingml/2006/main" xmlns:r="http://schemas.openxmlformats.org/officeDocument/2006/relationships" xmlns:p="http://schemas.openxmlformats.org/presentationml/2006/main">
   <p:sldMasterIdLst>
-    <p:sldMasterId id="2147483648" r:id="rId5"/>
+    <p:sldMasterId id="2147483648" r:id="rId1"/>
   </p:sldMasterIdLst>
   <p:notesMasterIdLst>
-    <p:notesMasterId r:id="rId7"/>
+    <p:notesMasterId r:id="rId9"/>
   </p:notesMasterIdLst>
   <p:sldIdLst>
-    <p:sldId id="256" r:id="rId8"/>
-    <p:sldId id="257" r:id="rId9"/>
-    <p:sldId id="258" r:id="rId10"/>
-    <p:sldId id="259" r:id="rId11"/>
-    <p:sldId id="260" r:id="rId12"/>
+    <p:sldId id="256" r:id="rId2"/>
+    <p:sldId id="257" r:id="rId3"/>
+    <p:sldId id="258" r:id="rId4"/>
+    <p:sldId id="260" r:id="rId5"/>
+    <p:sldId id="261" r:id="rId6"/>
+    <p:sldId id="262" r:id="rId7"/>
+    <p:sldId id="259" r:id="rId8"/>
   </p:sldIdLst>
   <p:sldSz cx="24384000" cy="13716000"/>
   <p:notesSz cx="6858000" cy="9144000"/>
@@ -32,7 +34,7 @@
       <a:buFontTx/>
       <a:buNone/>
       <a:tabLst/>
-      <a:defRPr b="0" baseline="0" cap="none" i="0" spc="0" strike="noStrike" sz="1800" u="none" kumimoji="0" normalizeH="0">
+      <a:defRPr kumimoji="0" sz="1800" b="0" i="0" u="none" strike="noStrike" cap="none" spc="0" normalizeH="0" baseline="0">
         <a:ln>
           <a:noFill/>
         </a:ln>
@@ -58,7 +60,7 @@
       <a:buFontTx/>
       <a:buNone/>
       <a:tabLst/>
-      <a:defRPr b="0" baseline="0" cap="none" i="0" spc="0" strike="noStrike" sz="3800" u="none" kumimoji="0" normalizeH="0">
+      <a:defRPr kumimoji="0" sz="3800" b="0" i="0" u="none" strike="noStrike" cap="none" spc="0" normalizeH="0" baseline="0">
         <a:ln>
           <a:noFill/>
         </a:ln>
@@ -88,7 +90,7 @@
       <a:buFontTx/>
       <a:buNone/>
       <a:tabLst/>
-      <a:defRPr b="0" baseline="0" cap="none" i="0" spc="0" strike="noStrike" sz="3800" u="none" kumimoji="0" normalizeH="0">
+      <a:defRPr kumimoji="0" sz="3800" b="0" i="0" u="none" strike="noStrike" cap="none" spc="0" normalizeH="0" baseline="0">
         <a:ln>
           <a:noFill/>
         </a:ln>
@@ -118,7 +120,7 @@
       <a:buFontTx/>
       <a:buNone/>
       <a:tabLst/>
-      <a:defRPr b="0" baseline="0" cap="none" i="0" spc="0" strike="noStrike" sz="3800" u="none" kumimoji="0" normalizeH="0">
+      <a:defRPr kumimoji="0" sz="3800" b="0" i="0" u="none" strike="noStrike" cap="none" spc="0" normalizeH="0" baseline="0">
         <a:ln>
           <a:noFill/>
         </a:ln>
@@ -148,7 +150,7 @@
       <a:buFontTx/>
       <a:buNone/>
       <a:tabLst/>
-      <a:defRPr b="0" baseline="0" cap="none" i="0" spc="0" strike="noStrike" sz="3800" u="none" kumimoji="0" normalizeH="0">
+      <a:defRPr kumimoji="0" sz="3800" b="0" i="0" u="none" strike="noStrike" cap="none" spc="0" normalizeH="0" baseline="0">
         <a:ln>
           <a:noFill/>
         </a:ln>
@@ -178,7 +180,7 @@
       <a:buFontTx/>
       <a:buNone/>
       <a:tabLst/>
-      <a:defRPr b="0" baseline="0" cap="none" i="0" spc="0" strike="noStrike" sz="3800" u="none" kumimoji="0" normalizeH="0">
+      <a:defRPr kumimoji="0" sz="3800" b="0" i="0" u="none" strike="noStrike" cap="none" spc="0" normalizeH="0" baseline="0">
         <a:ln>
           <a:noFill/>
         </a:ln>
@@ -208,7 +210,7 @@
       <a:buFontTx/>
       <a:buNone/>
       <a:tabLst/>
-      <a:defRPr b="0" baseline="0" cap="none" i="0" spc="0" strike="noStrike" sz="3800" u="none" kumimoji="0" normalizeH="0">
+      <a:defRPr kumimoji="0" sz="3800" b="0" i="0" u="none" strike="noStrike" cap="none" spc="0" normalizeH="0" baseline="0">
         <a:ln>
           <a:noFill/>
         </a:ln>
@@ -238,7 +240,7 @@
       <a:buFontTx/>
       <a:buNone/>
       <a:tabLst/>
-      <a:defRPr b="0" baseline="0" cap="none" i="0" spc="0" strike="noStrike" sz="3800" u="none" kumimoji="0" normalizeH="0">
+      <a:defRPr kumimoji="0" sz="3800" b="0" i="0" u="none" strike="noStrike" cap="none" spc="0" normalizeH="0" baseline="0">
         <a:ln>
           <a:noFill/>
         </a:ln>
@@ -268,7 +270,7 @@
       <a:buFontTx/>
       <a:buNone/>
       <a:tabLst/>
-      <a:defRPr b="0" baseline="0" cap="none" i="0" spc="0" strike="noStrike" sz="3800" u="none" kumimoji="0" normalizeH="0">
+      <a:defRPr kumimoji="0" sz="3800" b="0" i="0" u="none" strike="noStrike" cap="none" spc="0" normalizeH="0" baseline="0">
         <a:ln>
           <a:noFill/>
         </a:ln>
@@ -298,7 +300,7 @@
       <a:buFontTx/>
       <a:buNone/>
       <a:tabLst/>
-      <a:defRPr b="0" baseline="0" cap="none" i="0" spc="0" strike="noStrike" sz="3800" u="none" kumimoji="0" normalizeH="0">
+      <a:defRPr kumimoji="0" sz="3800" b="0" i="0" u="none" strike="noStrike" cap="none" spc="0" normalizeH="0" baseline="0">
         <a:ln>
           <a:noFill/>
         </a:ln>
@@ -317,13 +319,14 @@
 </p:presentation>
 </file>
 
-<file path=ppt/commentAuthors.xml><?xml version="1.0" encoding="utf-8"?>
-<p:cmAuthorLst xmlns:a="http://schemas.openxmlformats.org/drawingml/2006/main" xmlns:r="http://schemas.openxmlformats.org/officeDocument/2006/relationships" xmlns:p="http://schemas.openxmlformats.org/presentationml/2006/main" xmlns:m="http://schemas.openxmlformats.org/officeDocument/2006/math" xmlns:a14="http://schemas.microsoft.com/office/drawing/2010/main"/>
-</file>
-
 <file path=ppt/notesMasters/notesMaster1.xml><?xml version="1.0" encoding="utf-8"?>
-<p:notesMaster xmlns:a="http://schemas.openxmlformats.org/drawingml/2006/main" xmlns:r="http://schemas.openxmlformats.org/officeDocument/2006/relationships" xmlns:p="http://schemas.openxmlformats.org/presentationml/2006/main" xmlns:m="http://schemas.openxmlformats.org/officeDocument/2006/math" xmlns:a14="http://schemas.microsoft.com/office/drawing/2010/main">
+<p:notesMaster xmlns:a="http://schemas.openxmlformats.org/drawingml/2006/main" xmlns:r="http://schemas.openxmlformats.org/officeDocument/2006/relationships" xmlns:p="http://schemas.openxmlformats.org/presentationml/2006/main">
   <p:cSld>
+    <p:bg>
+      <p:bgRef idx="1001">
+        <a:schemeClr val="bg1"/>
+      </p:bgRef>
+    </p:bg>
     <p:spTree>
       <p:nvGrpSpPr>
         <p:cNvPr id="1" name=""/>
@@ -341,7 +344,9 @@
       <p:sp>
         <p:nvSpPr>
           <p:cNvPr id="182" name="Shape 182"/>
-          <p:cNvSpPr/>
+          <p:cNvSpPr>
+            <a:spLocks noGrp="1" noRot="1" noChangeAspect="1"/>
+          </p:cNvSpPr>
           <p:nvPr>
             <p:ph type="sldImg"/>
           </p:nvPr>
@@ -359,14 +364,16 @@
           <a:bodyPr/>
           <a:lstStyle/>
           <a:p>
-            <a:pPr/>
+            <a:endParaRPr/>
           </a:p>
         </p:txBody>
       </p:sp>
       <p:sp>
         <p:nvSpPr>
           <p:cNvPr id="183" name="Shape 183"/>
-          <p:cNvSpPr/>
+          <p:cNvSpPr>
+            <a:spLocks noGrp="1"/>
+          </p:cNvSpPr>
           <p:nvPr>
             <p:ph type="body" sz="quarter" idx="1"/>
           </p:nvPr>
@@ -384,7 +391,7 @@
           <a:bodyPr/>
           <a:lstStyle/>
           <a:p>
-            <a:pPr/>
+            <a:endParaRPr/>
           </a:p>
         </p:txBody>
       </p:sp>
@@ -495,8 +502,78 @@
 </p:notesMaster>
 </file>
 
+<file path=ppt/notesSlides/notesSlide1.xml><?xml version="1.0" encoding="utf-8"?>
+<p:notes xmlns:a="http://schemas.openxmlformats.org/drawingml/2006/main" xmlns:r="http://schemas.openxmlformats.org/officeDocument/2006/relationships" xmlns:p="http://schemas.openxmlformats.org/presentationml/2006/main">
+  <p:cSld>
+    <p:spTree>
+      <p:nvGrpSpPr>
+        <p:cNvPr id="1" name=""/>
+        <p:cNvGrpSpPr/>
+        <p:nvPr/>
+      </p:nvGrpSpPr>
+      <p:grpSpPr>
+        <a:xfrm>
+          <a:off x="0" y="0"/>
+          <a:ext cx="0" cy="0"/>
+          <a:chOff x="0" y="0"/>
+          <a:chExt cx="0" cy="0"/>
+        </a:xfrm>
+      </p:grpSpPr>
+      <p:sp>
+        <p:nvSpPr>
+          <p:cNvPr id="2" name="Образ слайда 1"/>
+          <p:cNvSpPr>
+            <a:spLocks noGrp="1" noRot="1" noChangeAspect="1"/>
+          </p:cNvSpPr>
+          <p:nvPr>
+            <p:ph type="sldImg"/>
+          </p:nvPr>
+        </p:nvSpPr>
+        <p:spPr>
+          <a:xfrm>
+            <a:off x="381000" y="685800"/>
+            <a:ext cx="6096000" cy="3429000"/>
+          </a:xfrm>
+        </p:spPr>
+      </p:sp>
+      <p:sp>
+        <p:nvSpPr>
+          <p:cNvPr id="3" name="Заметки 2"/>
+          <p:cNvSpPr>
+            <a:spLocks noGrp="1"/>
+          </p:cNvSpPr>
+          <p:nvPr>
+            <p:ph type="body" idx="1"/>
+          </p:nvPr>
+        </p:nvSpPr>
+        <p:spPr/>
+        <p:txBody>
+          <a:bodyPr/>
+          <a:lstStyle/>
+          <a:p>
+            <a:r>
+              <a:rPr lang="ru-RU" dirty="0" smtClean="0"/>
+              <a:t>	</a:t>
+            </a:r>
+            <a:endParaRPr lang="ru-RU" dirty="0"/>
+          </a:p>
+        </p:txBody>
+      </p:sp>
+    </p:spTree>
+    <p:extLst>
+      <p:ext uri="{BB962C8B-B14F-4D97-AF65-F5344CB8AC3E}">
+        <p14:creationId xmlns:p14="http://schemas.microsoft.com/office/powerpoint/2010/main" val="2295352609"/>
+      </p:ext>
+    </p:extLst>
+  </p:cSld>
+  <p:clrMapOvr>
+    <a:masterClrMapping/>
+  </p:clrMapOvr>
+</p:notes>
+</file>
+
 <file path=ppt/slideLayouts/slideLayout1.xml><?xml version="1.0" encoding="utf-8"?>
-<p:sldLayout xmlns:a="http://schemas.openxmlformats.org/drawingml/2006/main" xmlns:r="http://schemas.openxmlformats.org/officeDocument/2006/relationships" xmlns:p="http://schemas.openxmlformats.org/presentationml/2006/main" xmlns:m="http://schemas.openxmlformats.org/officeDocument/2006/math" xmlns:a14="http://schemas.microsoft.com/office/drawing/2010/main" type="title" showMasterSp="1" showMasterPhAnim="1">
+<p:sldLayout xmlns:a="http://schemas.openxmlformats.org/drawingml/2006/main" xmlns:r="http://schemas.openxmlformats.org/officeDocument/2006/relationships" xmlns:p="http://schemas.openxmlformats.org/presentationml/2006/main" type="title">
   <p:cSld name="Заголовок">
     <p:spTree>
       <p:nvGrpSpPr>
@@ -515,7 +592,9 @@
       <p:sp>
         <p:nvSpPr>
           <p:cNvPr id="11" name="Заголовок презентации"/>
-          <p:cNvSpPr txBox="1"/>
+          <p:cNvSpPr txBox="1">
+            <a:spLocks noGrp="1"/>
+          </p:cNvSpPr>
           <p:nvPr>
             <p:ph type="title" hasCustomPrompt="1"/>
           </p:nvPr>
@@ -529,7 +608,6 @@
           <a:bodyPr/>
           <a:lstStyle/>
           <a:p>
-            <a:pPr/>
             <a:r>
               <a:t>Заголовок презентации</a:t>
             </a:r>
@@ -539,7 +617,9 @@
       <p:sp>
         <p:nvSpPr>
           <p:cNvPr id="12" name="Уровень текста 1…"/>
-          <p:cNvSpPr txBox="1"/>
+          <p:cNvSpPr txBox="1">
+            <a:spLocks noGrp="1"/>
+          </p:cNvSpPr>
           <p:nvPr>
             <p:ph type="body" sz="quarter" idx="1" hasCustomPrompt="1"/>
           </p:nvPr>
@@ -553,41 +633,34 @@
           <a:bodyPr/>
           <a:lstStyle/>
           <a:p>
-            <a:pPr/>
             <a:r>
               <a:t>Подзаголовок презентации </a:t>
             </a:r>
           </a:p>
           <a:p>
             <a:pPr lvl="1"/>
-            <a:r>
-              <a:t/>
-            </a:r>
+            <a:endParaRPr/>
           </a:p>
           <a:p>
             <a:pPr lvl="2"/>
-            <a:r>
-              <a:t/>
-            </a:r>
+            <a:endParaRPr/>
           </a:p>
           <a:p>
             <a:pPr lvl="3"/>
-            <a:r>
-              <a:t/>
-            </a:r>
+            <a:endParaRPr/>
           </a:p>
           <a:p>
             <a:pPr lvl="4"/>
-            <a:r>
-              <a:t/>
-            </a:r>
+            <a:endParaRPr/>
           </a:p>
         </p:txBody>
       </p:sp>
       <p:sp>
         <p:nvSpPr>
           <p:cNvPr id="13" name="Номер слайда"/>
-          <p:cNvSpPr txBox="1"/>
+          <p:cNvSpPr txBox="1">
+            <a:spLocks noGrp="1"/>
+          </p:cNvSpPr>
           <p:nvPr>
             <p:ph type="sldNum" sz="quarter" idx="2"/>
           </p:nvPr>
@@ -601,8 +674,10 @@
           <a:bodyPr/>
           <a:lstStyle/>
           <a:p>
-            <a:pPr/>
-            <a:fld id="{86CB4B4D-7CA3-9044-876B-883B54F8677D}" type="slidenum"/>
+            <a:fld id="{86CB4B4D-7CA3-9044-876B-883B54F8677D}" type="slidenum">
+              <a:t>‹#›</a:t>
+            </a:fld>
+            <a:endParaRPr/>
           </a:p>
         </p:txBody>
       </p:sp>
@@ -611,18 +686,19 @@
   <p:clrMapOvr>
     <a:masterClrMapping/>
   </p:clrMapOvr>
-  <p:transition xmlns:p14="http://schemas.microsoft.com/office/powerpoint/2010/main" spd="med" advClick="1"/>
+  <p:transition spd="med"/>
 </p:sldLayout>
 </file>
 
 <file path=ppt/slideLayouts/slideLayout10.xml><?xml version="1.0" encoding="utf-8"?>
-<p:sldLayout xmlns:a="http://schemas.openxmlformats.org/drawingml/2006/main" xmlns:r="http://schemas.openxmlformats.org/officeDocument/2006/relationships" xmlns:p="http://schemas.openxmlformats.org/presentationml/2006/main" xmlns:m="http://schemas.openxmlformats.org/officeDocument/2006/math" xmlns:a14="http://schemas.microsoft.com/office/drawing/2010/main" type="tx" showMasterSp="1" showMasterPhAnim="1">
+<p:sldLayout xmlns:a="http://schemas.openxmlformats.org/drawingml/2006/main" xmlns:r="http://schemas.openxmlformats.org/officeDocument/2006/relationships" xmlns:p="http://schemas.openxmlformats.org/presentationml/2006/main" type="tx">
   <p:cSld name="Только заголовок">
     <p:bg>
       <p:bgPr>
         <a:solidFill>
           <a:srgbClr val="FFFFFF"/>
         </a:solidFill>
+        <a:effectLst/>
       </p:bgPr>
     </p:bg>
     <p:spTree>
@@ -642,7 +718,9 @@
       <p:sp>
         <p:nvSpPr>
           <p:cNvPr id="107" name="Автор и дата"/>
-          <p:cNvSpPr txBox="1"/>
+          <p:cNvSpPr txBox="1">
+            <a:spLocks noGrp="1"/>
+          </p:cNvSpPr>
           <p:nvPr>
             <p:ph type="body" sz="quarter" idx="21" hasCustomPrompt="1"/>
           </p:nvPr>
@@ -663,7 +741,7 @@
               <a:spcBef>
                 <a:spcPts val="2500"/>
               </a:spcBef>
-              <a:defRPr spc="-43" sz="1440">
+              <a:defRPr sz="1440" spc="-43">
                 <a:latin typeface="Avenir Next Medium"/>
                 <a:ea typeface="Avenir Next Medium"/>
                 <a:cs typeface="Avenir Next Medium"/>
@@ -672,7 +750,6 @@
             </a:lvl1pPr>
           </a:lstStyle>
           <a:p>
-            <a:pPr/>
             <a:r>
               <a:t>Автор и дата</a:t>
             </a:r>
@@ -682,7 +759,9 @@
       <p:sp>
         <p:nvSpPr>
           <p:cNvPr id="108" name="Подзаголовок слайда"/>
-          <p:cNvSpPr txBox="1"/>
+          <p:cNvSpPr txBox="1">
+            <a:spLocks noGrp="1"/>
+          </p:cNvSpPr>
           <p:nvPr>
             <p:ph type="body" sz="quarter" idx="22" hasCustomPrompt="1"/>
           </p:nvPr>
@@ -700,11 +779,10 @@
           <a:bodyPr/>
           <a:lstStyle>
             <a:lvl1pPr defTabSz="473202">
-              <a:defRPr spc="-77" sz="2592"/>
+              <a:defRPr sz="2592" spc="-77"/>
             </a:lvl1pPr>
           </a:lstStyle>
           <a:p>
-            <a:pPr/>
             <a:r>
               <a:t>Подзаголовок слайда </a:t>
             </a:r>
@@ -737,15 +815,18 @@
           <a:lstStyle/>
           <a:p>
             <a:pPr algn="ctr" defTabSz="821531">
-              <a:defRPr spc="-36" sz="1800"/>
+              <a:defRPr sz="1800" spc="-36"/>
             </a:pPr>
+            <a:endParaRPr/>
           </a:p>
         </p:txBody>
       </p:sp>
       <p:sp>
         <p:nvSpPr>
           <p:cNvPr id="110" name="Заголовок слайда"/>
-          <p:cNvSpPr txBox="1"/>
+          <p:cNvSpPr txBox="1">
+            <a:spLocks noGrp="1"/>
+          </p:cNvSpPr>
           <p:nvPr>
             <p:ph type="title" hasCustomPrompt="1"/>
           </p:nvPr>
@@ -763,11 +844,10 @@
           <a:bodyPr anchor="t"/>
           <a:lstStyle>
             <a:lvl1pPr defTabSz="584200">
-              <a:defRPr spc="-391" sz="9800"/>
+              <a:defRPr sz="9800" spc="-391"/>
             </a:lvl1pPr>
           </a:lstStyle>
           <a:p>
-            <a:pPr/>
             <a:r>
               <a:t>Заголовок слайда</a:t>
             </a:r>
@@ -777,7 +857,9 @@
       <p:sp>
         <p:nvSpPr>
           <p:cNvPr id="111" name="Номер слайда"/>
-          <p:cNvSpPr txBox="1"/>
+          <p:cNvSpPr txBox="1">
+            <a:spLocks noGrp="1"/>
+          </p:cNvSpPr>
           <p:nvPr>
             <p:ph type="sldNum" sz="quarter" idx="2"/>
           </p:nvPr>
@@ -799,8 +881,10 @@
             </a:lvl1pPr>
           </a:lstStyle>
           <a:p>
-            <a:pPr/>
-            <a:fld id="{86CB4B4D-7CA3-9044-876B-883B54F8677D}" type="slidenum"/>
+            <a:fld id="{86CB4B4D-7CA3-9044-876B-883B54F8677D}" type="slidenum">
+              <a:t>‹#›</a:t>
+            </a:fld>
+            <a:endParaRPr/>
           </a:p>
         </p:txBody>
       </p:sp>
@@ -809,18 +893,19 @@
   <p:clrMapOvr>
     <a:masterClrMapping/>
   </p:clrMapOvr>
-  <p:transition xmlns:p14="http://schemas.microsoft.com/office/powerpoint/2010/main" spd="med" advClick="1"/>
+  <p:transition spd="med"/>
 </p:sldLayout>
 </file>
 
 <file path=ppt/slideLayouts/slideLayout11.xml><?xml version="1.0" encoding="utf-8"?>
-<p:sldLayout xmlns:a="http://schemas.openxmlformats.org/drawingml/2006/main" xmlns:r="http://schemas.openxmlformats.org/officeDocument/2006/relationships" xmlns:p="http://schemas.openxmlformats.org/presentationml/2006/main" xmlns:m="http://schemas.openxmlformats.org/officeDocument/2006/math" xmlns:a14="http://schemas.microsoft.com/office/drawing/2010/main" type="tx" showMasterSp="1" showMasterPhAnim="1">
+<p:sldLayout xmlns:a="http://schemas.openxmlformats.org/drawingml/2006/main" xmlns:r="http://schemas.openxmlformats.org/officeDocument/2006/relationships" xmlns:p="http://schemas.openxmlformats.org/presentationml/2006/main" type="tx">
   <p:cSld name="Повестка дня">
     <p:bg>
       <p:bgPr>
         <a:solidFill>
           <a:srgbClr val="FFFFFF"/>
         </a:solidFill>
+        <a:effectLst/>
       </p:bgPr>
     </p:bg>
     <p:spTree>
@@ -840,7 +925,9 @@
       <p:sp>
         <p:nvSpPr>
           <p:cNvPr id="118" name="Автор и дата"/>
-          <p:cNvSpPr txBox="1"/>
+          <p:cNvSpPr txBox="1">
+            <a:spLocks noGrp="1"/>
+          </p:cNvSpPr>
           <p:nvPr>
             <p:ph type="body" sz="quarter" idx="21" hasCustomPrompt="1"/>
           </p:nvPr>
@@ -861,7 +948,7 @@
               <a:spcBef>
                 <a:spcPts val="2500"/>
               </a:spcBef>
-              <a:defRPr spc="-43" sz="1440">
+              <a:defRPr sz="1440" spc="-43">
                 <a:latin typeface="Avenir Next Medium"/>
                 <a:ea typeface="Avenir Next Medium"/>
                 <a:cs typeface="Avenir Next Medium"/>
@@ -870,7 +957,6 @@
             </a:lvl1pPr>
           </a:lstStyle>
           <a:p>
-            <a:pPr/>
             <a:r>
               <a:t>Автор и дата</a:t>
             </a:r>
@@ -880,7 +966,9 @@
       <p:sp>
         <p:nvSpPr>
           <p:cNvPr id="119" name="Подзаголовок повестки дня"/>
-          <p:cNvSpPr txBox="1"/>
+          <p:cNvSpPr txBox="1">
+            <a:spLocks noGrp="1"/>
+          </p:cNvSpPr>
           <p:nvPr>
             <p:ph type="body" sz="quarter" idx="22" hasCustomPrompt="1"/>
           </p:nvPr>
@@ -898,11 +986,10 @@
           <a:bodyPr/>
           <a:lstStyle>
             <a:lvl1pPr defTabSz="473202">
-              <a:defRPr spc="-77" sz="2592"/>
+              <a:defRPr sz="2592" spc="-77"/>
             </a:lvl1pPr>
           </a:lstStyle>
           <a:p>
-            <a:pPr/>
             <a:r>
               <a:t>Подзаголовок повестки дня</a:t>
             </a:r>
@@ -912,7 +999,9 @@
       <p:sp>
         <p:nvSpPr>
           <p:cNvPr id="120" name="Уровень текста 1…"/>
-          <p:cNvSpPr txBox="1"/>
+          <p:cNvSpPr txBox="1">
+            <a:spLocks noGrp="1"/>
+          </p:cNvSpPr>
           <p:nvPr>
             <p:ph type="body" sz="half" idx="1" hasCustomPrompt="1"/>
           </p:nvPr>
@@ -933,7 +1022,7 @@
               <a:spcBef>
                 <a:spcPts val="3200"/>
               </a:spcBef>
-              <a:defRPr b="1" cap="none" spc="-52" sz="5200" u="sng">
+              <a:defRPr sz="5200" b="1" u="sng" cap="none" spc="-52">
                 <a:latin typeface="+mn-lt"/>
                 <a:ea typeface="+mn-ea"/>
                 <a:cs typeface="+mn-cs"/>
@@ -944,7 +1033,7 @@
               <a:spcBef>
                 <a:spcPts val="3200"/>
               </a:spcBef>
-              <a:defRPr b="1" cap="none" spc="-52" sz="5200" u="sng">
+              <a:defRPr sz="5200" b="1" u="sng" cap="none" spc="-52">
                 <a:latin typeface="+mn-lt"/>
                 <a:ea typeface="+mn-ea"/>
                 <a:cs typeface="+mn-cs"/>
@@ -955,7 +1044,7 @@
               <a:spcBef>
                 <a:spcPts val="3200"/>
               </a:spcBef>
-              <a:defRPr b="1" cap="none" spc="-52" sz="5200" u="sng">
+              <a:defRPr sz="5200" b="1" u="sng" cap="none" spc="-52">
                 <a:latin typeface="+mn-lt"/>
                 <a:ea typeface="+mn-ea"/>
                 <a:cs typeface="+mn-cs"/>
@@ -966,7 +1055,7 @@
               <a:spcBef>
                 <a:spcPts val="3200"/>
               </a:spcBef>
-              <a:defRPr b="1" cap="none" spc="-52" sz="5200" u="sng">
+              <a:defRPr sz="5200" b="1" u="sng" cap="none" spc="-52">
                 <a:latin typeface="+mn-lt"/>
                 <a:ea typeface="+mn-ea"/>
                 <a:cs typeface="+mn-cs"/>
@@ -977,7 +1066,7 @@
               <a:spcBef>
                 <a:spcPts val="3200"/>
               </a:spcBef>
-              <a:defRPr b="1" cap="none" spc="-52" sz="5200" u="sng">
+              <a:defRPr sz="5200" b="1" u="sng" cap="none" spc="-52">
                 <a:latin typeface="+mn-lt"/>
                 <a:ea typeface="+mn-ea"/>
                 <a:cs typeface="+mn-cs"/>
@@ -986,34 +1075,25 @@
             </a:lvl5pPr>
           </a:lstStyle>
           <a:p>
-            <a:pPr/>
             <a:r>
               <a:t>Темы повестки дня</a:t>
             </a:r>
           </a:p>
           <a:p>
             <a:pPr lvl="1"/>
-            <a:r>
-              <a:t/>
-            </a:r>
+            <a:endParaRPr/>
           </a:p>
           <a:p>
             <a:pPr lvl="2"/>
-            <a:r>
-              <a:t/>
-            </a:r>
+            <a:endParaRPr/>
           </a:p>
           <a:p>
             <a:pPr lvl="3"/>
-            <a:r>
-              <a:t/>
-            </a:r>
+            <a:endParaRPr/>
           </a:p>
           <a:p>
             <a:pPr lvl="4"/>
-            <a:r>
-              <a:t/>
-            </a:r>
+            <a:endParaRPr/>
           </a:p>
         </p:txBody>
       </p:sp>
@@ -1043,15 +1123,18 @@
           <a:lstStyle/>
           <a:p>
             <a:pPr algn="ctr" defTabSz="821531">
-              <a:defRPr spc="-36" sz="1800"/>
+              <a:defRPr sz="1800" spc="-36"/>
             </a:pPr>
+            <a:endParaRPr/>
           </a:p>
         </p:txBody>
       </p:sp>
       <p:sp>
         <p:nvSpPr>
           <p:cNvPr id="122" name="Заголовок повестки дня"/>
-          <p:cNvSpPr txBox="1"/>
+          <p:cNvSpPr txBox="1">
+            <a:spLocks noGrp="1"/>
+          </p:cNvSpPr>
           <p:nvPr>
             <p:ph type="title" hasCustomPrompt="1"/>
           </p:nvPr>
@@ -1069,11 +1152,10 @@
           <a:bodyPr anchor="t"/>
           <a:lstStyle>
             <a:lvl1pPr defTabSz="584200">
-              <a:defRPr spc="-391" sz="9800"/>
+              <a:defRPr sz="9800" spc="-391"/>
             </a:lvl1pPr>
           </a:lstStyle>
           <a:p>
-            <a:pPr/>
             <a:r>
               <a:t>Заголовок повестки дня</a:t>
             </a:r>
@@ -1083,7 +1165,9 @@
       <p:sp>
         <p:nvSpPr>
           <p:cNvPr id="123" name="Номер слайда"/>
-          <p:cNvSpPr txBox="1"/>
+          <p:cNvSpPr txBox="1">
+            <a:spLocks noGrp="1"/>
+          </p:cNvSpPr>
           <p:nvPr>
             <p:ph type="sldNum" sz="quarter" idx="2"/>
           </p:nvPr>
@@ -1105,8 +1189,10 @@
             </a:lvl1pPr>
           </a:lstStyle>
           <a:p>
-            <a:pPr/>
-            <a:fld id="{86CB4B4D-7CA3-9044-876B-883B54F8677D}" type="slidenum"/>
+            <a:fld id="{86CB4B4D-7CA3-9044-876B-883B54F8677D}" type="slidenum">
+              <a:t>‹#›</a:t>
+            </a:fld>
+            <a:endParaRPr/>
           </a:p>
         </p:txBody>
       </p:sp>
@@ -1115,18 +1201,19 @@
   <p:clrMapOvr>
     <a:masterClrMapping/>
   </p:clrMapOvr>
-  <p:transition xmlns:p14="http://schemas.microsoft.com/office/powerpoint/2010/main" spd="med" advClick="1"/>
+  <p:transition spd="med"/>
 </p:sldLayout>
 </file>
 
 <file path=ppt/slideLayouts/slideLayout12.xml><?xml version="1.0" encoding="utf-8"?>
-<p:sldLayout xmlns:a="http://schemas.openxmlformats.org/drawingml/2006/main" xmlns:r="http://schemas.openxmlformats.org/officeDocument/2006/relationships" xmlns:p="http://schemas.openxmlformats.org/presentationml/2006/main" xmlns:m="http://schemas.openxmlformats.org/officeDocument/2006/math" xmlns:a14="http://schemas.microsoft.com/office/drawing/2010/main" type="tx" showMasterSp="1" showMasterPhAnim="1">
+<p:sldLayout xmlns:a="http://schemas.openxmlformats.org/drawingml/2006/main" xmlns:r="http://schemas.openxmlformats.org/officeDocument/2006/relationships" xmlns:p="http://schemas.openxmlformats.org/presentationml/2006/main" type="tx">
   <p:cSld name="Информационное сообщение">
     <p:bg>
       <p:bgPr>
         <a:solidFill>
           <a:srgbClr val="FFFFFF"/>
         </a:solidFill>
+        <a:effectLst/>
       </p:bgPr>
     </p:bg>
     <p:spTree>
@@ -1146,7 +1233,9 @@
       <p:sp>
         <p:nvSpPr>
           <p:cNvPr id="130" name="Уровень текста 1…"/>
-          <p:cNvSpPr txBox="1"/>
+          <p:cNvSpPr txBox="1">
+            <a:spLocks noGrp="1"/>
+          </p:cNvSpPr>
           <p:nvPr>
             <p:ph type="body" sz="quarter" idx="1" hasCustomPrompt="1"/>
           </p:nvPr>
@@ -1164,7 +1253,7 @@
           <a:bodyPr anchor="ctr"/>
           <a:lstStyle>
             <a:lvl1pPr algn="ctr" defTabSz="1160859">
-              <a:defRPr b="1" spc="-400" sz="10000">
+              <a:defRPr sz="10000" b="1" spc="-400">
                 <a:latin typeface="+mn-lt"/>
                 <a:ea typeface="+mn-ea"/>
                 <a:cs typeface="+mn-cs"/>
@@ -1172,7 +1261,7 @@
               </a:defRPr>
             </a:lvl1pPr>
             <a:lvl2pPr algn="ctr" defTabSz="1160859">
-              <a:defRPr b="1" spc="-400" sz="10000">
+              <a:defRPr sz="10000" b="1" spc="-400">
                 <a:latin typeface="+mn-lt"/>
                 <a:ea typeface="+mn-ea"/>
                 <a:cs typeface="+mn-cs"/>
@@ -1180,7 +1269,7 @@
               </a:defRPr>
             </a:lvl2pPr>
             <a:lvl3pPr algn="ctr" defTabSz="1160859">
-              <a:defRPr b="1" spc="-400" sz="10000">
+              <a:defRPr sz="10000" b="1" spc="-400">
                 <a:latin typeface="+mn-lt"/>
                 <a:ea typeface="+mn-ea"/>
                 <a:cs typeface="+mn-cs"/>
@@ -1188,7 +1277,7 @@
               </a:defRPr>
             </a:lvl3pPr>
             <a:lvl4pPr algn="ctr" defTabSz="1160859">
-              <a:defRPr b="1" spc="-400" sz="10000">
+              <a:defRPr sz="10000" b="1" spc="-400">
                 <a:latin typeface="+mn-lt"/>
                 <a:ea typeface="+mn-ea"/>
                 <a:cs typeface="+mn-cs"/>
@@ -1196,7 +1285,7 @@
               </a:defRPr>
             </a:lvl4pPr>
             <a:lvl5pPr algn="ctr" defTabSz="1160859">
-              <a:defRPr b="1" spc="-400" sz="10000">
+              <a:defRPr sz="10000" b="1" spc="-400">
                 <a:latin typeface="+mn-lt"/>
                 <a:ea typeface="+mn-ea"/>
                 <a:cs typeface="+mn-cs"/>
@@ -1205,41 +1294,34 @@
             </a:lvl5pPr>
           </a:lstStyle>
           <a:p>
-            <a:pPr/>
             <a:r>
               <a:t>Информационное сообщение</a:t>
             </a:r>
           </a:p>
           <a:p>
             <a:pPr lvl="1"/>
-            <a:r>
-              <a:t/>
-            </a:r>
+            <a:endParaRPr/>
           </a:p>
           <a:p>
             <a:pPr lvl="2"/>
-            <a:r>
-              <a:t/>
-            </a:r>
+            <a:endParaRPr/>
           </a:p>
           <a:p>
             <a:pPr lvl="3"/>
-            <a:r>
-              <a:t/>
-            </a:r>
+            <a:endParaRPr/>
           </a:p>
           <a:p>
             <a:pPr lvl="4"/>
-            <a:r>
-              <a:t/>
-            </a:r>
+            <a:endParaRPr/>
           </a:p>
         </p:txBody>
       </p:sp>
       <p:sp>
         <p:nvSpPr>
           <p:cNvPr id="131" name="Номер слайда"/>
-          <p:cNvSpPr txBox="1"/>
+          <p:cNvSpPr txBox="1">
+            <a:spLocks noGrp="1"/>
+          </p:cNvSpPr>
           <p:nvPr>
             <p:ph type="sldNum" sz="quarter" idx="2"/>
           </p:nvPr>
@@ -1261,8 +1343,10 @@
             </a:lvl1pPr>
           </a:lstStyle>
           <a:p>
-            <a:pPr/>
-            <a:fld id="{86CB4B4D-7CA3-9044-876B-883B54F8677D}" type="slidenum"/>
+            <a:fld id="{86CB4B4D-7CA3-9044-876B-883B54F8677D}" type="slidenum">
+              <a:t>‹#›</a:t>
+            </a:fld>
+            <a:endParaRPr/>
           </a:p>
         </p:txBody>
       </p:sp>
@@ -1271,18 +1355,19 @@
   <p:clrMapOvr>
     <a:masterClrMapping/>
   </p:clrMapOvr>
-  <p:transition xmlns:p14="http://schemas.microsoft.com/office/powerpoint/2010/main" spd="med" advClick="1"/>
+  <p:transition spd="med"/>
 </p:sldLayout>
 </file>
 
 <file path=ppt/slideLayouts/slideLayout13.xml><?xml version="1.0" encoding="utf-8"?>
-<p:sldLayout xmlns:a="http://schemas.openxmlformats.org/drawingml/2006/main" xmlns:r="http://schemas.openxmlformats.org/officeDocument/2006/relationships" xmlns:p="http://schemas.openxmlformats.org/presentationml/2006/main" xmlns:m="http://schemas.openxmlformats.org/officeDocument/2006/math" xmlns:a14="http://schemas.microsoft.com/office/drawing/2010/main" type="tx" showMasterSp="1" showMasterPhAnim="1">
+<p:sldLayout xmlns:a="http://schemas.openxmlformats.org/drawingml/2006/main" xmlns:r="http://schemas.openxmlformats.org/officeDocument/2006/relationships" xmlns:p="http://schemas.openxmlformats.org/presentationml/2006/main" type="tx">
   <p:cSld name="Важный факт">
     <p:bg>
       <p:bgPr>
         <a:solidFill>
           <a:srgbClr val="FFFFFF"/>
         </a:solidFill>
+        <a:effectLst/>
       </p:bgPr>
     </p:bg>
     <p:spTree>
@@ -1302,7 +1387,9 @@
       <p:sp>
         <p:nvSpPr>
           <p:cNvPr id="138" name="Уровень текста 1…"/>
-          <p:cNvSpPr txBox="1"/>
+          <p:cNvSpPr txBox="1">
+            <a:spLocks noGrp="1"/>
+          </p:cNvSpPr>
           <p:nvPr>
             <p:ph type="body" sz="quarter" idx="1" hasCustomPrompt="1"/>
           </p:nvPr>
@@ -1323,7 +1410,7 @@
               <a:lnSpc>
                 <a:spcPct val="70000"/>
               </a:lnSpc>
-              <a:defRPr b="1" spc="-444" sz="22200">
+              <a:defRPr sz="22200" b="1" spc="-444">
                 <a:latin typeface="+mn-lt"/>
                 <a:ea typeface="+mn-ea"/>
                 <a:cs typeface="+mn-cs"/>
@@ -1334,7 +1421,7 @@
               <a:lnSpc>
                 <a:spcPct val="70000"/>
               </a:lnSpc>
-              <a:defRPr b="1" spc="-444" sz="22200">
+              <a:defRPr sz="22200" b="1" spc="-444">
                 <a:latin typeface="+mn-lt"/>
                 <a:ea typeface="+mn-ea"/>
                 <a:cs typeface="+mn-cs"/>
@@ -1345,7 +1432,7 @@
               <a:lnSpc>
                 <a:spcPct val="70000"/>
               </a:lnSpc>
-              <a:defRPr b="1" spc="-444" sz="22200">
+              <a:defRPr sz="22200" b="1" spc="-444">
                 <a:latin typeface="+mn-lt"/>
                 <a:ea typeface="+mn-ea"/>
                 <a:cs typeface="+mn-cs"/>
@@ -1356,7 +1443,7 @@
               <a:lnSpc>
                 <a:spcPct val="70000"/>
               </a:lnSpc>
-              <a:defRPr b="1" spc="-444" sz="22200">
+              <a:defRPr sz="22200" b="1" spc="-444">
                 <a:latin typeface="+mn-lt"/>
                 <a:ea typeface="+mn-ea"/>
                 <a:cs typeface="+mn-cs"/>
@@ -1367,7 +1454,7 @@
               <a:lnSpc>
                 <a:spcPct val="70000"/>
               </a:lnSpc>
-              <a:defRPr b="1" spc="-444" sz="22200">
+              <a:defRPr sz="22200" b="1" spc="-444">
                 <a:latin typeface="+mn-lt"/>
                 <a:ea typeface="+mn-ea"/>
                 <a:cs typeface="+mn-cs"/>
@@ -1376,34 +1463,25 @@
             </a:lvl5pPr>
           </a:lstStyle>
           <a:p>
-            <a:pPr/>
             <a:r>
               <a:t>100 %</a:t>
             </a:r>
           </a:p>
           <a:p>
             <a:pPr lvl="1"/>
-            <a:r>
-              <a:t/>
-            </a:r>
+            <a:endParaRPr/>
           </a:p>
           <a:p>
             <a:pPr lvl="2"/>
-            <a:r>
-              <a:t/>
-            </a:r>
+            <a:endParaRPr/>
           </a:p>
           <a:p>
             <a:pPr lvl="3"/>
-            <a:r>
-              <a:t/>
-            </a:r>
+            <a:endParaRPr/>
           </a:p>
           <a:p>
             <a:pPr lvl="4"/>
-            <a:r>
-              <a:t/>
-            </a:r>
+            <a:endParaRPr/>
           </a:p>
         </p:txBody>
       </p:sp>
@@ -1433,15 +1511,18 @@
           <a:lstStyle/>
           <a:p>
             <a:pPr algn="ctr" defTabSz="821531">
-              <a:defRPr spc="-36" sz="1800"/>
+              <a:defRPr sz="1800" spc="-36"/>
             </a:pPr>
+            <a:endParaRPr/>
           </a:p>
         </p:txBody>
       </p:sp>
       <p:sp>
         <p:nvSpPr>
           <p:cNvPr id="140" name="Информация о факте"/>
-          <p:cNvSpPr txBox="1"/>
+          <p:cNvSpPr txBox="1">
+            <a:spLocks noGrp="1"/>
+          </p:cNvSpPr>
           <p:nvPr>
             <p:ph type="body" sz="quarter" idx="21" hasCustomPrompt="1"/>
           </p:nvPr>
@@ -1462,11 +1543,10 @@
               <a:spcBef>
                 <a:spcPts val="2100"/>
               </a:spcBef>
-              <a:defRPr spc="-64" sz="2144"/>
+              <a:defRPr sz="2144" spc="-64"/>
             </a:lvl1pPr>
           </a:lstStyle>
           <a:p>
-            <a:pPr/>
             <a:r>
               <a:t>Информация о факте</a:t>
             </a:r>
@@ -1476,7 +1556,9 @@
       <p:sp>
         <p:nvSpPr>
           <p:cNvPr id="141" name="Номер слайда"/>
-          <p:cNvSpPr txBox="1"/>
+          <p:cNvSpPr txBox="1">
+            <a:spLocks noGrp="1"/>
+          </p:cNvSpPr>
           <p:nvPr>
             <p:ph type="sldNum" sz="quarter" idx="2"/>
           </p:nvPr>
@@ -1498,8 +1580,10 @@
             </a:lvl1pPr>
           </a:lstStyle>
           <a:p>
-            <a:pPr/>
-            <a:fld id="{86CB4B4D-7CA3-9044-876B-883B54F8677D}" type="slidenum"/>
+            <a:fld id="{86CB4B4D-7CA3-9044-876B-883B54F8677D}" type="slidenum">
+              <a:t>‹#›</a:t>
+            </a:fld>
+            <a:endParaRPr/>
           </a:p>
         </p:txBody>
       </p:sp>
@@ -1508,18 +1592,19 @@
   <p:clrMapOvr>
     <a:masterClrMapping/>
   </p:clrMapOvr>
-  <p:transition xmlns:p14="http://schemas.microsoft.com/office/powerpoint/2010/main" spd="med" advClick="1"/>
+  <p:transition spd="med"/>
 </p:sldLayout>
 </file>
 
 <file path=ppt/slideLayouts/slideLayout14.xml><?xml version="1.0" encoding="utf-8"?>
-<p:sldLayout xmlns:a="http://schemas.openxmlformats.org/drawingml/2006/main" xmlns:r="http://schemas.openxmlformats.org/officeDocument/2006/relationships" xmlns:p="http://schemas.openxmlformats.org/presentationml/2006/main" xmlns:m="http://schemas.openxmlformats.org/officeDocument/2006/math" xmlns:a14="http://schemas.microsoft.com/office/drawing/2010/main" type="tx" showMasterSp="1" showMasterPhAnim="1">
+<p:sldLayout xmlns:a="http://schemas.openxmlformats.org/drawingml/2006/main" xmlns:r="http://schemas.openxmlformats.org/officeDocument/2006/relationships" xmlns:p="http://schemas.openxmlformats.org/presentationml/2006/main" type="tx">
   <p:cSld name="Цитата">
     <p:bg>
       <p:bgPr>
         <a:solidFill>
           <a:srgbClr val="FFFFFF"/>
         </a:solidFill>
+        <a:effectLst/>
       </p:bgPr>
     </p:bg>
     <p:spTree>
@@ -1539,7 +1624,9 @@
       <p:sp>
         <p:nvSpPr>
           <p:cNvPr id="148" name="Авторство"/>
-          <p:cNvSpPr txBox="1"/>
+          <p:cNvSpPr txBox="1">
+            <a:spLocks noGrp="1"/>
+          </p:cNvSpPr>
           <p:nvPr>
             <p:ph type="body" sz="quarter" idx="21" hasCustomPrompt="1"/>
           </p:nvPr>
@@ -1557,11 +1644,10 @@
           <a:bodyPr/>
           <a:lstStyle>
             <a:lvl1pPr defTabSz="496570">
-              <a:defRPr spc="-61" sz="2040"/>
+              <a:defRPr sz="2040" spc="-61"/>
             </a:lvl1pPr>
           </a:lstStyle>
           <a:p>
-            <a:pPr/>
             <a:r>
               <a:t>Авторство </a:t>
             </a:r>
@@ -1594,15 +1680,18 @@
           <a:lstStyle/>
           <a:p>
             <a:pPr algn="ctr" defTabSz="821531">
-              <a:defRPr spc="-36" sz="1800"/>
+              <a:defRPr sz="1800" spc="-36"/>
             </a:pPr>
+            <a:endParaRPr/>
           </a:p>
         </p:txBody>
       </p:sp>
       <p:sp>
         <p:nvSpPr>
           <p:cNvPr id="150" name="Уровень текста 1…"/>
-          <p:cNvSpPr txBox="1"/>
+          <p:cNvSpPr txBox="1">
+            <a:spLocks noGrp="1"/>
+          </p:cNvSpPr>
           <p:nvPr>
             <p:ph type="body" sz="quarter" idx="1" hasCustomPrompt="1"/>
           </p:nvPr>
@@ -1623,7 +1712,7 @@
               <a:lnSpc>
                 <a:spcPct val="70000"/>
               </a:lnSpc>
-              <a:defRPr b="1" i="1" spc="-528" sz="13200">
+              <a:defRPr sz="13200" b="1" i="1" spc="-528">
                 <a:latin typeface="+mn-lt"/>
                 <a:ea typeface="+mn-ea"/>
                 <a:cs typeface="+mn-cs"/>
@@ -1634,7 +1723,7 @@
               <a:lnSpc>
                 <a:spcPct val="70000"/>
               </a:lnSpc>
-              <a:defRPr b="1" i="1" spc="-528" sz="13200">
+              <a:defRPr sz="13200" b="1" i="1" spc="-528">
                 <a:latin typeface="+mn-lt"/>
                 <a:ea typeface="+mn-ea"/>
                 <a:cs typeface="+mn-cs"/>
@@ -1645,7 +1734,7 @@
               <a:lnSpc>
                 <a:spcPct val="70000"/>
               </a:lnSpc>
-              <a:defRPr b="1" i="1" spc="-528" sz="13200">
+              <a:defRPr sz="13200" b="1" i="1" spc="-528">
                 <a:latin typeface="+mn-lt"/>
                 <a:ea typeface="+mn-ea"/>
                 <a:cs typeface="+mn-cs"/>
@@ -1656,7 +1745,7 @@
               <a:lnSpc>
                 <a:spcPct val="70000"/>
               </a:lnSpc>
-              <a:defRPr b="1" i="1" spc="-528" sz="13200">
+              <a:defRPr sz="13200" b="1" i="1" spc="-528">
                 <a:latin typeface="+mn-lt"/>
                 <a:ea typeface="+mn-ea"/>
                 <a:cs typeface="+mn-cs"/>
@@ -1667,7 +1756,7 @@
               <a:lnSpc>
                 <a:spcPct val="70000"/>
               </a:lnSpc>
-              <a:defRPr b="1" i="1" spc="-528" sz="13200">
+              <a:defRPr sz="13200" b="1" i="1" spc="-528">
                 <a:latin typeface="+mn-lt"/>
                 <a:ea typeface="+mn-ea"/>
                 <a:cs typeface="+mn-cs"/>
@@ -1676,41 +1765,34 @@
             </a:lvl5pPr>
           </a:lstStyle>
           <a:p>
-            <a:pPr/>
             <a:r>
               <a:t>«Важная цитата»</a:t>
             </a:r>
           </a:p>
           <a:p>
             <a:pPr lvl="1"/>
-            <a:r>
-              <a:t/>
-            </a:r>
+            <a:endParaRPr/>
           </a:p>
           <a:p>
             <a:pPr lvl="2"/>
-            <a:r>
-              <a:t/>
-            </a:r>
+            <a:endParaRPr/>
           </a:p>
           <a:p>
             <a:pPr lvl="3"/>
-            <a:r>
-              <a:t/>
-            </a:r>
+            <a:endParaRPr/>
           </a:p>
           <a:p>
             <a:pPr lvl="4"/>
-            <a:r>
-              <a:t/>
-            </a:r>
+            <a:endParaRPr/>
           </a:p>
         </p:txBody>
       </p:sp>
       <p:sp>
         <p:nvSpPr>
           <p:cNvPr id="151" name="Номер слайда"/>
-          <p:cNvSpPr txBox="1"/>
+          <p:cNvSpPr txBox="1">
+            <a:spLocks noGrp="1"/>
+          </p:cNvSpPr>
           <p:nvPr>
             <p:ph type="sldNum" sz="quarter" idx="2"/>
           </p:nvPr>
@@ -1732,8 +1814,10 @@
             </a:lvl1pPr>
           </a:lstStyle>
           <a:p>
-            <a:pPr/>
-            <a:fld id="{86CB4B4D-7CA3-9044-876B-883B54F8677D}" type="slidenum"/>
+            <a:fld id="{86CB4B4D-7CA3-9044-876B-883B54F8677D}" type="slidenum">
+              <a:t>‹#›</a:t>
+            </a:fld>
+            <a:endParaRPr/>
           </a:p>
         </p:txBody>
       </p:sp>
@@ -1742,18 +1826,19 @@
   <p:clrMapOvr>
     <a:masterClrMapping/>
   </p:clrMapOvr>
-  <p:transition xmlns:p14="http://schemas.microsoft.com/office/powerpoint/2010/main" spd="med" advClick="1"/>
+  <p:transition spd="med"/>
 </p:sldLayout>
 </file>
 
 <file path=ppt/slideLayouts/slideLayout15.xml><?xml version="1.0" encoding="utf-8"?>
-<p:sldLayout xmlns:a="http://schemas.openxmlformats.org/drawingml/2006/main" xmlns:r="http://schemas.openxmlformats.org/officeDocument/2006/relationships" xmlns:p="http://schemas.openxmlformats.org/presentationml/2006/main" xmlns:m="http://schemas.openxmlformats.org/officeDocument/2006/math" xmlns:a14="http://schemas.microsoft.com/office/drawing/2010/main" type="tx" showMasterSp="1" showMasterPhAnim="1">
+<p:sldLayout xmlns:a="http://schemas.openxmlformats.org/drawingml/2006/main" xmlns:r="http://schemas.openxmlformats.org/officeDocument/2006/relationships" xmlns:p="http://schemas.openxmlformats.org/presentationml/2006/main" type="tx">
   <p:cSld name="Фото (3 шт.)">
     <p:bg>
       <p:bgPr>
         <a:solidFill>
           <a:srgbClr val="FFFFFF"/>
         </a:solidFill>
+        <a:effectLst/>
       </p:bgPr>
     </p:bg>
     <p:spTree>
@@ -1773,7 +1858,9 @@
       <p:sp>
         <p:nvSpPr>
           <p:cNvPr id="158" name="Вид сбоку на человека в жёлтой куртке с капюшоном на фоне жёлтых ставней"/>
-          <p:cNvSpPr/>
+          <p:cNvSpPr>
+            <a:spLocks noGrp="1"/>
+          </p:cNvSpPr>
           <p:nvPr>
             <p:ph type="pic" idx="21"/>
           </p:nvPr>
@@ -1793,14 +1880,16 @@
           </a:bodyPr>
           <a:lstStyle/>
           <a:p>
-            <a:pPr/>
+            <a:endParaRPr/>
           </a:p>
         </p:txBody>
       </p:sp>
       <p:sp>
         <p:nvSpPr>
           <p:cNvPr id="159" name="Вид со спины на человека в жёлтой кофте, который смотрит через отверстие в каменной стене"/>
-          <p:cNvSpPr/>
+          <p:cNvSpPr>
+            <a:spLocks noGrp="1"/>
+          </p:cNvSpPr>
           <p:nvPr>
             <p:ph type="pic" sz="quarter" idx="22"/>
           </p:nvPr>
@@ -1820,14 +1909,16 @@
           </a:bodyPr>
           <a:lstStyle/>
           <a:p>
-            <a:pPr/>
+            <a:endParaRPr/>
           </a:p>
         </p:txBody>
       </p:sp>
       <p:sp>
         <p:nvSpPr>
           <p:cNvPr id="160" name="Улыбающийся человек в синей кофте перед синей стеной"/>
-          <p:cNvSpPr/>
+          <p:cNvSpPr>
+            <a:spLocks noGrp="1"/>
+          </p:cNvSpPr>
           <p:nvPr>
             <p:ph type="pic" sz="quarter" idx="23"/>
           </p:nvPr>
@@ -1847,14 +1938,16 @@
           </a:bodyPr>
           <a:lstStyle/>
           <a:p>
-            <a:pPr/>
+            <a:endParaRPr/>
           </a:p>
         </p:txBody>
       </p:sp>
       <p:sp>
         <p:nvSpPr>
           <p:cNvPr id="161" name="Номер слайда"/>
-          <p:cNvSpPr txBox="1"/>
+          <p:cNvSpPr txBox="1">
+            <a:spLocks noGrp="1"/>
+          </p:cNvSpPr>
           <p:nvPr>
             <p:ph type="sldNum" sz="quarter" idx="2"/>
           </p:nvPr>
@@ -1876,8 +1969,10 @@
             </a:lvl1pPr>
           </a:lstStyle>
           <a:p>
-            <a:pPr/>
-            <a:fld id="{86CB4B4D-7CA3-9044-876B-883B54F8677D}" type="slidenum"/>
+            <a:fld id="{86CB4B4D-7CA3-9044-876B-883B54F8677D}" type="slidenum">
+              <a:t>‹#›</a:t>
+            </a:fld>
+            <a:endParaRPr/>
           </a:p>
         </p:txBody>
       </p:sp>
@@ -1886,18 +1981,19 @@
   <p:clrMapOvr>
     <a:masterClrMapping/>
   </p:clrMapOvr>
-  <p:transition xmlns:p14="http://schemas.microsoft.com/office/powerpoint/2010/main" spd="med" advClick="1"/>
+  <p:transition spd="med"/>
 </p:sldLayout>
 </file>
 
 <file path=ppt/slideLayouts/slideLayout16.xml><?xml version="1.0" encoding="utf-8"?>
-<p:sldLayout xmlns:a="http://schemas.openxmlformats.org/drawingml/2006/main" xmlns:r="http://schemas.openxmlformats.org/officeDocument/2006/relationships" xmlns:p="http://schemas.openxmlformats.org/presentationml/2006/main" xmlns:m="http://schemas.openxmlformats.org/officeDocument/2006/math" xmlns:a14="http://schemas.microsoft.com/office/drawing/2010/main" type="tx" showMasterSp="1" showMasterPhAnim="1">
+<p:sldLayout xmlns:a="http://schemas.openxmlformats.org/drawingml/2006/main" xmlns:r="http://schemas.openxmlformats.org/officeDocument/2006/relationships" xmlns:p="http://schemas.openxmlformats.org/presentationml/2006/main" type="tx">
   <p:cSld name="Фото">
     <p:bg>
       <p:bgPr>
         <a:solidFill>
           <a:srgbClr val="FFFFFF"/>
         </a:solidFill>
+        <a:effectLst/>
       </p:bgPr>
     </p:bg>
     <p:spTree>
@@ -1917,7 +2013,9 @@
       <p:sp>
         <p:nvSpPr>
           <p:cNvPr id="168" name="Человек в синих джинсах и синей кофте стоит на фоне красно-фиолетовой стены"/>
-          <p:cNvSpPr/>
+          <p:cNvSpPr>
+            <a:spLocks noGrp="1"/>
+          </p:cNvSpPr>
           <p:nvPr>
             <p:ph type="pic" idx="21"/>
           </p:nvPr>
@@ -1937,14 +2035,16 @@
           </a:bodyPr>
           <a:lstStyle/>
           <a:p>
-            <a:pPr/>
+            <a:endParaRPr/>
           </a:p>
         </p:txBody>
       </p:sp>
       <p:sp>
         <p:nvSpPr>
           <p:cNvPr id="169" name="Номер слайда"/>
-          <p:cNvSpPr txBox="1"/>
+          <p:cNvSpPr txBox="1">
+            <a:spLocks noGrp="1"/>
+          </p:cNvSpPr>
           <p:nvPr>
             <p:ph type="sldNum" sz="quarter" idx="2"/>
           </p:nvPr>
@@ -1966,8 +2066,10 @@
             </a:lvl1pPr>
           </a:lstStyle>
           <a:p>
-            <a:pPr/>
-            <a:fld id="{86CB4B4D-7CA3-9044-876B-883B54F8677D}" type="slidenum"/>
+            <a:fld id="{86CB4B4D-7CA3-9044-876B-883B54F8677D}" type="slidenum">
+              <a:t>‹#›</a:t>
+            </a:fld>
+            <a:endParaRPr/>
           </a:p>
         </p:txBody>
       </p:sp>
@@ -1976,18 +2078,19 @@
   <p:clrMapOvr>
     <a:masterClrMapping/>
   </p:clrMapOvr>
-  <p:transition xmlns:p14="http://schemas.microsoft.com/office/powerpoint/2010/main" spd="med" advClick="1"/>
+  <p:transition spd="med"/>
 </p:sldLayout>
 </file>
 
 <file path=ppt/slideLayouts/slideLayout17.xml><?xml version="1.0" encoding="utf-8"?>
-<p:sldLayout xmlns:a="http://schemas.openxmlformats.org/drawingml/2006/main" xmlns:r="http://schemas.openxmlformats.org/officeDocument/2006/relationships" xmlns:p="http://schemas.openxmlformats.org/presentationml/2006/main" xmlns:m="http://schemas.openxmlformats.org/officeDocument/2006/math" xmlns:a14="http://schemas.microsoft.com/office/drawing/2010/main" type="tx" showMasterSp="1" showMasterPhAnim="1">
+<p:sldLayout xmlns:a="http://schemas.openxmlformats.org/drawingml/2006/main" xmlns:r="http://schemas.openxmlformats.org/officeDocument/2006/relationships" xmlns:p="http://schemas.openxmlformats.org/presentationml/2006/main" type="tx">
   <p:cSld name="Пустой">
     <p:bg>
       <p:bgPr>
         <a:solidFill>
           <a:srgbClr val="FFFFFF"/>
         </a:solidFill>
+        <a:effectLst/>
       </p:bgPr>
     </p:bg>
     <p:spTree>
@@ -2007,7 +2110,9 @@
       <p:sp>
         <p:nvSpPr>
           <p:cNvPr id="176" name="Номер слайда"/>
-          <p:cNvSpPr txBox="1"/>
+          <p:cNvSpPr txBox="1">
+            <a:spLocks noGrp="1"/>
+          </p:cNvSpPr>
           <p:nvPr>
             <p:ph type="sldNum" sz="quarter" idx="2"/>
           </p:nvPr>
@@ -2029,8 +2134,10 @@
             </a:lvl1pPr>
           </a:lstStyle>
           <a:p>
-            <a:pPr/>
-            <a:fld id="{86CB4B4D-7CA3-9044-876B-883B54F8677D}" type="slidenum"/>
+            <a:fld id="{86CB4B4D-7CA3-9044-876B-883B54F8677D}" type="slidenum">
+              <a:t>‹#›</a:t>
+            </a:fld>
+            <a:endParaRPr/>
           </a:p>
         </p:txBody>
       </p:sp>
@@ -2039,18 +2146,19 @@
   <p:clrMapOvr>
     <a:masterClrMapping/>
   </p:clrMapOvr>
-  <p:transition xmlns:p14="http://schemas.microsoft.com/office/powerpoint/2010/main" spd="med" advClick="1"/>
+  <p:transition spd="med"/>
 </p:sldLayout>
 </file>
 
 <file path=ppt/slideLayouts/slideLayout2.xml><?xml version="1.0" encoding="utf-8"?>
-<p:sldLayout xmlns:a="http://schemas.openxmlformats.org/drawingml/2006/main" xmlns:r="http://schemas.openxmlformats.org/officeDocument/2006/relationships" xmlns:p="http://schemas.openxmlformats.org/presentationml/2006/main" xmlns:m="http://schemas.openxmlformats.org/officeDocument/2006/math" xmlns:a14="http://schemas.microsoft.com/office/drawing/2010/main" type="tx" showMasterSp="1" showMasterPhAnim="1">
+<p:sldLayout xmlns:a="http://schemas.openxmlformats.org/drawingml/2006/main" xmlns:r="http://schemas.openxmlformats.org/officeDocument/2006/relationships" xmlns:p="http://schemas.openxmlformats.org/presentationml/2006/main" type="tx">
   <p:cSld name="Заголовок и фото">
     <p:bg>
       <p:bgPr>
         <a:solidFill>
           <a:srgbClr val="FFFFFF"/>
         </a:solidFill>
+        <a:effectLst/>
       </p:bgPr>
     </p:bg>
     <p:spTree>
@@ -2070,7 +2178,9 @@
       <p:sp>
         <p:nvSpPr>
           <p:cNvPr id="20" name="Улыбающийся человек в солнцезащитных очках и жёлтой кофте стоит перед ярко-голубой стеной"/>
-          <p:cNvSpPr/>
+          <p:cNvSpPr>
+            <a:spLocks noGrp="1"/>
+          </p:cNvSpPr>
           <p:nvPr>
             <p:ph type="pic" idx="21"/>
           </p:nvPr>
@@ -2090,14 +2200,16 @@
           </a:bodyPr>
           <a:lstStyle/>
           <a:p>
-            <a:pPr/>
+            <a:endParaRPr/>
           </a:p>
         </p:txBody>
       </p:sp>
       <p:sp>
         <p:nvSpPr>
           <p:cNvPr id="21" name="Заголовок презентации"/>
-          <p:cNvSpPr txBox="1"/>
+          <p:cNvSpPr txBox="1">
+            <a:spLocks noGrp="1"/>
+          </p:cNvSpPr>
           <p:nvPr>
             <p:ph type="title" hasCustomPrompt="1"/>
           </p:nvPr>
@@ -2115,7 +2227,6 @@
           <a:bodyPr/>
           <a:lstStyle/>
           <a:p>
-            <a:pPr/>
             <a:r>
               <a:t>Заголовок презентации</a:t>
             </a:r>
@@ -2125,7 +2236,9 @@
       <p:sp>
         <p:nvSpPr>
           <p:cNvPr id="22" name="Уровень текста 1…"/>
-          <p:cNvSpPr txBox="1"/>
+          <p:cNvSpPr txBox="1">
+            <a:spLocks noGrp="1"/>
+          </p:cNvSpPr>
           <p:nvPr>
             <p:ph type="body" sz="quarter" idx="1" hasCustomPrompt="1"/>
           </p:nvPr>
@@ -2143,41 +2256,34 @@
           <a:bodyPr/>
           <a:lstStyle/>
           <a:p>
-            <a:pPr/>
             <a:r>
               <a:t>Подзаголовок презентации</a:t>
             </a:r>
           </a:p>
           <a:p>
             <a:pPr lvl="1"/>
-            <a:r>
-              <a:t/>
-            </a:r>
+            <a:endParaRPr/>
           </a:p>
           <a:p>
             <a:pPr lvl="2"/>
-            <a:r>
-              <a:t/>
-            </a:r>
+            <a:endParaRPr/>
           </a:p>
           <a:p>
             <a:pPr lvl="3"/>
-            <a:r>
-              <a:t/>
-            </a:r>
+            <a:endParaRPr/>
           </a:p>
           <a:p>
             <a:pPr lvl="4"/>
-            <a:r>
-              <a:t/>
-            </a:r>
+            <a:endParaRPr/>
           </a:p>
         </p:txBody>
       </p:sp>
       <p:sp>
         <p:nvSpPr>
           <p:cNvPr id="23" name="Номер слайда"/>
-          <p:cNvSpPr txBox="1"/>
+          <p:cNvSpPr txBox="1">
+            <a:spLocks noGrp="1"/>
+          </p:cNvSpPr>
           <p:nvPr>
             <p:ph type="sldNum" sz="quarter" idx="2"/>
           </p:nvPr>
@@ -2203,8 +2309,10 @@
             </a:lvl1pPr>
           </a:lstStyle>
           <a:p>
-            <a:pPr/>
-            <a:fld id="{86CB4B4D-7CA3-9044-876B-883B54F8677D}" type="slidenum"/>
+            <a:fld id="{86CB4B4D-7CA3-9044-876B-883B54F8677D}" type="slidenum">
+              <a:t>‹#›</a:t>
+            </a:fld>
+            <a:endParaRPr/>
           </a:p>
         </p:txBody>
       </p:sp>
@@ -2213,18 +2321,19 @@
   <p:clrMapOvr>
     <a:masterClrMapping/>
   </p:clrMapOvr>
-  <p:transition xmlns:p14="http://schemas.microsoft.com/office/powerpoint/2010/main" spd="med" advClick="1"/>
+  <p:transition spd="med"/>
 </p:sldLayout>
 </file>
 
 <file path=ppt/slideLayouts/slideLayout3.xml><?xml version="1.0" encoding="utf-8"?>
-<p:sldLayout xmlns:a="http://schemas.openxmlformats.org/drawingml/2006/main" xmlns:r="http://schemas.openxmlformats.org/officeDocument/2006/relationships" xmlns:p="http://schemas.openxmlformats.org/presentationml/2006/main" xmlns:m="http://schemas.openxmlformats.org/officeDocument/2006/math" xmlns:a14="http://schemas.microsoft.com/office/drawing/2010/main" type="tx" showMasterSp="1" showMasterPhAnim="1">
+<p:sldLayout xmlns:a="http://schemas.openxmlformats.org/drawingml/2006/main" xmlns:r="http://schemas.openxmlformats.org/officeDocument/2006/relationships" xmlns:p="http://schemas.openxmlformats.org/presentationml/2006/main" type="tx">
   <p:cSld name="Заголовок и фото (вариант)">
     <p:bg>
       <p:bgPr>
         <a:solidFill>
           <a:srgbClr val="FFFFFF"/>
         </a:solidFill>
+        <a:effectLst/>
       </p:bgPr>
     </p:bg>
     <p:spTree>
@@ -2244,7 +2353,9 @@
       <p:sp>
         <p:nvSpPr>
           <p:cNvPr id="30" name="Вид сбоку на человека в жёлтой куртке с капюшоном на фоне жёлтых ставней"/>
-          <p:cNvSpPr/>
+          <p:cNvSpPr>
+            <a:spLocks noGrp="1"/>
+          </p:cNvSpPr>
           <p:nvPr>
             <p:ph type="pic" idx="21"/>
           </p:nvPr>
@@ -2264,14 +2375,16 @@
           </a:bodyPr>
           <a:lstStyle/>
           <a:p>
-            <a:pPr/>
+            <a:endParaRPr/>
           </a:p>
         </p:txBody>
       </p:sp>
       <p:sp>
         <p:nvSpPr>
           <p:cNvPr id="31" name="Заголовок слайда"/>
-          <p:cNvSpPr txBox="1"/>
+          <p:cNvSpPr txBox="1">
+            <a:spLocks noGrp="1"/>
+          </p:cNvSpPr>
           <p:nvPr>
             <p:ph type="title" hasCustomPrompt="1"/>
           </p:nvPr>
@@ -2289,7 +2402,6 @@
           <a:bodyPr/>
           <a:lstStyle/>
           <a:p>
-            <a:pPr/>
             <a:r>
               <a:t>Заголовок слайда</a:t>
             </a:r>
@@ -2299,7 +2411,9 @@
       <p:sp>
         <p:nvSpPr>
           <p:cNvPr id="32" name="Уровень текста 1…"/>
-          <p:cNvSpPr txBox="1"/>
+          <p:cNvSpPr txBox="1">
+            <a:spLocks noGrp="1"/>
+          </p:cNvSpPr>
           <p:nvPr>
             <p:ph type="body" sz="quarter" idx="1" hasCustomPrompt="1"/>
           </p:nvPr>
@@ -2317,41 +2431,34 @@
           <a:bodyPr/>
           <a:lstStyle/>
           <a:p>
-            <a:pPr/>
             <a:r>
               <a:t>Подзаголовок слайда</a:t>
             </a:r>
           </a:p>
           <a:p>
             <a:pPr lvl="1"/>
-            <a:r>
-              <a:t/>
-            </a:r>
+            <a:endParaRPr/>
           </a:p>
           <a:p>
             <a:pPr lvl="2"/>
-            <a:r>
-              <a:t/>
-            </a:r>
+            <a:endParaRPr/>
           </a:p>
           <a:p>
             <a:pPr lvl="3"/>
-            <a:r>
-              <a:t/>
-            </a:r>
+            <a:endParaRPr/>
           </a:p>
           <a:p>
             <a:pPr lvl="4"/>
-            <a:r>
-              <a:t/>
-            </a:r>
+            <a:endParaRPr/>
           </a:p>
         </p:txBody>
       </p:sp>
       <p:sp>
         <p:nvSpPr>
           <p:cNvPr id="33" name="Номер слайда"/>
-          <p:cNvSpPr txBox="1"/>
+          <p:cNvSpPr txBox="1">
+            <a:spLocks noGrp="1"/>
+          </p:cNvSpPr>
           <p:nvPr>
             <p:ph type="sldNum" sz="quarter" idx="2"/>
           </p:nvPr>
@@ -2377,8 +2484,10 @@
             </a:lvl1pPr>
           </a:lstStyle>
           <a:p>
-            <a:pPr/>
-            <a:fld id="{86CB4B4D-7CA3-9044-876B-883B54F8677D}" type="slidenum"/>
+            <a:fld id="{86CB4B4D-7CA3-9044-876B-883B54F8677D}" type="slidenum">
+              <a:t>‹#›</a:t>
+            </a:fld>
+            <a:endParaRPr/>
           </a:p>
         </p:txBody>
       </p:sp>
@@ -2387,18 +2496,19 @@
   <p:clrMapOvr>
     <a:masterClrMapping/>
   </p:clrMapOvr>
-  <p:transition xmlns:p14="http://schemas.microsoft.com/office/powerpoint/2010/main" spd="med" advClick="1"/>
+  <p:transition spd="med"/>
 </p:sldLayout>
 </file>
 
 <file path=ppt/slideLayouts/slideLayout4.xml><?xml version="1.0" encoding="utf-8"?>
-<p:sldLayout xmlns:a="http://schemas.openxmlformats.org/drawingml/2006/main" xmlns:r="http://schemas.openxmlformats.org/officeDocument/2006/relationships" xmlns:p="http://schemas.openxmlformats.org/presentationml/2006/main" xmlns:m="http://schemas.openxmlformats.org/officeDocument/2006/math" xmlns:a14="http://schemas.microsoft.com/office/drawing/2010/main" type="tx" showMasterSp="1" showMasterPhAnim="1">
+<p:sldLayout xmlns:a="http://schemas.openxmlformats.org/drawingml/2006/main" xmlns:r="http://schemas.openxmlformats.org/officeDocument/2006/relationships" xmlns:p="http://schemas.openxmlformats.org/presentationml/2006/main" type="tx">
   <p:cSld name="Заголовок и пункты">
     <p:bg>
       <p:bgPr>
         <a:solidFill>
           <a:srgbClr val="FFFFFF"/>
         </a:solidFill>
+        <a:effectLst/>
       </p:bgPr>
     </p:bg>
     <p:spTree>
@@ -2418,7 +2528,9 @@
       <p:sp>
         <p:nvSpPr>
           <p:cNvPr id="40" name="Автор и дата"/>
-          <p:cNvSpPr txBox="1"/>
+          <p:cNvSpPr txBox="1">
+            <a:spLocks noGrp="1"/>
+          </p:cNvSpPr>
           <p:nvPr>
             <p:ph type="body" sz="quarter" idx="21" hasCustomPrompt="1"/>
           </p:nvPr>
@@ -2439,7 +2551,7 @@
               <a:spcBef>
                 <a:spcPts val="2500"/>
               </a:spcBef>
-              <a:defRPr spc="-43" sz="1440">
+              <a:defRPr sz="1440" spc="-43">
                 <a:latin typeface="Avenir Next Medium"/>
                 <a:ea typeface="Avenir Next Medium"/>
                 <a:cs typeface="Avenir Next Medium"/>
@@ -2448,7 +2560,6 @@
             </a:lvl1pPr>
           </a:lstStyle>
           <a:p>
-            <a:pPr/>
             <a:r>
               <a:t>Автор и дата</a:t>
             </a:r>
@@ -2458,7 +2569,9 @@
       <p:sp>
         <p:nvSpPr>
           <p:cNvPr id="41" name="Подзаголовок слайда"/>
-          <p:cNvSpPr txBox="1"/>
+          <p:cNvSpPr txBox="1">
+            <a:spLocks noGrp="1"/>
+          </p:cNvSpPr>
           <p:nvPr>
             <p:ph type="body" sz="quarter" idx="22" hasCustomPrompt="1"/>
           </p:nvPr>
@@ -2476,11 +2589,10 @@
           <a:bodyPr/>
           <a:lstStyle>
             <a:lvl1pPr defTabSz="473202">
-              <a:defRPr spc="-77" sz="2592"/>
+              <a:defRPr sz="2592" spc="-77"/>
             </a:lvl1pPr>
           </a:lstStyle>
           <a:p>
-            <a:pPr/>
             <a:r>
               <a:t>Подзаголовок слайда</a:t>
             </a:r>
@@ -2513,15 +2625,18 @@
           <a:lstStyle/>
           <a:p>
             <a:pPr algn="ctr" defTabSz="821531">
-              <a:defRPr spc="-36" sz="1800"/>
+              <a:defRPr sz="1800" spc="-36"/>
             </a:pPr>
+            <a:endParaRPr/>
           </a:p>
         </p:txBody>
       </p:sp>
       <p:sp>
         <p:nvSpPr>
           <p:cNvPr id="43" name="Заголовок слайда"/>
-          <p:cNvSpPr txBox="1"/>
+          <p:cNvSpPr txBox="1">
+            <a:spLocks noGrp="1"/>
+          </p:cNvSpPr>
           <p:nvPr>
             <p:ph type="title" hasCustomPrompt="1"/>
           </p:nvPr>
@@ -2539,11 +2654,10 @@
           <a:bodyPr anchor="t"/>
           <a:lstStyle>
             <a:lvl1pPr defTabSz="584200">
-              <a:defRPr spc="-391" sz="9800"/>
+              <a:defRPr sz="9800" spc="-391"/>
             </a:lvl1pPr>
           </a:lstStyle>
           <a:p>
-            <a:pPr/>
             <a:r>
               <a:t>Заголовок слайда</a:t>
             </a:r>
@@ -2553,7 +2667,9 @@
       <p:sp>
         <p:nvSpPr>
           <p:cNvPr id="44" name="Уровень текста 1…"/>
-          <p:cNvSpPr txBox="1"/>
+          <p:cNvSpPr txBox="1">
+            <a:spLocks noGrp="1"/>
+          </p:cNvSpPr>
           <p:nvPr>
             <p:ph type="body" sz="half" idx="1" hasCustomPrompt="1"/>
           </p:nvPr>
@@ -2574,69 +2690,62 @@
               <a:spcBef>
                 <a:spcPts val="3300"/>
               </a:spcBef>
-              <a:defRPr cap="none" spc="0" sz="3800"/>
+              <a:defRPr sz="3800" cap="none" spc="0"/>
             </a:lvl1pPr>
             <a:lvl2pPr>
               <a:spcBef>
                 <a:spcPts val="3300"/>
               </a:spcBef>
-              <a:defRPr cap="none" spc="0" sz="3800"/>
+              <a:defRPr sz="3800" cap="none" spc="0"/>
             </a:lvl2pPr>
             <a:lvl3pPr>
               <a:spcBef>
                 <a:spcPts val="3300"/>
               </a:spcBef>
-              <a:defRPr cap="none" spc="0" sz="3800"/>
+              <a:defRPr sz="3800" cap="none" spc="0"/>
             </a:lvl3pPr>
             <a:lvl4pPr>
               <a:spcBef>
                 <a:spcPts val="3300"/>
               </a:spcBef>
-              <a:defRPr cap="none" spc="0" sz="3800"/>
+              <a:defRPr sz="3800" cap="none" spc="0"/>
             </a:lvl4pPr>
             <a:lvl5pPr>
               <a:spcBef>
                 <a:spcPts val="3300"/>
               </a:spcBef>
-              <a:defRPr cap="none" spc="0" sz="3800"/>
+              <a:defRPr sz="3800" cap="none" spc="0"/>
             </a:lvl5pPr>
           </a:lstStyle>
           <a:p>
-            <a:pPr/>
             <a:r>
               <a:t>Текст пункта на слайде</a:t>
             </a:r>
           </a:p>
           <a:p>
             <a:pPr lvl="1"/>
-            <a:r>
-              <a:t/>
-            </a:r>
+            <a:endParaRPr/>
           </a:p>
           <a:p>
             <a:pPr lvl="2"/>
-            <a:r>
-              <a:t/>
-            </a:r>
+            <a:endParaRPr/>
           </a:p>
           <a:p>
             <a:pPr lvl="3"/>
-            <a:r>
-              <a:t/>
-            </a:r>
+            <a:endParaRPr/>
           </a:p>
           <a:p>
             <a:pPr lvl="4"/>
-            <a:r>
-              <a:t/>
-            </a:r>
+            <a:endParaRPr/>
           </a:p>
         </p:txBody>
       </p:sp>
       <p:sp>
         <p:nvSpPr>
           <p:cNvPr id="45" name="Номер слайда"/>
-          <p:cNvSpPr txBox="1"/>
+          <p:cNvSpPr txBox="1">
+            <a:spLocks noGrp="1"/>
+          </p:cNvSpPr>
           <p:nvPr>
             <p:ph type="sldNum" sz="quarter" idx="2"/>
           </p:nvPr>
@@ -2662,8 +2771,10 @@
             </a:lvl1pPr>
           </a:lstStyle>
           <a:p>
-            <a:pPr/>
-            <a:fld id="{86CB4B4D-7CA3-9044-876B-883B54F8677D}" type="slidenum"/>
+            <a:fld id="{86CB4B4D-7CA3-9044-876B-883B54F8677D}" type="slidenum">
+              <a:t>‹#›</a:t>
+            </a:fld>
+            <a:endParaRPr/>
           </a:p>
         </p:txBody>
       </p:sp>
@@ -2672,18 +2783,19 @@
   <p:clrMapOvr>
     <a:masterClrMapping/>
   </p:clrMapOvr>
-  <p:transition xmlns:p14="http://schemas.microsoft.com/office/powerpoint/2010/main" spd="med" advClick="1"/>
+  <p:transition spd="med"/>
 </p:sldLayout>
 </file>
 
 <file path=ppt/slideLayouts/slideLayout5.xml><?xml version="1.0" encoding="utf-8"?>
-<p:sldLayout xmlns:a="http://schemas.openxmlformats.org/drawingml/2006/main" xmlns:r="http://schemas.openxmlformats.org/officeDocument/2006/relationships" xmlns:p="http://schemas.openxmlformats.org/presentationml/2006/main" xmlns:m="http://schemas.openxmlformats.org/officeDocument/2006/math" xmlns:a14="http://schemas.microsoft.com/office/drawing/2010/main" type="tx" showMasterSp="1" showMasterPhAnim="1">
+<p:sldLayout xmlns:a="http://schemas.openxmlformats.org/drawingml/2006/main" xmlns:r="http://schemas.openxmlformats.org/officeDocument/2006/relationships" xmlns:p="http://schemas.openxmlformats.org/presentationml/2006/main" type="tx">
   <p:cSld name="Пункты">
     <p:bg>
       <p:bgPr>
         <a:solidFill>
           <a:srgbClr val="FFFFFF"/>
         </a:solidFill>
+        <a:effectLst/>
       </p:bgPr>
     </p:bg>
     <p:spTree>
@@ -2703,7 +2815,9 @@
       <p:sp>
         <p:nvSpPr>
           <p:cNvPr id="52" name="Автор и дата"/>
-          <p:cNvSpPr txBox="1"/>
+          <p:cNvSpPr txBox="1">
+            <a:spLocks noGrp="1"/>
+          </p:cNvSpPr>
           <p:nvPr>
             <p:ph type="body" sz="quarter" idx="21" hasCustomPrompt="1"/>
           </p:nvPr>
@@ -2724,7 +2838,7 @@
               <a:spcBef>
                 <a:spcPts val="2500"/>
               </a:spcBef>
-              <a:defRPr spc="-43" sz="1440">
+              <a:defRPr sz="1440" spc="-43">
                 <a:latin typeface="Avenir Next Medium"/>
                 <a:ea typeface="Avenir Next Medium"/>
                 <a:cs typeface="Avenir Next Medium"/>
@@ -2733,7 +2847,6 @@
             </a:lvl1pPr>
           </a:lstStyle>
           <a:p>
-            <a:pPr/>
             <a:r>
               <a:t>Автор и дата</a:t>
             </a:r>
@@ -2743,7 +2856,9 @@
       <p:sp>
         <p:nvSpPr>
           <p:cNvPr id="53" name="Уровень текста 1…"/>
-          <p:cNvSpPr txBox="1"/>
+          <p:cNvSpPr txBox="1">
+            <a:spLocks noGrp="1"/>
+          </p:cNvSpPr>
           <p:nvPr>
             <p:ph type="body" sz="half" idx="1" hasCustomPrompt="1"/>
           </p:nvPr>
@@ -2764,62 +2879,53 @@
               <a:spcBef>
                 <a:spcPts val="3300"/>
               </a:spcBef>
-              <a:defRPr cap="none" spc="0" sz="3800"/>
+              <a:defRPr sz="3800" cap="none" spc="0"/>
             </a:lvl1pPr>
             <a:lvl2pPr>
               <a:spcBef>
                 <a:spcPts val="3300"/>
               </a:spcBef>
-              <a:defRPr cap="none" spc="0" sz="3800"/>
+              <a:defRPr sz="3800" cap="none" spc="0"/>
             </a:lvl2pPr>
             <a:lvl3pPr>
               <a:spcBef>
                 <a:spcPts val="3300"/>
               </a:spcBef>
-              <a:defRPr cap="none" spc="0" sz="3800"/>
+              <a:defRPr sz="3800" cap="none" spc="0"/>
             </a:lvl3pPr>
             <a:lvl4pPr>
               <a:spcBef>
                 <a:spcPts val="3300"/>
               </a:spcBef>
-              <a:defRPr cap="none" spc="0" sz="3800"/>
+              <a:defRPr sz="3800" cap="none" spc="0"/>
             </a:lvl4pPr>
             <a:lvl5pPr>
               <a:spcBef>
                 <a:spcPts val="3300"/>
               </a:spcBef>
-              <a:defRPr cap="none" spc="0" sz="3800"/>
+              <a:defRPr sz="3800" cap="none" spc="0"/>
             </a:lvl5pPr>
           </a:lstStyle>
           <a:p>
-            <a:pPr/>
             <a:r>
               <a:t>Текст пункта на слайде</a:t>
             </a:r>
           </a:p>
           <a:p>
             <a:pPr lvl="1"/>
-            <a:r>
-              <a:t/>
-            </a:r>
+            <a:endParaRPr/>
           </a:p>
           <a:p>
             <a:pPr lvl="2"/>
-            <a:r>
-              <a:t/>
-            </a:r>
+            <a:endParaRPr/>
           </a:p>
           <a:p>
             <a:pPr lvl="3"/>
-            <a:r>
-              <a:t/>
-            </a:r>
+            <a:endParaRPr/>
           </a:p>
           <a:p>
             <a:pPr lvl="4"/>
-            <a:r>
-              <a:t/>
-            </a:r>
+            <a:endParaRPr/>
           </a:p>
         </p:txBody>
       </p:sp>
@@ -2849,15 +2955,18 @@
           <a:lstStyle/>
           <a:p>
             <a:pPr algn="ctr" defTabSz="821531">
-              <a:defRPr spc="-36" sz="1800"/>
+              <a:defRPr sz="1800" spc="-36"/>
             </a:pPr>
+            <a:endParaRPr/>
           </a:p>
         </p:txBody>
       </p:sp>
       <p:sp>
         <p:nvSpPr>
           <p:cNvPr id="55" name="Номер слайда"/>
-          <p:cNvSpPr txBox="1"/>
+          <p:cNvSpPr txBox="1">
+            <a:spLocks noGrp="1"/>
+          </p:cNvSpPr>
           <p:nvPr>
             <p:ph type="sldNum" sz="quarter" idx="2"/>
           </p:nvPr>
@@ -2879,8 +2988,10 @@
             </a:lvl1pPr>
           </a:lstStyle>
           <a:p>
-            <a:pPr/>
-            <a:fld id="{86CB4B4D-7CA3-9044-876B-883B54F8677D}" type="slidenum"/>
+            <a:fld id="{86CB4B4D-7CA3-9044-876B-883B54F8677D}" type="slidenum">
+              <a:t>‹#›</a:t>
+            </a:fld>
+            <a:endParaRPr/>
           </a:p>
         </p:txBody>
       </p:sp>
@@ -2889,18 +3000,19 @@
   <p:clrMapOvr>
     <a:masterClrMapping/>
   </p:clrMapOvr>
-  <p:transition xmlns:p14="http://schemas.microsoft.com/office/powerpoint/2010/main" spd="med" advClick="1"/>
+  <p:transition spd="med"/>
 </p:sldLayout>
 </file>
 
 <file path=ppt/slideLayouts/slideLayout6.xml><?xml version="1.0" encoding="utf-8"?>
-<p:sldLayout xmlns:a="http://schemas.openxmlformats.org/drawingml/2006/main" xmlns:r="http://schemas.openxmlformats.org/officeDocument/2006/relationships" xmlns:p="http://schemas.openxmlformats.org/presentationml/2006/main" xmlns:m="http://schemas.openxmlformats.org/officeDocument/2006/math" xmlns:a14="http://schemas.microsoft.com/office/drawing/2010/main" type="tx" showMasterSp="1" showMasterPhAnim="1">
+<p:sldLayout xmlns:a="http://schemas.openxmlformats.org/drawingml/2006/main" xmlns:r="http://schemas.openxmlformats.org/officeDocument/2006/relationships" xmlns:p="http://schemas.openxmlformats.org/presentationml/2006/main" type="tx">
   <p:cSld name="Заголовок, пункты и фото">
     <p:bg>
       <p:bgPr>
         <a:solidFill>
           <a:srgbClr val="FFFFFF"/>
         </a:solidFill>
+        <a:effectLst/>
       </p:bgPr>
     </p:bg>
     <p:spTree>
@@ -2920,7 +3032,9 @@
       <p:sp>
         <p:nvSpPr>
           <p:cNvPr id="62" name="Улыбающийся человек в синей кофте перед синей стеной"/>
-          <p:cNvSpPr/>
+          <p:cNvSpPr>
+            <a:spLocks noGrp="1"/>
+          </p:cNvSpPr>
           <p:nvPr>
             <p:ph type="pic" idx="21"/>
           </p:nvPr>
@@ -2940,14 +3054,16 @@
           </a:bodyPr>
           <a:lstStyle/>
           <a:p>
-            <a:pPr/>
+            <a:endParaRPr/>
           </a:p>
         </p:txBody>
       </p:sp>
       <p:sp>
         <p:nvSpPr>
           <p:cNvPr id="63" name="Уровень текста 1…"/>
-          <p:cNvSpPr txBox="1"/>
+          <p:cNvSpPr txBox="1">
+            <a:spLocks noGrp="1"/>
+          </p:cNvSpPr>
           <p:nvPr>
             <p:ph type="body" sz="quarter" idx="1" hasCustomPrompt="1"/>
           </p:nvPr>
@@ -2968,62 +3084,53 @@
               <a:spcBef>
                 <a:spcPts val="3300"/>
               </a:spcBef>
-              <a:defRPr cap="none" spc="0" sz="3800"/>
+              <a:defRPr sz="3800" cap="none" spc="0"/>
             </a:lvl1pPr>
             <a:lvl2pPr>
               <a:spcBef>
                 <a:spcPts val="3300"/>
               </a:spcBef>
-              <a:defRPr cap="none" spc="0" sz="3800"/>
+              <a:defRPr sz="3800" cap="none" spc="0"/>
             </a:lvl2pPr>
             <a:lvl3pPr>
               <a:spcBef>
                 <a:spcPts val="3300"/>
               </a:spcBef>
-              <a:defRPr cap="none" spc="0" sz="3800"/>
+              <a:defRPr sz="3800" cap="none" spc="0"/>
             </a:lvl3pPr>
             <a:lvl4pPr>
               <a:spcBef>
                 <a:spcPts val="3300"/>
               </a:spcBef>
-              <a:defRPr cap="none" spc="0" sz="3800"/>
+              <a:defRPr sz="3800" cap="none" spc="0"/>
             </a:lvl4pPr>
             <a:lvl5pPr>
               <a:spcBef>
                 <a:spcPts val="3300"/>
               </a:spcBef>
-              <a:defRPr cap="none" spc="0" sz="3800"/>
+              <a:defRPr sz="3800" cap="none" spc="0"/>
             </a:lvl5pPr>
           </a:lstStyle>
           <a:p>
-            <a:pPr/>
             <a:r>
               <a:t>Текст пункта на слайде</a:t>
             </a:r>
           </a:p>
           <a:p>
             <a:pPr lvl="1"/>
-            <a:r>
-              <a:t/>
-            </a:r>
+            <a:endParaRPr/>
           </a:p>
           <a:p>
             <a:pPr lvl="2"/>
-            <a:r>
-              <a:t/>
-            </a:r>
+            <a:endParaRPr/>
           </a:p>
           <a:p>
             <a:pPr lvl="3"/>
-            <a:r>
-              <a:t/>
-            </a:r>
+            <a:endParaRPr/>
           </a:p>
           <a:p>
             <a:pPr lvl="4"/>
-            <a:r>
-              <a:t/>
-            </a:r>
+            <a:endParaRPr/>
           </a:p>
         </p:txBody>
       </p:sp>
@@ -3053,15 +3160,18 @@
           <a:lstStyle/>
           <a:p>
             <a:pPr algn="ctr" defTabSz="821531">
-              <a:defRPr spc="-36" sz="1800"/>
+              <a:defRPr sz="1800" spc="-36"/>
             </a:pPr>
+            <a:endParaRPr/>
           </a:p>
         </p:txBody>
       </p:sp>
       <p:sp>
         <p:nvSpPr>
           <p:cNvPr id="65" name="Автор и дата"/>
-          <p:cNvSpPr txBox="1"/>
+          <p:cNvSpPr txBox="1">
+            <a:spLocks noGrp="1"/>
+          </p:cNvSpPr>
           <p:nvPr>
             <p:ph type="body" sz="quarter" idx="22" hasCustomPrompt="1"/>
           </p:nvPr>
@@ -3082,7 +3192,7 @@
               <a:spcBef>
                 <a:spcPts val="2500"/>
               </a:spcBef>
-              <a:defRPr spc="-43" sz="1440">
+              <a:defRPr sz="1440" spc="-43">
                 <a:latin typeface="Avenir Next Medium"/>
                 <a:ea typeface="Avenir Next Medium"/>
                 <a:cs typeface="Avenir Next Medium"/>
@@ -3091,7 +3201,6 @@
             </a:lvl1pPr>
           </a:lstStyle>
           <a:p>
-            <a:pPr/>
             <a:r>
               <a:t>Автор и дата</a:t>
             </a:r>
@@ -3101,7 +3210,9 @@
       <p:sp>
         <p:nvSpPr>
           <p:cNvPr id="66" name="Заголовок слайда"/>
-          <p:cNvSpPr txBox="1"/>
+          <p:cNvSpPr txBox="1">
+            <a:spLocks noGrp="1"/>
+          </p:cNvSpPr>
           <p:nvPr>
             <p:ph type="title" hasCustomPrompt="1"/>
           </p:nvPr>
@@ -3119,11 +3230,10 @@
           <a:bodyPr anchor="t"/>
           <a:lstStyle>
             <a:lvl1pPr defTabSz="584200">
-              <a:defRPr spc="-391" sz="9800"/>
+              <a:defRPr sz="9800" spc="-391"/>
             </a:lvl1pPr>
           </a:lstStyle>
           <a:p>
-            <a:pPr/>
             <a:r>
               <a:t>Заголовок слайда</a:t>
             </a:r>
@@ -3133,7 +3243,9 @@
       <p:sp>
         <p:nvSpPr>
           <p:cNvPr id="67" name="Подзаголовок слайда"/>
-          <p:cNvSpPr txBox="1"/>
+          <p:cNvSpPr txBox="1">
+            <a:spLocks noGrp="1"/>
+          </p:cNvSpPr>
           <p:nvPr>
             <p:ph type="body" sz="quarter" idx="23" hasCustomPrompt="1"/>
           </p:nvPr>
@@ -3151,11 +3263,10 @@
           <a:bodyPr/>
           <a:lstStyle>
             <a:lvl1pPr defTabSz="461518">
-              <a:defRPr spc="-75" sz="2528"/>
+              <a:defRPr sz="2528" spc="-75"/>
             </a:lvl1pPr>
           </a:lstStyle>
           <a:p>
-            <a:pPr/>
             <a:r>
               <a:t>Подзаголовок слайда</a:t>
             </a:r>
@@ -3165,7 +3276,9 @@
       <p:sp>
         <p:nvSpPr>
           <p:cNvPr id="68" name="Номер слайда"/>
-          <p:cNvSpPr txBox="1"/>
+          <p:cNvSpPr txBox="1">
+            <a:spLocks noGrp="1"/>
+          </p:cNvSpPr>
           <p:nvPr>
             <p:ph type="sldNum" sz="quarter" idx="2"/>
           </p:nvPr>
@@ -3187,8 +3300,10 @@
             </a:lvl1pPr>
           </a:lstStyle>
           <a:p>
-            <a:pPr/>
-            <a:fld id="{86CB4B4D-7CA3-9044-876B-883B54F8677D}" type="slidenum"/>
+            <a:fld id="{86CB4B4D-7CA3-9044-876B-883B54F8677D}" type="slidenum">
+              <a:t>‹#›</a:t>
+            </a:fld>
+            <a:endParaRPr/>
           </a:p>
         </p:txBody>
       </p:sp>
@@ -3197,18 +3312,19 @@
   <p:clrMapOvr>
     <a:masterClrMapping/>
   </p:clrMapOvr>
-  <p:transition xmlns:p14="http://schemas.microsoft.com/office/powerpoint/2010/main" spd="med" advClick="1"/>
+  <p:transition spd="med"/>
 </p:sldLayout>
 </file>
 
 <file path=ppt/slideLayouts/slideLayout7.xml><?xml version="1.0" encoding="utf-8"?>
-<p:sldLayout xmlns:a="http://schemas.openxmlformats.org/drawingml/2006/main" xmlns:r="http://schemas.openxmlformats.org/officeDocument/2006/relationships" xmlns:p="http://schemas.openxmlformats.org/presentationml/2006/main" xmlns:m="http://schemas.openxmlformats.org/officeDocument/2006/math" xmlns:a14="http://schemas.microsoft.com/office/drawing/2010/main" type="tx" showMasterSp="1" showMasterPhAnim="1">
+<p:sldLayout xmlns:a="http://schemas.openxmlformats.org/drawingml/2006/main" xmlns:r="http://schemas.openxmlformats.org/officeDocument/2006/relationships" xmlns:p="http://schemas.openxmlformats.org/presentationml/2006/main" type="tx">
   <p:cSld name="Заголовок, пункты, видео — мелко">
     <p:bg>
       <p:bgPr>
         <a:solidFill>
           <a:srgbClr val="FFFFFF"/>
         </a:solidFill>
+        <a:effectLst/>
       </p:bgPr>
     </p:bg>
     <p:spTree>
@@ -3228,7 +3344,9 @@
       <p:sp>
         <p:nvSpPr>
           <p:cNvPr id="75" name="Уровень текста 1…"/>
-          <p:cNvSpPr txBox="1"/>
+          <p:cNvSpPr txBox="1">
+            <a:spLocks noGrp="1"/>
+          </p:cNvSpPr>
           <p:nvPr>
             <p:ph type="body" sz="quarter" idx="1" hasCustomPrompt="1"/>
           </p:nvPr>
@@ -3249,62 +3367,53 @@
               <a:spcBef>
                 <a:spcPts val="3300"/>
               </a:spcBef>
-              <a:defRPr cap="none" spc="0" sz="3800"/>
+              <a:defRPr sz="3800" cap="none" spc="0"/>
             </a:lvl1pPr>
             <a:lvl2pPr>
               <a:spcBef>
                 <a:spcPts val="3300"/>
               </a:spcBef>
-              <a:defRPr cap="none" spc="0" sz="3800"/>
+              <a:defRPr sz="3800" cap="none" spc="0"/>
             </a:lvl2pPr>
             <a:lvl3pPr>
               <a:spcBef>
                 <a:spcPts val="3300"/>
               </a:spcBef>
-              <a:defRPr cap="none" spc="0" sz="3800"/>
+              <a:defRPr sz="3800" cap="none" spc="0"/>
             </a:lvl3pPr>
             <a:lvl4pPr>
               <a:spcBef>
                 <a:spcPts val="3300"/>
               </a:spcBef>
-              <a:defRPr cap="none" spc="0" sz="3800"/>
+              <a:defRPr sz="3800" cap="none" spc="0"/>
             </a:lvl4pPr>
             <a:lvl5pPr>
               <a:spcBef>
                 <a:spcPts val="3300"/>
               </a:spcBef>
-              <a:defRPr cap="none" spc="0" sz="3800"/>
+              <a:defRPr sz="3800" cap="none" spc="0"/>
             </a:lvl5pPr>
           </a:lstStyle>
           <a:p>
-            <a:pPr/>
             <a:r>
               <a:t>Текст пункта на слайде</a:t>
             </a:r>
           </a:p>
           <a:p>
             <a:pPr lvl="1"/>
-            <a:r>
-              <a:t/>
-            </a:r>
+            <a:endParaRPr/>
           </a:p>
           <a:p>
             <a:pPr lvl="2"/>
-            <a:r>
-              <a:t/>
-            </a:r>
+            <a:endParaRPr/>
           </a:p>
           <a:p>
             <a:pPr lvl="3"/>
-            <a:r>
-              <a:t/>
-            </a:r>
+            <a:endParaRPr/>
           </a:p>
           <a:p>
             <a:pPr lvl="4"/>
-            <a:r>
-              <a:t/>
-            </a:r>
+            <a:endParaRPr/>
           </a:p>
         </p:txBody>
       </p:sp>
@@ -3334,15 +3443,18 @@
           <a:lstStyle/>
           <a:p>
             <a:pPr algn="ctr" defTabSz="821531">
-              <a:defRPr spc="-36" sz="1800"/>
+              <a:defRPr sz="1800" spc="-36"/>
             </a:pPr>
+            <a:endParaRPr/>
           </a:p>
         </p:txBody>
       </p:sp>
       <p:sp>
         <p:nvSpPr>
           <p:cNvPr id="77" name="Автор и дата"/>
-          <p:cNvSpPr txBox="1"/>
+          <p:cNvSpPr txBox="1">
+            <a:spLocks noGrp="1"/>
+          </p:cNvSpPr>
           <p:nvPr>
             <p:ph type="body" sz="quarter" idx="21" hasCustomPrompt="1"/>
           </p:nvPr>
@@ -3363,7 +3475,7 @@
               <a:spcBef>
                 <a:spcPts val="2500"/>
               </a:spcBef>
-              <a:defRPr spc="-43" sz="1440">
+              <a:defRPr sz="1440" spc="-43">
                 <a:latin typeface="Avenir Next Medium"/>
                 <a:ea typeface="Avenir Next Medium"/>
                 <a:cs typeface="Avenir Next Medium"/>
@@ -3372,7 +3484,6 @@
             </a:lvl1pPr>
           </a:lstStyle>
           <a:p>
-            <a:pPr/>
             <a:r>
               <a:t>Автор и дата</a:t>
             </a:r>
@@ -3382,7 +3493,9 @@
       <p:sp>
         <p:nvSpPr>
           <p:cNvPr id="78" name="Заголовок слайда"/>
-          <p:cNvSpPr txBox="1"/>
+          <p:cNvSpPr txBox="1">
+            <a:spLocks noGrp="1"/>
+          </p:cNvSpPr>
           <p:nvPr>
             <p:ph type="title" hasCustomPrompt="1"/>
           </p:nvPr>
@@ -3400,11 +3513,10 @@
           <a:bodyPr anchor="t"/>
           <a:lstStyle>
             <a:lvl1pPr defTabSz="584200">
-              <a:defRPr spc="-391" sz="9800"/>
+              <a:defRPr sz="9800" spc="-391"/>
             </a:lvl1pPr>
           </a:lstStyle>
           <a:p>
-            <a:pPr/>
             <a:r>
               <a:t>Заголовок слайда</a:t>
             </a:r>
@@ -3414,7 +3526,9 @@
       <p:sp>
         <p:nvSpPr>
           <p:cNvPr id="79" name="Подзаголовок слайда"/>
-          <p:cNvSpPr txBox="1"/>
+          <p:cNvSpPr txBox="1">
+            <a:spLocks noGrp="1"/>
+          </p:cNvSpPr>
           <p:nvPr>
             <p:ph type="body" sz="quarter" idx="22" hasCustomPrompt="1"/>
           </p:nvPr>
@@ -3432,11 +3546,10 @@
           <a:bodyPr/>
           <a:lstStyle>
             <a:lvl1pPr defTabSz="461518">
-              <a:defRPr spc="-75" sz="2528"/>
+              <a:defRPr sz="2528" spc="-75"/>
             </a:lvl1pPr>
           </a:lstStyle>
           <a:p>
-            <a:pPr/>
             <a:r>
               <a:t>Подзаголовок слайда</a:t>
             </a:r>
@@ -3446,7 +3559,9 @@
       <p:sp>
         <p:nvSpPr>
           <p:cNvPr id="80" name="Номер слайда"/>
-          <p:cNvSpPr txBox="1"/>
+          <p:cNvSpPr txBox="1">
+            <a:spLocks noGrp="1"/>
+          </p:cNvSpPr>
           <p:nvPr>
             <p:ph type="sldNum" sz="quarter" idx="2"/>
           </p:nvPr>
@@ -3468,8 +3583,10 @@
             </a:lvl1pPr>
           </a:lstStyle>
           <a:p>
-            <a:pPr/>
-            <a:fld id="{86CB4B4D-7CA3-9044-876B-883B54F8677D}" type="slidenum"/>
+            <a:fld id="{86CB4B4D-7CA3-9044-876B-883B54F8677D}" type="slidenum">
+              <a:t>‹#›</a:t>
+            </a:fld>
+            <a:endParaRPr/>
           </a:p>
         </p:txBody>
       </p:sp>
@@ -3478,18 +3595,19 @@
   <p:clrMapOvr>
     <a:masterClrMapping/>
   </p:clrMapOvr>
-  <p:transition xmlns:p14="http://schemas.microsoft.com/office/powerpoint/2010/main" spd="med" advClick="1"/>
+  <p:transition spd="med"/>
 </p:sldLayout>
 </file>
 
 <file path=ppt/slideLayouts/slideLayout8.xml><?xml version="1.0" encoding="utf-8"?>
-<p:sldLayout xmlns:a="http://schemas.openxmlformats.org/drawingml/2006/main" xmlns:r="http://schemas.openxmlformats.org/officeDocument/2006/relationships" xmlns:p="http://schemas.openxmlformats.org/presentationml/2006/main" xmlns:m="http://schemas.openxmlformats.org/officeDocument/2006/math" xmlns:a14="http://schemas.microsoft.com/office/drawing/2010/main" type="tx" showMasterSp="1" showMasterPhAnim="1">
+<p:sldLayout xmlns:a="http://schemas.openxmlformats.org/drawingml/2006/main" xmlns:r="http://schemas.openxmlformats.org/officeDocument/2006/relationships" xmlns:p="http://schemas.openxmlformats.org/presentationml/2006/main" type="tx">
   <p:cSld name="Заголовок, пункты и видеотрансляция — крупно">
     <p:bg>
       <p:bgPr>
         <a:solidFill>
           <a:srgbClr val="FFFFFF"/>
         </a:solidFill>
+        <a:effectLst/>
       </p:bgPr>
     </p:bg>
     <p:spTree>
@@ -3509,7 +3627,9 @@
       <p:sp>
         <p:nvSpPr>
           <p:cNvPr id="87" name="Уровень текста 1…"/>
-          <p:cNvSpPr txBox="1"/>
+          <p:cNvSpPr txBox="1">
+            <a:spLocks noGrp="1"/>
+          </p:cNvSpPr>
           <p:nvPr>
             <p:ph type="body" sz="quarter" idx="1" hasCustomPrompt="1"/>
           </p:nvPr>
@@ -3530,62 +3650,53 @@
               <a:spcBef>
                 <a:spcPts val="3300"/>
               </a:spcBef>
-              <a:defRPr cap="none" spc="0" sz="3800"/>
+              <a:defRPr sz="3800" cap="none" spc="0"/>
             </a:lvl1pPr>
             <a:lvl2pPr>
               <a:spcBef>
                 <a:spcPts val="3300"/>
               </a:spcBef>
-              <a:defRPr cap="none" spc="0" sz="3800"/>
+              <a:defRPr sz="3800" cap="none" spc="0"/>
             </a:lvl2pPr>
             <a:lvl3pPr>
               <a:spcBef>
                 <a:spcPts val="3300"/>
               </a:spcBef>
-              <a:defRPr cap="none" spc="0" sz="3800"/>
+              <a:defRPr sz="3800" cap="none" spc="0"/>
             </a:lvl3pPr>
             <a:lvl4pPr>
               <a:spcBef>
                 <a:spcPts val="3300"/>
               </a:spcBef>
-              <a:defRPr cap="none" spc="0" sz="3800"/>
+              <a:defRPr sz="3800" cap="none" spc="0"/>
             </a:lvl4pPr>
             <a:lvl5pPr>
               <a:spcBef>
                 <a:spcPts val="3300"/>
               </a:spcBef>
-              <a:defRPr cap="none" spc="0" sz="3800"/>
+              <a:defRPr sz="3800" cap="none" spc="0"/>
             </a:lvl5pPr>
           </a:lstStyle>
           <a:p>
-            <a:pPr/>
             <a:r>
               <a:t>Текст пункта на слайде</a:t>
             </a:r>
           </a:p>
           <a:p>
             <a:pPr lvl="1"/>
-            <a:r>
-              <a:t/>
-            </a:r>
+            <a:endParaRPr/>
           </a:p>
           <a:p>
             <a:pPr lvl="2"/>
-            <a:r>
-              <a:t/>
-            </a:r>
+            <a:endParaRPr/>
           </a:p>
           <a:p>
             <a:pPr lvl="3"/>
-            <a:r>
-              <a:t/>
-            </a:r>
+            <a:endParaRPr/>
           </a:p>
           <a:p>
             <a:pPr lvl="4"/>
-            <a:r>
-              <a:t/>
-            </a:r>
+            <a:endParaRPr/>
           </a:p>
         </p:txBody>
       </p:sp>
@@ -3615,15 +3726,18 @@
           <a:lstStyle/>
           <a:p>
             <a:pPr algn="ctr" defTabSz="821531">
-              <a:defRPr spc="-36" sz="1800"/>
+              <a:defRPr sz="1800" spc="-36"/>
             </a:pPr>
+            <a:endParaRPr/>
           </a:p>
         </p:txBody>
       </p:sp>
       <p:sp>
         <p:nvSpPr>
           <p:cNvPr id="89" name="Автор и дата"/>
-          <p:cNvSpPr txBox="1"/>
+          <p:cNvSpPr txBox="1">
+            <a:spLocks noGrp="1"/>
+          </p:cNvSpPr>
           <p:nvPr>
             <p:ph type="body" sz="quarter" idx="21" hasCustomPrompt="1"/>
           </p:nvPr>
@@ -3644,7 +3758,7 @@
               <a:spcBef>
                 <a:spcPts val="2500"/>
               </a:spcBef>
-              <a:defRPr spc="-43" sz="1440">
+              <a:defRPr sz="1440" spc="-43">
                 <a:latin typeface="Avenir Next Medium"/>
                 <a:ea typeface="Avenir Next Medium"/>
                 <a:cs typeface="Avenir Next Medium"/>
@@ -3653,7 +3767,6 @@
             </a:lvl1pPr>
           </a:lstStyle>
           <a:p>
-            <a:pPr/>
             <a:r>
               <a:t>Автор и дата</a:t>
             </a:r>
@@ -3663,7 +3776,9 @@
       <p:sp>
         <p:nvSpPr>
           <p:cNvPr id="90" name="Заголовок слайда"/>
-          <p:cNvSpPr txBox="1"/>
+          <p:cNvSpPr txBox="1">
+            <a:spLocks noGrp="1"/>
+          </p:cNvSpPr>
           <p:nvPr>
             <p:ph type="title" hasCustomPrompt="1"/>
           </p:nvPr>
@@ -3681,11 +3796,10 @@
           <a:bodyPr anchor="t"/>
           <a:lstStyle>
             <a:lvl1pPr defTabSz="584200">
-              <a:defRPr spc="-391" sz="9800"/>
+              <a:defRPr sz="9800" spc="-391"/>
             </a:lvl1pPr>
           </a:lstStyle>
           <a:p>
-            <a:pPr/>
             <a:r>
               <a:t>Заголовок слайда</a:t>
             </a:r>
@@ -3695,7 +3809,9 @@
       <p:sp>
         <p:nvSpPr>
           <p:cNvPr id="91" name="Подзаголовок слайда"/>
-          <p:cNvSpPr txBox="1"/>
+          <p:cNvSpPr txBox="1">
+            <a:spLocks noGrp="1"/>
+          </p:cNvSpPr>
           <p:nvPr>
             <p:ph type="body" sz="quarter" idx="22" hasCustomPrompt="1"/>
           </p:nvPr>
@@ -3713,11 +3829,10 @@
           <a:bodyPr/>
           <a:lstStyle>
             <a:lvl1pPr defTabSz="461518">
-              <a:defRPr spc="-75" sz="2528"/>
+              <a:defRPr sz="2528" spc="-75"/>
             </a:lvl1pPr>
           </a:lstStyle>
           <a:p>
-            <a:pPr/>
             <a:r>
               <a:t>Подзаголовок слайда</a:t>
             </a:r>
@@ -3727,7 +3842,9 @@
       <p:sp>
         <p:nvSpPr>
           <p:cNvPr id="92" name="Номер слайда"/>
-          <p:cNvSpPr txBox="1"/>
+          <p:cNvSpPr txBox="1">
+            <a:spLocks noGrp="1"/>
+          </p:cNvSpPr>
           <p:nvPr>
             <p:ph type="sldNum" sz="quarter" idx="2"/>
           </p:nvPr>
@@ -3749,8 +3866,10 @@
             </a:lvl1pPr>
           </a:lstStyle>
           <a:p>
-            <a:pPr/>
-            <a:fld id="{86CB4B4D-7CA3-9044-876B-883B54F8677D}" type="slidenum"/>
+            <a:fld id="{86CB4B4D-7CA3-9044-876B-883B54F8677D}" type="slidenum">
+              <a:t>‹#›</a:t>
+            </a:fld>
+            <a:endParaRPr/>
           </a:p>
         </p:txBody>
       </p:sp>
@@ -3759,22 +3878,23 @@
   <p:clrMapOvr>
     <a:masterClrMapping/>
   </p:clrMapOvr>
-  <p:transition xmlns:p14="http://schemas.microsoft.com/office/powerpoint/2010/main" spd="med" advClick="1"/>
+  <p:transition spd="med"/>
 </p:sldLayout>
 </file>
 
 <file path=ppt/slideLayouts/slideLayout9.xml><?xml version="1.0" encoding="utf-8"?>
-<p:sldLayout xmlns:a="http://schemas.openxmlformats.org/drawingml/2006/main" xmlns:r="http://schemas.openxmlformats.org/officeDocument/2006/relationships" xmlns:p="http://schemas.openxmlformats.org/presentationml/2006/main" xmlns:m="http://schemas.openxmlformats.org/officeDocument/2006/math" xmlns:a14="http://schemas.microsoft.com/office/drawing/2010/main" type="tx" showMasterSp="1" showMasterPhAnim="1">
+<p:sldLayout xmlns:a="http://schemas.openxmlformats.org/drawingml/2006/main" xmlns:r="http://schemas.openxmlformats.org/officeDocument/2006/relationships" xmlns:p="http://schemas.openxmlformats.org/presentationml/2006/main" type="tx">
   <p:cSld name="Раздел">
     <p:bg>
       <p:bgPr>
         <a:blipFill rotWithShape="1">
           <a:blip r:embed="rId2"/>
-          <a:srcRect l="0" t="0" r="0" b="0"/>
+          <a:srcRect/>
           <a:stretch>
             <a:fillRect/>
           </a:stretch>
         </a:blipFill>
+        <a:effectLst/>
       </p:bgPr>
     </p:bg>
     <p:spTree>
@@ -3794,7 +3914,9 @@
       <p:sp>
         <p:nvSpPr>
           <p:cNvPr id="99" name="Заголовок раздела"/>
-          <p:cNvSpPr txBox="1"/>
+          <p:cNvSpPr txBox="1">
+            <a:spLocks noGrp="1"/>
+          </p:cNvSpPr>
           <p:nvPr>
             <p:ph type="title" hasCustomPrompt="1"/>
           </p:nvPr>
@@ -3812,11 +3934,10 @@
           <a:bodyPr anchor="ctr"/>
           <a:lstStyle>
             <a:lvl1pPr defTabSz="825500">
-              <a:defRPr spc="-400" sz="10000"/>
+              <a:defRPr sz="10000" spc="-400"/>
             </a:lvl1pPr>
           </a:lstStyle>
           <a:p>
-            <a:pPr/>
             <a:r>
               <a:t>Заголовок раздела</a:t>
             </a:r>
@@ -3826,7 +3947,9 @@
       <p:sp>
         <p:nvSpPr>
           <p:cNvPr id="100" name="Номер слайда"/>
-          <p:cNvSpPr txBox="1"/>
+          <p:cNvSpPr txBox="1">
+            <a:spLocks noGrp="1"/>
+          </p:cNvSpPr>
           <p:nvPr>
             <p:ph type="sldNum" sz="quarter" idx="2"/>
           </p:nvPr>
@@ -3840,8 +3963,10 @@
           <a:bodyPr/>
           <a:lstStyle/>
           <a:p>
-            <a:pPr/>
-            <a:fld id="{86CB4B4D-7CA3-9044-876B-883B54F8677D}" type="slidenum"/>
+            <a:fld id="{86CB4B4D-7CA3-9044-876B-883B54F8677D}" type="slidenum">
+              <a:t>‹#›</a:t>
+            </a:fld>
+            <a:endParaRPr/>
           </a:p>
         </p:txBody>
       </p:sp>
@@ -3850,22 +3975,23 @@
   <p:clrMapOvr>
     <a:masterClrMapping/>
   </p:clrMapOvr>
-  <p:transition xmlns:p14="http://schemas.microsoft.com/office/powerpoint/2010/main" spd="med" advClick="1"/>
+  <p:transition spd="med"/>
 </p:sldLayout>
 </file>
 
 <file path=ppt/slideMasters/slideMaster1.xml><?xml version="1.0" encoding="utf-8"?>
-<p:sldMaster xmlns:a="http://schemas.openxmlformats.org/drawingml/2006/main" xmlns:r="http://schemas.openxmlformats.org/officeDocument/2006/relationships" xmlns:p="http://schemas.openxmlformats.org/presentationml/2006/main" xmlns:m="http://schemas.openxmlformats.org/officeDocument/2006/math" xmlns:a14="http://schemas.microsoft.com/office/drawing/2010/main">
+<p:sldMaster xmlns:a="http://schemas.openxmlformats.org/drawingml/2006/main" xmlns:r="http://schemas.openxmlformats.org/officeDocument/2006/relationships" xmlns:p="http://schemas.openxmlformats.org/presentationml/2006/main">
   <p:cSld>
     <p:bg>
       <p:bgPr>
         <a:blipFill rotWithShape="1">
-          <a:blip r:embed="rId2"/>
-          <a:srcRect l="0" t="0" r="0" b="0"/>
+          <a:blip r:embed="rId19"/>
+          <a:srcRect/>
           <a:stretch>
             <a:fillRect/>
           </a:stretch>
         </a:blipFill>
+        <a:effectLst/>
       </p:bgPr>
     </p:bg>
     <p:spTree>
@@ -3885,7 +4011,9 @@
       <p:sp>
         <p:nvSpPr>
           <p:cNvPr id="2" name="Заголовок презентации"/>
-          <p:cNvSpPr txBox="1"/>
+          <p:cNvSpPr txBox="1">
+            <a:spLocks noGrp="1"/>
+          </p:cNvSpPr>
           <p:nvPr>
             <p:ph type="title" hasCustomPrompt="1"/>
           </p:nvPr>
@@ -3903,17 +4031,16 @@
           </a:ln>
           <a:extLst>
             <a:ext uri="{C572A759-6A51-4108-AA02-DFA0A04FC94B}">
-              <ma14:wrappingTextBoxFlag xmlns:ma14="http://schemas.microsoft.com/office/mac/drawingml/2011/main" val="1"/>
+              <ma14:wrappingTextBoxFlag xmlns:ma14="http://schemas.microsoft.com/office/mac/drawingml/2011/main" xmlns:a14="http://schemas.microsoft.com/office/drawing/2010/main" xmlns:m="http://schemas.openxmlformats.org/officeDocument/2006/math" xmlns="" val="1"/>
             </a:ext>
           </a:extLst>
         </p:spPr>
         <p:txBody>
           <a:bodyPr lIns="38100" tIns="38100" rIns="38100" bIns="38100" anchor="b">
-            <a:normAutofit fontScale="100000" lnSpcReduction="0"/>
+            <a:normAutofit/>
           </a:bodyPr>
           <a:lstStyle/>
           <a:p>
-            <a:pPr/>
             <a:r>
               <a:t>Заголовок презентации</a:t>
             </a:r>
@@ -3923,7 +4050,9 @@
       <p:sp>
         <p:nvSpPr>
           <p:cNvPr id="3" name="Уровень текста 1…"/>
-          <p:cNvSpPr txBox="1"/>
+          <p:cNvSpPr txBox="1">
+            <a:spLocks noGrp="1"/>
+          </p:cNvSpPr>
           <p:nvPr>
             <p:ph type="body" idx="1" hasCustomPrompt="1"/>
           </p:nvPr>
@@ -3941,51 +4070,44 @@
           </a:ln>
           <a:extLst>
             <a:ext uri="{C572A759-6A51-4108-AA02-DFA0A04FC94B}">
-              <ma14:wrappingTextBoxFlag xmlns:ma14="http://schemas.microsoft.com/office/mac/drawingml/2011/main" val="1"/>
+              <ma14:wrappingTextBoxFlag xmlns:ma14="http://schemas.microsoft.com/office/mac/drawingml/2011/main" xmlns:a14="http://schemas.microsoft.com/office/drawing/2010/main" xmlns:m="http://schemas.openxmlformats.org/officeDocument/2006/math" xmlns="" val="1"/>
             </a:ext>
           </a:extLst>
         </p:spPr>
         <p:txBody>
           <a:bodyPr lIns="38100" tIns="38100" rIns="38100" bIns="38100">
-            <a:normAutofit fontScale="100000" lnSpcReduction="0"/>
+            <a:normAutofit/>
           </a:bodyPr>
           <a:lstStyle/>
           <a:p>
-            <a:pPr/>
             <a:r>
               <a:t>Подзаголовок презентации </a:t>
             </a:r>
           </a:p>
           <a:p>
             <a:pPr lvl="1"/>
-            <a:r>
-              <a:t/>
-            </a:r>
+            <a:endParaRPr/>
           </a:p>
           <a:p>
             <a:pPr lvl="2"/>
-            <a:r>
-              <a:t/>
-            </a:r>
+            <a:endParaRPr/>
           </a:p>
           <a:p>
             <a:pPr lvl="3"/>
-            <a:r>
-              <a:t/>
-            </a:r>
+            <a:endParaRPr/>
           </a:p>
           <a:p>
             <a:pPr lvl="4"/>
-            <a:r>
-              <a:t/>
-            </a:r>
+            <a:endParaRPr/>
           </a:p>
         </p:txBody>
       </p:sp>
       <p:sp>
         <p:nvSpPr>
           <p:cNvPr id="4" name="Номер слайда"/>
-          <p:cNvSpPr txBox="1"/>
+          <p:cNvSpPr txBox="1">
+            <a:spLocks noGrp="1"/>
+          </p:cNvSpPr>
           <p:nvPr>
             <p:ph type="sldNum" sz="quarter" idx="2"/>
           </p:nvPr>
@@ -4023,8 +4145,10 @@
             </a:lvl1pPr>
           </a:lstStyle>
           <a:p>
-            <a:pPr/>
-            <a:fld id="{86CB4B4D-7CA3-9044-876B-883B54F8677D}" type="slidenum"/>
+            <a:fld id="{86CB4B4D-7CA3-9044-876B-883B54F8677D}" type="slidenum">
+              <a:t>‹#›</a:t>
+            </a:fld>
+            <a:endParaRPr/>
           </a:p>
         </p:txBody>
       </p:sp>
@@ -4032,25 +4156,25 @@
   </p:cSld>
   <p:clrMap bg1="lt1" tx1="dk1" bg2="lt2" tx2="dk2" accent1="accent1" accent2="accent2" accent3="accent3" accent4="accent4" accent5="accent5" accent6="accent6" hlink="hlink" folHlink="folHlink"/>
   <p:sldLayoutIdLst>
-    <p:sldLayoutId id="2147483649" r:id="rId3"/>
-    <p:sldLayoutId id="2147483650" r:id="rId4"/>
-    <p:sldLayoutId id="2147483651" r:id="rId5"/>
-    <p:sldLayoutId id="2147483652" r:id="rId6"/>
-    <p:sldLayoutId id="2147483653" r:id="rId7"/>
-    <p:sldLayoutId id="2147483654" r:id="rId8"/>
-    <p:sldLayoutId id="2147483655" r:id="rId9"/>
-    <p:sldLayoutId id="2147483656" r:id="rId10"/>
-    <p:sldLayoutId id="2147483657" r:id="rId11"/>
-    <p:sldLayoutId id="2147483658" r:id="rId12"/>
-    <p:sldLayoutId id="2147483659" r:id="rId13"/>
-    <p:sldLayoutId id="2147483660" r:id="rId14"/>
-    <p:sldLayoutId id="2147483661" r:id="rId15"/>
-    <p:sldLayoutId id="2147483662" r:id="rId16"/>
-    <p:sldLayoutId id="2147483663" r:id="rId17"/>
-    <p:sldLayoutId id="2147483664" r:id="rId18"/>
-    <p:sldLayoutId id="2147483665" r:id="rId19"/>
+    <p:sldLayoutId id="2147483649" r:id="rId1"/>
+    <p:sldLayoutId id="2147483650" r:id="rId2"/>
+    <p:sldLayoutId id="2147483651" r:id="rId3"/>
+    <p:sldLayoutId id="2147483652" r:id="rId4"/>
+    <p:sldLayoutId id="2147483653" r:id="rId5"/>
+    <p:sldLayoutId id="2147483654" r:id="rId6"/>
+    <p:sldLayoutId id="2147483655" r:id="rId7"/>
+    <p:sldLayoutId id="2147483656" r:id="rId8"/>
+    <p:sldLayoutId id="2147483657" r:id="rId9"/>
+    <p:sldLayoutId id="2147483658" r:id="rId10"/>
+    <p:sldLayoutId id="2147483659" r:id="rId11"/>
+    <p:sldLayoutId id="2147483660" r:id="rId12"/>
+    <p:sldLayoutId id="2147483661" r:id="rId13"/>
+    <p:sldLayoutId id="2147483662" r:id="rId14"/>
+    <p:sldLayoutId id="2147483663" r:id="rId15"/>
+    <p:sldLayoutId id="2147483664" r:id="rId16"/>
+    <p:sldLayoutId id="2147483665" r:id="rId17"/>
   </p:sldLayoutIdLst>
-  <p:transition xmlns:p14="http://schemas.microsoft.com/office/powerpoint/2010/main" spd="med" advClick="1"/>
+  <p:transition spd="med"/>
   <p:txStyles>
     <p:titleStyle>
       <a:lvl1pPr marL="0" marR="0" indent="0" algn="l" defTabSz="1160859" rtl="0" latinLnBrk="0">
@@ -4068,7 +4192,7 @@
         <a:buFontTx/>
         <a:buNone/>
         <a:tabLst/>
-        <a:defRPr b="1" baseline="0" cap="all" i="0" spc="-660" strike="noStrike" sz="13200" u="none">
+        <a:defRPr sz="13200" b="1" i="0" u="none" strike="noStrike" cap="all" spc="-660" baseline="0">
           <a:solidFill>
             <a:srgbClr val="000000"/>
           </a:solidFill>
@@ -4094,7 +4218,7 @@
         <a:buFontTx/>
         <a:buNone/>
         <a:tabLst/>
-        <a:defRPr b="1" baseline="0" cap="all" i="0" spc="-660" strike="noStrike" sz="13200" u="none">
+        <a:defRPr sz="13200" b="1" i="0" u="none" strike="noStrike" cap="all" spc="-660" baseline="0">
           <a:solidFill>
             <a:srgbClr val="000000"/>
           </a:solidFill>
@@ -4120,7 +4244,7 @@
         <a:buFontTx/>
         <a:buNone/>
         <a:tabLst/>
-        <a:defRPr b="1" baseline="0" cap="all" i="0" spc="-660" strike="noStrike" sz="13200" u="none">
+        <a:defRPr sz="13200" b="1" i="0" u="none" strike="noStrike" cap="all" spc="-660" baseline="0">
           <a:solidFill>
             <a:srgbClr val="000000"/>
           </a:solidFill>
@@ -4146,7 +4270,7 @@
         <a:buFontTx/>
         <a:buNone/>
         <a:tabLst/>
-        <a:defRPr b="1" baseline="0" cap="all" i="0" spc="-660" strike="noStrike" sz="13200" u="none">
+        <a:defRPr sz="13200" b="1" i="0" u="none" strike="noStrike" cap="all" spc="-660" baseline="0">
           <a:solidFill>
             <a:srgbClr val="000000"/>
           </a:solidFill>
@@ -4172,7 +4296,7 @@
         <a:buFontTx/>
         <a:buNone/>
         <a:tabLst/>
-        <a:defRPr b="1" baseline="0" cap="all" i="0" spc="-660" strike="noStrike" sz="13200" u="none">
+        <a:defRPr sz="13200" b="1" i="0" u="none" strike="noStrike" cap="all" spc="-660" baseline="0">
           <a:solidFill>
             <a:srgbClr val="000000"/>
           </a:solidFill>
@@ -4198,7 +4322,7 @@
         <a:buFontTx/>
         <a:buNone/>
         <a:tabLst/>
-        <a:defRPr b="1" baseline="0" cap="all" i="0" spc="-660" strike="noStrike" sz="13200" u="none">
+        <a:defRPr sz="13200" b="1" i="0" u="none" strike="noStrike" cap="all" spc="-660" baseline="0">
           <a:solidFill>
             <a:srgbClr val="000000"/>
           </a:solidFill>
@@ -4224,7 +4348,7 @@
         <a:buFontTx/>
         <a:buNone/>
         <a:tabLst/>
-        <a:defRPr b="1" baseline="0" cap="all" i="0" spc="-660" strike="noStrike" sz="13200" u="none">
+        <a:defRPr sz="13200" b="1" i="0" u="none" strike="noStrike" cap="all" spc="-660" baseline="0">
           <a:solidFill>
             <a:srgbClr val="000000"/>
           </a:solidFill>
@@ -4250,7 +4374,7 @@
         <a:buFontTx/>
         <a:buNone/>
         <a:tabLst/>
-        <a:defRPr b="1" baseline="0" cap="all" i="0" spc="-660" strike="noStrike" sz="13200" u="none">
+        <a:defRPr sz="13200" b="1" i="0" u="none" strike="noStrike" cap="all" spc="-660" baseline="0">
           <a:solidFill>
             <a:srgbClr val="000000"/>
           </a:solidFill>
@@ -4276,7 +4400,7 @@
         <a:buFontTx/>
         <a:buNone/>
         <a:tabLst/>
-        <a:defRPr b="1" baseline="0" cap="all" i="0" spc="-660" strike="noStrike" sz="13200" u="none">
+        <a:defRPr sz="13200" b="1" i="0" u="none" strike="noStrike" cap="all" spc="-660" baseline="0">
           <a:solidFill>
             <a:srgbClr val="000000"/>
           </a:solidFill>
@@ -4304,7 +4428,7 @@
         <a:buFontTx/>
         <a:buNone/>
         <a:tabLst/>
-        <a:defRPr b="0" baseline="0" cap="all" i="0" spc="-96" strike="noStrike" sz="3200" u="none">
+        <a:defRPr sz="3200" b="0" i="0" u="none" strike="noStrike" cap="all" spc="-96" baseline="0">
           <a:solidFill>
             <a:srgbClr val="000000"/>
           </a:solidFill>
@@ -4330,7 +4454,7 @@
         <a:buFontTx/>
         <a:buNone/>
         <a:tabLst/>
-        <a:defRPr b="0" baseline="0" cap="all" i="0" spc="-96" strike="noStrike" sz="3200" u="none">
+        <a:defRPr sz="3200" b="0" i="0" u="none" strike="noStrike" cap="all" spc="-96" baseline="0">
           <a:solidFill>
             <a:srgbClr val="000000"/>
           </a:solidFill>
@@ -4356,7 +4480,7 @@
         <a:buFontTx/>
         <a:buNone/>
         <a:tabLst/>
-        <a:defRPr b="0" baseline="0" cap="all" i="0" spc="-96" strike="noStrike" sz="3200" u="none">
+        <a:defRPr sz="3200" b="0" i="0" u="none" strike="noStrike" cap="all" spc="-96" baseline="0">
           <a:solidFill>
             <a:srgbClr val="000000"/>
           </a:solidFill>
@@ -4382,7 +4506,7 @@
         <a:buFontTx/>
         <a:buNone/>
         <a:tabLst/>
-        <a:defRPr b="0" baseline="0" cap="all" i="0" spc="-96" strike="noStrike" sz="3200" u="none">
+        <a:defRPr sz="3200" b="0" i="0" u="none" strike="noStrike" cap="all" spc="-96" baseline="0">
           <a:solidFill>
             <a:srgbClr val="000000"/>
           </a:solidFill>
@@ -4408,7 +4532,7 @@
         <a:buFontTx/>
         <a:buNone/>
         <a:tabLst/>
-        <a:defRPr b="0" baseline="0" cap="all" i="0" spc="-96" strike="noStrike" sz="3200" u="none">
+        <a:defRPr sz="3200" b="0" i="0" u="none" strike="noStrike" cap="all" spc="-96" baseline="0">
           <a:solidFill>
             <a:srgbClr val="000000"/>
           </a:solidFill>
@@ -4434,7 +4558,7 @@
         <a:buFontTx/>
         <a:buNone/>
         <a:tabLst/>
-        <a:defRPr b="0" baseline="0" cap="all" i="0" spc="-96" strike="noStrike" sz="3200" u="none">
+        <a:defRPr sz="3200" b="0" i="0" u="none" strike="noStrike" cap="all" spc="-96" baseline="0">
           <a:solidFill>
             <a:srgbClr val="000000"/>
           </a:solidFill>
@@ -4460,7 +4584,7 @@
         <a:buFontTx/>
         <a:buNone/>
         <a:tabLst/>
-        <a:defRPr b="0" baseline="0" cap="all" i="0" spc="-96" strike="noStrike" sz="3200" u="none">
+        <a:defRPr sz="3200" b="0" i="0" u="none" strike="noStrike" cap="all" spc="-96" baseline="0">
           <a:solidFill>
             <a:srgbClr val="000000"/>
           </a:solidFill>
@@ -4486,7 +4610,7 @@
         <a:buFontTx/>
         <a:buNone/>
         <a:tabLst/>
-        <a:defRPr b="0" baseline="0" cap="all" i="0" spc="-96" strike="noStrike" sz="3200" u="none">
+        <a:defRPr sz="3200" b="0" i="0" u="none" strike="noStrike" cap="all" spc="-96" baseline="0">
           <a:solidFill>
             <a:srgbClr val="000000"/>
           </a:solidFill>
@@ -4512,7 +4636,7 @@
         <a:buFontTx/>
         <a:buNone/>
         <a:tabLst/>
-        <a:defRPr b="0" baseline="0" cap="all" i="0" spc="-96" strike="noStrike" sz="3200" u="none">
+        <a:defRPr sz="3200" b="0" i="0" u="none" strike="noStrike" cap="all" spc="-96" baseline="0">
           <a:solidFill>
             <a:srgbClr val="000000"/>
           </a:solidFill>
@@ -4540,7 +4664,7 @@
         <a:buFontTx/>
         <a:buNone/>
         <a:tabLst/>
-        <a:defRPr b="0" baseline="0" cap="none" i="0" spc="0" strike="noStrike" sz="1600" u="none">
+        <a:defRPr sz="1600" b="0" i="0" u="none" strike="noStrike" cap="none" spc="0" baseline="0">
           <a:solidFill>
             <a:schemeClr val="tx1"/>
           </a:solidFill>
@@ -4566,7 +4690,7 @@
         <a:buFontTx/>
         <a:buNone/>
         <a:tabLst/>
-        <a:defRPr b="0" baseline="0" cap="none" i="0" spc="0" strike="noStrike" sz="1600" u="none">
+        <a:defRPr sz="1600" b="0" i="0" u="none" strike="noStrike" cap="none" spc="0" baseline="0">
           <a:solidFill>
             <a:schemeClr val="tx1"/>
           </a:solidFill>
@@ -4592,7 +4716,7 @@
         <a:buFontTx/>
         <a:buNone/>
         <a:tabLst/>
-        <a:defRPr b="0" baseline="0" cap="none" i="0" spc="0" strike="noStrike" sz="1600" u="none">
+        <a:defRPr sz="1600" b="0" i="0" u="none" strike="noStrike" cap="none" spc="0" baseline="0">
           <a:solidFill>
             <a:schemeClr val="tx1"/>
           </a:solidFill>
@@ -4618,7 +4742,7 @@
         <a:buFontTx/>
         <a:buNone/>
         <a:tabLst/>
-        <a:defRPr b="0" baseline="0" cap="none" i="0" spc="0" strike="noStrike" sz="1600" u="none">
+        <a:defRPr sz="1600" b="0" i="0" u="none" strike="noStrike" cap="none" spc="0" baseline="0">
           <a:solidFill>
             <a:schemeClr val="tx1"/>
           </a:solidFill>
@@ -4644,7 +4768,7 @@
         <a:buFontTx/>
         <a:buNone/>
         <a:tabLst/>
-        <a:defRPr b="0" baseline="0" cap="none" i="0" spc="0" strike="noStrike" sz="1600" u="none">
+        <a:defRPr sz="1600" b="0" i="0" u="none" strike="noStrike" cap="none" spc="0" baseline="0">
           <a:solidFill>
             <a:schemeClr val="tx1"/>
           </a:solidFill>
@@ -4670,7 +4794,7 @@
         <a:buFontTx/>
         <a:buNone/>
         <a:tabLst/>
-        <a:defRPr b="0" baseline="0" cap="none" i="0" spc="0" strike="noStrike" sz="1600" u="none">
+        <a:defRPr sz="1600" b="0" i="0" u="none" strike="noStrike" cap="none" spc="0" baseline="0">
           <a:solidFill>
             <a:schemeClr val="tx1"/>
           </a:solidFill>
@@ -4696,7 +4820,7 @@
         <a:buFontTx/>
         <a:buNone/>
         <a:tabLst/>
-        <a:defRPr b="0" baseline="0" cap="none" i="0" spc="0" strike="noStrike" sz="1600" u="none">
+        <a:defRPr sz="1600" b="0" i="0" u="none" strike="noStrike" cap="none" spc="0" baseline="0">
           <a:solidFill>
             <a:schemeClr val="tx1"/>
           </a:solidFill>
@@ -4722,7 +4846,7 @@
         <a:buFontTx/>
         <a:buNone/>
         <a:tabLst/>
-        <a:defRPr b="0" baseline="0" cap="none" i="0" spc="0" strike="noStrike" sz="1600" u="none">
+        <a:defRPr sz="1600" b="0" i="0" u="none" strike="noStrike" cap="none" spc="0" baseline="0">
           <a:solidFill>
             <a:schemeClr val="tx1"/>
           </a:solidFill>
@@ -4748,7 +4872,7 @@
         <a:buFontTx/>
         <a:buNone/>
         <a:tabLst/>
-        <a:defRPr b="0" baseline="0" cap="none" i="0" spc="0" strike="noStrike" sz="1600" u="none">
+        <a:defRPr sz="1600" b="0" i="0" u="none" strike="noStrike" cap="none" spc="0" baseline="0">
           <a:solidFill>
             <a:schemeClr val="tx1"/>
           </a:solidFill>
@@ -4765,7 +4889,7 @@
 </file>
 
 <file path=ppt/slides/slide1.xml><?xml version="1.0" encoding="utf-8"?>
-<p:sld xmlns:a="http://schemas.openxmlformats.org/drawingml/2006/main" xmlns:r="http://schemas.openxmlformats.org/officeDocument/2006/relationships" xmlns:p="http://schemas.openxmlformats.org/presentationml/2006/main" xmlns:m="http://schemas.openxmlformats.org/officeDocument/2006/math" xmlns:a14="http://schemas.microsoft.com/office/drawing/2010/main" showMasterSp="1" showMasterPhAnim="1">
+<p:sld xmlns:a="http://schemas.openxmlformats.org/drawingml/2006/main" xmlns:r="http://schemas.openxmlformats.org/officeDocument/2006/relationships" xmlns:p="http://schemas.openxmlformats.org/presentationml/2006/main">
   <p:cSld>
     <p:spTree>
       <p:nvGrpSpPr>
@@ -4811,17 +4935,76 @@
           </a:ln>
         </p:spPr>
       </p:pic>
+      <p:sp>
+        <p:nvSpPr>
+          <p:cNvPr id="4" name="Источник вдохновения"/>
+          <p:cNvSpPr txBox="1"/>
+          <p:nvPr/>
+        </p:nvSpPr>
+        <p:spPr>
+          <a:xfrm>
+            <a:off x="12018212" y="12945979"/>
+            <a:ext cx="10518269" cy="676833"/>
+          </a:xfrm>
+          <a:prstGeom prst="rect">
+            <a:avLst/>
+          </a:prstGeom>
+          <a:ln w="3175">
+            <a:miter lim="400000"/>
+          </a:ln>
+          <a:extLst>
+            <a:ext uri="{C572A759-6A51-4108-AA02-DFA0A04FC94B}">
+              <ma14:wrappingTextBoxFlag xmlns:ma14="http://schemas.microsoft.com/office/mac/drawingml/2011/main" xmlns:a14="http://schemas.microsoft.com/office/drawing/2010/main" xmlns:m="http://schemas.openxmlformats.org/officeDocument/2006/math" xmlns="" val="1"/>
+            </a:ext>
+          </a:extLst>
+        </p:spPr>
+        <p:txBody>
+          <a:bodyPr lIns="38100" tIns="38100" rIns="38100" bIns="38100" anchor="b">
+            <a:normAutofit/>
+          </a:bodyPr>
+          <a:lstStyle>
+            <a:lvl1pPr defTabSz="615255">
+              <a:lnSpc>
+                <a:spcPct val="80000"/>
+              </a:lnSpc>
+              <a:spcBef>
+                <a:spcPts val="0"/>
+              </a:spcBef>
+              <a:defRPr sz="3391" b="1" cap="all" spc="-169">
+                <a:latin typeface="+mn-lt"/>
+                <a:ea typeface="+mn-ea"/>
+                <a:cs typeface="+mn-cs"/>
+                <a:sym typeface="Avenir Next Regular"/>
+              </a:defRPr>
+            </a:lvl1pPr>
+          </a:lstStyle>
+          <a:p>
+            <a:endParaRPr dirty="0">
+              <a:solidFill>
+                <a:schemeClr val="bg1"/>
+              </a:solidFill>
+            </a:endParaRPr>
+          </a:p>
+        </p:txBody>
+      </p:sp>
     </p:spTree>
   </p:cSld>
   <p:clrMapOvr>
     <a:masterClrMapping/>
   </p:clrMapOvr>
-  <p:transition xmlns:p14="http://schemas.microsoft.com/office/powerpoint/2010/main" spd="med" advClick="1"/>
+  <p:transition spd="med"/>
+  <p:timing>
+    <p:tnLst>
+      <p:par>
+        <p:cTn id="1" dur="indefinite" restart="never" nodeType="tmRoot"/>
+      </p:par>
+    </p:tnLst>
+  </p:timing>
 </p:sld>
 </file>
 
 <file path=ppt/slides/slide2.xml><?xml version="1.0" encoding="utf-8"?>
-<p:sld xmlns:a="http://schemas.openxmlformats.org/drawingml/2006/main" xmlns:r="http://schemas.openxmlformats.org/officeDocument/2006/relationships" xmlns:p="http://schemas.openxmlformats.org/presentationml/2006/main" xmlns:m="http://schemas.openxmlformats.org/officeDocument/2006/math" xmlns:a14="http://schemas.microsoft.com/office/drawing/2010/main" showMasterSp="1" showMasterPhAnim="1">
+<p:sld xmlns:a="http://schemas.openxmlformats.org/drawingml/2006/main" xmlns:r="http://schemas.openxmlformats.org/officeDocument/2006/relationships" xmlns:p="http://schemas.openxmlformats.org/presentationml/2006/main">
   <p:cSld>
     <p:spTree>
       <p:nvGrpSpPr>
@@ -4869,7 +5052,9 @@
       <p:sp>
         <p:nvSpPr>
           <p:cNvPr id="188" name="Проблема?"/>
-          <p:cNvSpPr txBox="1"/>
+          <p:cNvSpPr txBox="1">
+            <a:spLocks noGrp="1"/>
+          </p:cNvSpPr>
           <p:nvPr>
             <p:ph type="title"/>
           </p:nvPr>
@@ -4887,7 +5072,7 @@
           <a:bodyPr/>
           <a:lstStyle>
             <a:lvl1pPr defTabSz="1126033">
-              <a:defRPr spc="-640" sz="12804">
+              <a:defRPr sz="12804" spc="-640">
                 <a:solidFill>
                   <a:srgbClr val="FFFFFF"/>
                 </a:solidFill>
@@ -4895,7 +5080,6 @@
             </a:lvl1pPr>
           </a:lstStyle>
           <a:p>
-            <a:pPr/>
             <a:r>
               <a:t>Проблема?</a:t>
             </a:r>
@@ -4905,7 +5089,9 @@
       <p:sp>
         <p:nvSpPr>
           <p:cNvPr id="189" name="1. Абстрактные цифры не мотивируют: Таблицы и сухие графики вызывают стресс и чувство вины, а не желание действовать.…"/>
-          <p:cNvSpPr txBox="1"/>
+          <p:cNvSpPr txBox="1">
+            <a:spLocks noGrp="1"/>
+          </p:cNvSpPr>
           <p:nvPr>
             <p:ph type="body" sz="half" idx="1"/>
           </p:nvPr>
@@ -4927,26 +5113,171 @@
               <a:spcBef>
                 <a:spcPts val="2700"/>
               </a:spcBef>
-              <a:defRPr cap="none" spc="0" sz="3116">
+              <a:defRPr sz="3116" cap="none" spc="0">
                 <a:solidFill>
                   <a:srgbClr val="FFFFFF"/>
                 </a:solidFill>
               </a:defRPr>
             </a:pPr>
             <a:r>
+              <a:rPr dirty="0"/>
               <a:t>1. </a:t>
             </a:r>
             <a:r>
-              <a:rPr b="1">
+              <a:rPr b="1" dirty="0" err="1">
                 <a:latin typeface="Helvetica"/>
                 <a:ea typeface="Helvetica"/>
                 <a:cs typeface="Helvetica"/>
                 <a:sym typeface="Helvetica"/>
               </a:rPr>
-              <a:t>Абстрактные цифры не мотивируют:</a:t>
-            </a:r>
-            <a:r>
-              <a:t> Таблицы и сухие графики вызывают стресс и чувство вины, а не желание действовать.</a:t>
+              <a:t>Абстрактные</a:t>
+            </a:r>
+            <a:r>
+              <a:rPr b="1" dirty="0">
+                <a:latin typeface="Helvetica"/>
+                <a:ea typeface="Helvetica"/>
+                <a:cs typeface="Helvetica"/>
+                <a:sym typeface="Helvetica"/>
+              </a:rPr>
+              <a:t> </a:t>
+            </a:r>
+            <a:r>
+              <a:rPr b="1" dirty="0" err="1">
+                <a:latin typeface="Helvetica"/>
+                <a:ea typeface="Helvetica"/>
+                <a:cs typeface="Helvetica"/>
+                <a:sym typeface="Helvetica"/>
+              </a:rPr>
+              <a:t>цифры</a:t>
+            </a:r>
+            <a:r>
+              <a:rPr b="1" dirty="0">
+                <a:latin typeface="Helvetica"/>
+                <a:ea typeface="Helvetica"/>
+                <a:cs typeface="Helvetica"/>
+                <a:sym typeface="Helvetica"/>
+              </a:rPr>
+              <a:t> </a:t>
+            </a:r>
+            <a:r>
+              <a:rPr b="1" dirty="0" err="1">
+                <a:latin typeface="Helvetica"/>
+                <a:ea typeface="Helvetica"/>
+                <a:cs typeface="Helvetica"/>
+                <a:sym typeface="Helvetica"/>
+              </a:rPr>
+              <a:t>не</a:t>
+            </a:r>
+            <a:r>
+              <a:rPr b="1" dirty="0">
+                <a:latin typeface="Helvetica"/>
+                <a:ea typeface="Helvetica"/>
+                <a:cs typeface="Helvetica"/>
+                <a:sym typeface="Helvetica"/>
+              </a:rPr>
+              <a:t> </a:t>
+            </a:r>
+            <a:r>
+              <a:rPr b="1" dirty="0" err="1">
+                <a:latin typeface="Helvetica"/>
+                <a:ea typeface="Helvetica"/>
+                <a:cs typeface="Helvetica"/>
+                <a:sym typeface="Helvetica"/>
+              </a:rPr>
+              <a:t>мотивируют</a:t>
+            </a:r>
+            <a:r>
+              <a:rPr b="1" dirty="0">
+                <a:latin typeface="Helvetica"/>
+                <a:ea typeface="Helvetica"/>
+                <a:cs typeface="Helvetica"/>
+                <a:sym typeface="Helvetica"/>
+              </a:rPr>
+              <a:t>:</a:t>
+            </a:r>
+            <a:r>
+              <a:rPr dirty="0"/>
+              <a:t> </a:t>
+            </a:r>
+            <a:r>
+              <a:rPr dirty="0" err="1"/>
+              <a:t>Таблицы</a:t>
+            </a:r>
+            <a:r>
+              <a:rPr dirty="0"/>
+              <a:t> и </a:t>
+            </a:r>
+            <a:r>
+              <a:rPr dirty="0" err="1"/>
+              <a:t>сухие</a:t>
+            </a:r>
+            <a:r>
+              <a:rPr dirty="0"/>
+              <a:t> </a:t>
+            </a:r>
+            <a:r>
+              <a:rPr dirty="0" err="1"/>
+              <a:t>графики</a:t>
+            </a:r>
+            <a:r>
+              <a:rPr dirty="0"/>
+              <a:t> </a:t>
+            </a:r>
+            <a:r>
+              <a:rPr dirty="0" err="1"/>
+              <a:t>вызывают</a:t>
+            </a:r>
+            <a:r>
+              <a:rPr dirty="0"/>
+              <a:t> </a:t>
+            </a:r>
+            <a:r>
+              <a:rPr dirty="0" err="1"/>
+              <a:t>стресс</a:t>
+            </a:r>
+            <a:r>
+              <a:rPr dirty="0"/>
+              <a:t> и </a:t>
+            </a:r>
+            <a:r>
+              <a:rPr dirty="0" err="1"/>
+              <a:t>чувство</a:t>
+            </a:r>
+            <a:r>
+              <a:rPr dirty="0"/>
+              <a:t> </a:t>
+            </a:r>
+            <a:r>
+              <a:rPr dirty="0" err="1"/>
+              <a:t>вины</a:t>
+            </a:r>
+            <a:r>
+              <a:rPr dirty="0"/>
+              <a:t>, а </a:t>
+            </a:r>
+            <a:r>
+              <a:rPr dirty="0" err="1"/>
+              <a:t>не</a:t>
+            </a:r>
+            <a:r>
+              <a:rPr dirty="0"/>
+              <a:t> </a:t>
+            </a:r>
+            <a:r>
+              <a:rPr dirty="0" err="1"/>
+              <a:t>желание</a:t>
+            </a:r>
+            <a:r>
+              <a:rPr dirty="0"/>
+              <a:t> </a:t>
+            </a:r>
+            <a:r>
+              <a:rPr dirty="0" err="1"/>
+              <a:t>действовать</a:t>
+            </a:r>
+            <a:r>
+              <a:rPr dirty="0"/>
+              <a:t>.</a:t>
             </a:r>
           </a:p>
           <a:p>
@@ -4954,26 +5285,185 @@
               <a:spcBef>
                 <a:spcPts val="2700"/>
               </a:spcBef>
-              <a:defRPr cap="none" spc="0" sz="3116">
+              <a:defRPr sz="3116" cap="none" spc="0">
                 <a:solidFill>
                   <a:srgbClr val="FFFFFF"/>
                 </a:solidFill>
               </a:defRPr>
             </a:pPr>
             <a:r>
+              <a:rPr dirty="0"/>
               <a:t>2. </a:t>
             </a:r>
             <a:r>
-              <a:rPr b="1">
+              <a:rPr b="1" dirty="0" err="1">
                 <a:latin typeface="Helvetica"/>
                 <a:ea typeface="Helvetica"/>
                 <a:cs typeface="Helvetica"/>
                 <a:sym typeface="Helvetica"/>
               </a:rPr>
-              <a:t>Рутина убивает привычку:</a:t>
-            </a:r>
-            <a:r>
-              <a:t> 80% пользователей бросают вести бюджет через 1–2 месяца, потому что ручной учет воспринимается как скучная обязанность.</a:t>
+              <a:t>Рутина</a:t>
+            </a:r>
+            <a:r>
+              <a:rPr b="1" dirty="0">
+                <a:latin typeface="Helvetica"/>
+                <a:ea typeface="Helvetica"/>
+                <a:cs typeface="Helvetica"/>
+                <a:sym typeface="Helvetica"/>
+              </a:rPr>
+              <a:t> </a:t>
+            </a:r>
+            <a:r>
+              <a:rPr b="1" dirty="0" err="1">
+                <a:latin typeface="Helvetica"/>
+                <a:ea typeface="Helvetica"/>
+                <a:cs typeface="Helvetica"/>
+                <a:sym typeface="Helvetica"/>
+              </a:rPr>
+              <a:t>убивает</a:t>
+            </a:r>
+            <a:r>
+              <a:rPr b="1" dirty="0">
+                <a:latin typeface="Helvetica"/>
+                <a:ea typeface="Helvetica"/>
+                <a:cs typeface="Helvetica"/>
+                <a:sym typeface="Helvetica"/>
+              </a:rPr>
+              <a:t> </a:t>
+            </a:r>
+            <a:r>
+              <a:rPr b="1" dirty="0" err="1">
+                <a:latin typeface="Helvetica"/>
+                <a:ea typeface="Helvetica"/>
+                <a:cs typeface="Helvetica"/>
+                <a:sym typeface="Helvetica"/>
+              </a:rPr>
+              <a:t>привычку</a:t>
+            </a:r>
+            <a:r>
+              <a:rPr b="1" dirty="0">
+                <a:latin typeface="Helvetica"/>
+                <a:ea typeface="Helvetica"/>
+                <a:cs typeface="Helvetica"/>
+                <a:sym typeface="Helvetica"/>
+              </a:rPr>
+              <a:t>:</a:t>
+            </a:r>
+            <a:r>
+              <a:rPr dirty="0"/>
+              <a:t> 80% </a:t>
+            </a:r>
+            <a:r>
+              <a:rPr dirty="0" err="1"/>
+              <a:t>пользователей</a:t>
+            </a:r>
+            <a:r>
+              <a:rPr dirty="0"/>
+              <a:t> </a:t>
+            </a:r>
+            <a:r>
+              <a:rPr dirty="0" err="1"/>
+              <a:t>бросают</a:t>
+            </a:r>
+            <a:r>
+              <a:rPr dirty="0"/>
+              <a:t> </a:t>
+            </a:r>
+            <a:r>
+              <a:rPr dirty="0" err="1"/>
+              <a:t>вести</a:t>
+            </a:r>
+            <a:r>
+              <a:rPr dirty="0"/>
+              <a:t> </a:t>
+            </a:r>
+            <a:r>
+              <a:rPr dirty="0" err="1"/>
+              <a:t>бюджет</a:t>
+            </a:r>
+            <a:r>
+              <a:rPr dirty="0"/>
+              <a:t> </a:t>
+            </a:r>
+            <a:r>
+              <a:rPr dirty="0" err="1"/>
+              <a:t>через</a:t>
+            </a:r>
+            <a:r>
+              <a:rPr dirty="0"/>
+              <a:t> 1–2 </a:t>
+            </a:r>
+            <a:r>
+              <a:rPr dirty="0" err="1"/>
+              <a:t>месяца</a:t>
+            </a:r>
+            <a:r>
+              <a:rPr dirty="0"/>
+              <a:t>, </a:t>
+            </a:r>
+            <a:r>
+              <a:rPr dirty="0" err="1"/>
+              <a:t>потому</a:t>
+            </a:r>
+            <a:r>
+              <a:rPr dirty="0"/>
+              <a:t> </a:t>
+            </a:r>
+            <a:r>
+              <a:rPr dirty="0" err="1"/>
+              <a:t>что</a:t>
+            </a:r>
+            <a:r>
+              <a:rPr dirty="0"/>
+              <a:t> </a:t>
+            </a:r>
+            <a:r>
+              <a:rPr dirty="0" err="1"/>
+              <a:t>ручной</a:t>
+            </a:r>
+            <a:r>
+              <a:rPr dirty="0"/>
+              <a:t> </a:t>
+            </a:r>
+            <a:r>
+              <a:rPr dirty="0" err="1"/>
+              <a:t>учет</a:t>
+            </a:r>
+            <a:r>
+              <a:rPr dirty="0"/>
+              <a:t> </a:t>
+            </a:r>
+            <a:r>
+              <a:rPr dirty="0" err="1"/>
+              <a:t>воспринимается</a:t>
+            </a:r>
+            <a:r>
+              <a:rPr dirty="0"/>
+              <a:t> </a:t>
+            </a:r>
+            <a:r>
+              <a:rPr dirty="0" err="1"/>
+              <a:t>как</a:t>
+            </a:r>
+            <a:r>
+              <a:rPr dirty="0"/>
+              <a:t> </a:t>
+            </a:r>
+            <a:r>
+              <a:rPr dirty="0" err="1"/>
+              <a:t>скучная</a:t>
+            </a:r>
+            <a:r>
+              <a:rPr dirty="0"/>
+              <a:t> </a:t>
+            </a:r>
+            <a:r>
+              <a:rPr dirty="0" err="1"/>
+              <a:t>обязанность</a:t>
+            </a:r>
+            <a:r>
+              <a:rPr dirty="0"/>
+              <a:t>.</a:t>
             </a:r>
           </a:p>
           <a:p>
@@ -4981,26 +5471,209 @@
               <a:spcBef>
                 <a:spcPts val="2700"/>
               </a:spcBef>
-              <a:defRPr cap="none" spc="0" sz="3116">
+              <a:defRPr sz="3116" cap="none" spc="0">
                 <a:solidFill>
                   <a:srgbClr val="FFFFFF"/>
                 </a:solidFill>
               </a:defRPr>
             </a:pPr>
             <a:r>
+              <a:rPr dirty="0"/>
               <a:t>3. </a:t>
             </a:r>
             <a:r>
-              <a:rPr b="1">
+              <a:rPr b="1" dirty="0" err="1">
                 <a:latin typeface="Helvetica"/>
                 <a:ea typeface="Helvetica"/>
                 <a:cs typeface="Helvetica"/>
                 <a:sym typeface="Helvetica"/>
               </a:rPr>
-              <a:t>Отсутствие мгновенной награды:</a:t>
-            </a:r>
-            <a:r>
-              <a:t> Мозг не получает дофаминового отклика за сэкономленные деньги «здесь и сейчас», из-за чего импульсивные траты побеждают долгосрочные цели.</a:t>
+              <a:t>Отсутствие</a:t>
+            </a:r>
+            <a:r>
+              <a:rPr b="1" dirty="0">
+                <a:latin typeface="Helvetica"/>
+                <a:ea typeface="Helvetica"/>
+                <a:cs typeface="Helvetica"/>
+                <a:sym typeface="Helvetica"/>
+              </a:rPr>
+              <a:t> </a:t>
+            </a:r>
+            <a:r>
+              <a:rPr b="1" dirty="0" err="1">
+                <a:latin typeface="Helvetica"/>
+                <a:ea typeface="Helvetica"/>
+                <a:cs typeface="Helvetica"/>
+                <a:sym typeface="Helvetica"/>
+              </a:rPr>
+              <a:t>мгновенной</a:t>
+            </a:r>
+            <a:r>
+              <a:rPr b="1" dirty="0">
+                <a:latin typeface="Helvetica"/>
+                <a:ea typeface="Helvetica"/>
+                <a:cs typeface="Helvetica"/>
+                <a:sym typeface="Helvetica"/>
+              </a:rPr>
+              <a:t> </a:t>
+            </a:r>
+            <a:r>
+              <a:rPr b="1" dirty="0" err="1">
+                <a:latin typeface="Helvetica"/>
+                <a:ea typeface="Helvetica"/>
+                <a:cs typeface="Helvetica"/>
+                <a:sym typeface="Helvetica"/>
+              </a:rPr>
+              <a:t>награды</a:t>
+            </a:r>
+            <a:r>
+              <a:rPr b="1" dirty="0">
+                <a:latin typeface="Helvetica"/>
+                <a:ea typeface="Helvetica"/>
+                <a:cs typeface="Helvetica"/>
+                <a:sym typeface="Helvetica"/>
+              </a:rPr>
+              <a:t>:</a:t>
+            </a:r>
+            <a:r>
+              <a:rPr dirty="0"/>
+              <a:t> </a:t>
+            </a:r>
+            <a:r>
+              <a:rPr dirty="0" err="1"/>
+              <a:t>Мозг</a:t>
+            </a:r>
+            <a:r>
+              <a:rPr dirty="0"/>
+              <a:t> </a:t>
+            </a:r>
+            <a:r>
+              <a:rPr dirty="0" err="1"/>
+              <a:t>не</a:t>
+            </a:r>
+            <a:r>
+              <a:rPr dirty="0"/>
+              <a:t> </a:t>
+            </a:r>
+            <a:r>
+              <a:rPr dirty="0" err="1"/>
+              <a:t>получает</a:t>
+            </a:r>
+            <a:r>
+              <a:rPr dirty="0"/>
+              <a:t> </a:t>
+            </a:r>
+            <a:r>
+              <a:rPr dirty="0" err="1"/>
+              <a:t>дофаминового</a:t>
+            </a:r>
+            <a:r>
+              <a:rPr dirty="0"/>
+              <a:t> </a:t>
+            </a:r>
+            <a:r>
+              <a:rPr dirty="0" err="1"/>
+              <a:t>отклика</a:t>
+            </a:r>
+            <a:r>
+              <a:rPr dirty="0"/>
+              <a:t> </a:t>
+            </a:r>
+            <a:r>
+              <a:rPr dirty="0" err="1"/>
+              <a:t>за</a:t>
+            </a:r>
+            <a:r>
+              <a:rPr dirty="0"/>
+              <a:t> </a:t>
+            </a:r>
+            <a:r>
+              <a:rPr dirty="0" err="1"/>
+              <a:t>сэкономленные</a:t>
+            </a:r>
+            <a:r>
+              <a:rPr dirty="0"/>
+              <a:t> </a:t>
+            </a:r>
+            <a:r>
+              <a:rPr dirty="0" err="1"/>
+              <a:t>деньги</a:t>
+            </a:r>
+            <a:r>
+              <a:rPr dirty="0"/>
+              <a:t> «</a:t>
+            </a:r>
+            <a:r>
+              <a:rPr dirty="0" err="1"/>
+              <a:t>здесь</a:t>
+            </a:r>
+            <a:r>
+              <a:rPr dirty="0"/>
+              <a:t> и </a:t>
+            </a:r>
+            <a:r>
+              <a:rPr dirty="0" err="1"/>
+              <a:t>сейчас</a:t>
+            </a:r>
+            <a:r>
+              <a:rPr dirty="0"/>
+              <a:t>», </a:t>
+            </a:r>
+            <a:r>
+              <a:rPr dirty="0" err="1"/>
+              <a:t>из-за</a:t>
+            </a:r>
+            <a:r>
+              <a:rPr dirty="0"/>
+              <a:t> </a:t>
+            </a:r>
+            <a:r>
+              <a:rPr dirty="0" err="1"/>
+              <a:t>чего</a:t>
+            </a:r>
+            <a:r>
+              <a:rPr dirty="0"/>
+              <a:t> </a:t>
+            </a:r>
+            <a:r>
+              <a:rPr dirty="0" err="1"/>
+              <a:t>импульсивные</a:t>
+            </a:r>
+            <a:r>
+              <a:rPr dirty="0"/>
+              <a:t> </a:t>
+            </a:r>
+            <a:r>
+              <a:rPr dirty="0" err="1"/>
+              <a:t>траты</a:t>
+            </a:r>
+            <a:r>
+              <a:rPr dirty="0"/>
+              <a:t> </a:t>
+            </a:r>
+            <a:r>
+              <a:rPr dirty="0" err="1"/>
+              <a:t>побеждают</a:t>
+            </a:r>
+            <a:r>
+              <a:rPr dirty="0"/>
+              <a:t> </a:t>
+            </a:r>
+            <a:r>
+              <a:rPr dirty="0" err="1"/>
+              <a:t>долгосрочные</a:t>
+            </a:r>
+            <a:r>
+              <a:rPr dirty="0"/>
+              <a:t> </a:t>
+            </a:r>
+            <a:r>
+              <a:rPr dirty="0" err="1"/>
+              <a:t>цели</a:t>
+            </a:r>
+            <a:r>
+              <a:rPr dirty="0"/>
+              <a:t>.</a:t>
             </a:r>
           </a:p>
         </p:txBody>
@@ -5010,12 +5683,19 @@
   <p:clrMapOvr>
     <a:masterClrMapping/>
   </p:clrMapOvr>
-  <p:transition xmlns:p14="http://schemas.microsoft.com/office/powerpoint/2010/main" spd="med" advClick="1"/>
+  <p:transition spd="med"/>
+  <p:timing>
+    <p:tnLst>
+      <p:par>
+        <p:cTn id="1" dur="indefinite" restart="never" nodeType="tmRoot"/>
+      </p:par>
+    </p:tnLst>
+  </p:timing>
 </p:sld>
 </file>
 
 <file path=ppt/slides/slide3.xml><?xml version="1.0" encoding="utf-8"?>
-<p:sld xmlns:a="http://schemas.openxmlformats.org/drawingml/2006/main" xmlns:r="http://schemas.openxmlformats.org/officeDocument/2006/relationships" xmlns:p="http://schemas.openxmlformats.org/presentationml/2006/main" xmlns:m="http://schemas.openxmlformats.org/officeDocument/2006/math" xmlns:a14="http://schemas.microsoft.com/office/drawing/2010/main" showMasterSp="1" showMasterPhAnim="1">
+<p:sld xmlns:a="http://schemas.openxmlformats.org/drawingml/2006/main" xmlns:r="http://schemas.openxmlformats.org/officeDocument/2006/relationships" xmlns:p="http://schemas.openxmlformats.org/presentationml/2006/main">
   <p:cSld>
     <p:spTree>
       <p:nvGrpSpPr>
@@ -5063,7 +5743,9 @@
       <p:sp>
         <p:nvSpPr>
           <p:cNvPr id="192" name="Какова идея?"/>
-          <p:cNvSpPr txBox="1"/>
+          <p:cNvSpPr txBox="1">
+            <a:spLocks noGrp="1"/>
+          </p:cNvSpPr>
           <p:nvPr>
             <p:ph type="title"/>
           </p:nvPr>
@@ -5071,7 +5753,7 @@
         <p:spPr>
           <a:xfrm>
             <a:off x="8436287" y="287495"/>
-            <a:ext cx="12216334" cy="4000501"/>
+            <a:ext cx="12216334" cy="3690947"/>
           </a:xfrm>
           <a:prstGeom prst="rect">
             <a:avLst/>
@@ -5081,13 +5763,25 @@
           <a:bodyPr/>
           <a:lstStyle>
             <a:lvl1pPr defTabSz="1102816">
-              <a:defRPr spc="-627" sz="12540"/>
+              <a:defRPr sz="12540" spc="-627"/>
             </a:lvl1pPr>
           </a:lstStyle>
           <a:p>
-            <a:pPr/>
-            <a:r>
-              <a:t>Какова идея?</a:t>
+            <a:r>
+              <a:rPr dirty="0" err="1"/>
+              <a:t>Какова</a:t>
+            </a:r>
+            <a:r>
+              <a:rPr dirty="0"/>
+              <a:t> </a:t>
+            </a:r>
+            <a:r>
+              <a:rPr dirty="0" err="1"/>
+              <a:t>идея</a:t>
+            </a:r>
+            <a:r>
+              <a:rPr dirty="0"/>
+              <a:t>?</a:t>
             </a:r>
           </a:p>
         </p:txBody>
@@ -5111,13 +5805,13 @@
           </a:ln>
           <a:extLst>
             <a:ext uri="{C572A759-6A51-4108-AA02-DFA0A04FC94B}">
-              <ma14:wrappingTextBoxFlag xmlns:ma14="http://schemas.microsoft.com/office/mac/drawingml/2011/main" val="1"/>
+              <ma14:wrappingTextBoxFlag xmlns:ma14="http://schemas.microsoft.com/office/mac/drawingml/2011/main" xmlns:a14="http://schemas.microsoft.com/office/drawing/2010/main" xmlns:m="http://schemas.openxmlformats.org/officeDocument/2006/math" xmlns="" val="1"/>
             </a:ext>
           </a:extLst>
         </p:spPr>
         <p:txBody>
           <a:bodyPr lIns="38100" tIns="38100" rIns="38100" bIns="38100" anchor="b">
-            <a:normAutofit fontScale="100000" lnSpcReduction="0"/>
+            <a:normAutofit/>
           </a:bodyPr>
           <a:lstStyle>
             <a:lvl1pPr defTabSz="615255">
@@ -5127,7 +5821,7 @@
               <a:spcBef>
                 <a:spcPts val="0"/>
               </a:spcBef>
-              <a:defRPr b="1" cap="all" spc="-169" sz="3391">
+              <a:defRPr sz="3391" b="1" cap="all" spc="-169">
                 <a:latin typeface="+mn-lt"/>
                 <a:ea typeface="+mn-ea"/>
                 <a:cs typeface="+mn-cs"/>
@@ -5136,10 +5830,19 @@
             </a:lvl1pPr>
           </a:lstStyle>
           <a:p>
-            <a:pPr/>
-            <a:r>
-              <a:t>Источник вдохновения</a:t>
-            </a:r>
+            <a:r>
+              <a:rPr dirty="0" err="1"/>
+              <a:t>Источник</a:t>
+            </a:r>
+            <a:r>
+              <a:rPr dirty="0"/>
+              <a:t> </a:t>
+            </a:r>
+            <a:r>
+              <a:rPr dirty="0" err="1"/>
+              <a:t>вдохновения</a:t>
+            </a:r>
+            <a:endParaRPr dirty="0"/>
           </a:p>
         </p:txBody>
       </p:sp>
@@ -5169,7 +5872,7 @@
           <a:bodyPr lIns="38100" tIns="38100" rIns="38100" bIns="38100" anchor="ctr"/>
           <a:lstStyle/>
           <a:p>
-            <a:pPr/>
+            <a:endParaRPr/>
           </a:p>
         </p:txBody>
       </p:sp>
@@ -5178,12 +5881,473 @@
   <p:clrMapOvr>
     <a:masterClrMapping/>
   </p:clrMapOvr>
-  <p:transition xmlns:p14="http://schemas.microsoft.com/office/powerpoint/2010/main" spd="med" advClick="1"/>
+  <p:transition spd="med"/>
+  <p:timing>
+    <p:tnLst>
+      <p:par>
+        <p:cTn id="1" dur="indefinite" restart="never" nodeType="tmRoot"/>
+      </p:par>
+    </p:tnLst>
+  </p:timing>
 </p:sld>
 </file>
 
 <file path=ppt/slides/slide4.xml><?xml version="1.0" encoding="utf-8"?>
-<p:sld xmlns:a="http://schemas.openxmlformats.org/drawingml/2006/main" xmlns:r="http://schemas.openxmlformats.org/officeDocument/2006/relationships" xmlns:p="http://schemas.openxmlformats.org/presentationml/2006/main" xmlns:m="http://schemas.openxmlformats.org/officeDocument/2006/math" xmlns:a14="http://schemas.microsoft.com/office/drawing/2010/main" showMasterSp="1" showMasterPhAnim="1">
+<p:sld xmlns:a="http://schemas.openxmlformats.org/drawingml/2006/main" xmlns:r="http://schemas.openxmlformats.org/officeDocument/2006/relationships" xmlns:p="http://schemas.openxmlformats.org/presentationml/2006/main">
+  <p:cSld>
+    <p:spTree>
+      <p:nvGrpSpPr>
+        <p:cNvPr id="1" name=""/>
+        <p:cNvGrpSpPr/>
+        <p:nvPr/>
+      </p:nvGrpSpPr>
+      <p:grpSpPr>
+        <a:xfrm>
+          <a:off x="0" y="0"/>
+          <a:ext cx="0" cy="0"/>
+          <a:chOff x="0" y="0"/>
+          <a:chExt cx="0" cy="0"/>
+        </a:xfrm>
+      </p:grpSpPr>
+      <p:sp>
+        <p:nvSpPr>
+          <p:cNvPr id="198" name="Используемые технологии?"/>
+          <p:cNvSpPr txBox="1">
+            <a:spLocks noGrp="1"/>
+          </p:cNvSpPr>
+          <p:nvPr>
+            <p:ph type="title"/>
+          </p:nvPr>
+        </p:nvSpPr>
+        <p:spPr>
+          <a:xfrm>
+            <a:off x="4019549" y="4521762"/>
+            <a:ext cx="13208215" cy="4000501"/>
+          </a:xfrm>
+          <a:prstGeom prst="rect">
+            <a:avLst/>
+          </a:prstGeom>
+        </p:spPr>
+        <p:txBody>
+          <a:bodyPr/>
+          <a:lstStyle>
+            <a:lvl1pPr defTabSz="1102816">
+              <a:defRPr sz="12540" spc="-627"/>
+            </a:lvl1pPr>
+          </a:lstStyle>
+          <a:p>
+            <a:r>
+              <a:rPr dirty="0" err="1"/>
+              <a:t>Используемые</a:t>
+            </a:r>
+            <a:r>
+              <a:rPr dirty="0"/>
+              <a:t> </a:t>
+            </a:r>
+            <a:r>
+              <a:rPr dirty="0" err="1"/>
+              <a:t>технологии</a:t>
+            </a:r>
+            <a:r>
+              <a:rPr dirty="0"/>
+              <a:t>?</a:t>
+            </a:r>
+          </a:p>
+        </p:txBody>
+      </p:sp>
+      <p:pic>
+        <p:nvPicPr>
+          <p:cNvPr id="199" name="Изображение 6.jpg" descr="Изображение 6.jpg"/>
+          <p:cNvPicPr>
+            <a:picLocks noChangeAspect="1"/>
+          </p:cNvPicPr>
+          <p:nvPr/>
+        </p:nvPicPr>
+        <p:blipFill>
+          <a:blip r:embed="rId2">
+            <a:extLst/>
+          </a:blip>
+          <a:stretch>
+            <a:fillRect/>
+          </a:stretch>
+        </p:blipFill>
+        <p:spPr>
+          <a:xfrm>
+            <a:off x="13975798" y="1565971"/>
+            <a:ext cx="2397126" cy="2397126"/>
+          </a:xfrm>
+          <a:prstGeom prst="rect">
+            <a:avLst/>
+          </a:prstGeom>
+          <a:ln w="3175">
+            <a:miter lim="400000"/>
+          </a:ln>
+        </p:spPr>
+      </p:pic>
+      <p:pic>
+        <p:nvPicPr>
+          <p:cNvPr id="200" name="Изображение 7.jpg" descr="Изображение 7.jpg"/>
+          <p:cNvPicPr>
+            <a:picLocks noChangeAspect="1"/>
+          </p:cNvPicPr>
+          <p:nvPr/>
+        </p:nvPicPr>
+        <p:blipFill>
+          <a:blip r:embed="rId3">
+            <a:extLst/>
+          </a:blip>
+          <a:stretch>
+            <a:fillRect/>
+          </a:stretch>
+        </p:blipFill>
+        <p:spPr>
+          <a:xfrm>
+            <a:off x="9044825" y="1086423"/>
+            <a:ext cx="2873173" cy="2873173"/>
+          </a:xfrm>
+          <a:prstGeom prst="rect">
+            <a:avLst/>
+          </a:prstGeom>
+          <a:ln w="3175">
+            <a:miter lim="400000"/>
+          </a:ln>
+        </p:spPr>
+      </p:pic>
+      <p:pic>
+        <p:nvPicPr>
+          <p:cNvPr id="201" name="121405384-444d7300-c95d-11eb-959f-913020d3bf90.png" descr="121405384-444d7300-c95d-11eb-959f-913020d3bf90.png"/>
+          <p:cNvPicPr>
+            <a:picLocks noChangeAspect="1"/>
+          </p:cNvPicPr>
+          <p:nvPr/>
+        </p:nvPicPr>
+        <p:blipFill>
+          <a:blip r:embed="rId4">
+            <a:extLst/>
+          </a:blip>
+          <a:stretch>
+            <a:fillRect/>
+          </a:stretch>
+        </p:blipFill>
+        <p:spPr>
+          <a:xfrm>
+            <a:off x="11101761" y="9084429"/>
+            <a:ext cx="3354067" cy="3167870"/>
+          </a:xfrm>
+          <a:prstGeom prst="rect">
+            <a:avLst/>
+          </a:prstGeom>
+          <a:ln w="3175">
+            <a:miter lim="400000"/>
+          </a:ln>
+        </p:spPr>
+      </p:pic>
+      <p:pic>
+        <p:nvPicPr>
+          <p:cNvPr id="202" name="63a052fce949ec8a415b213ad03077e8.png" descr="63a052fce949ec8a415b213ad03077e8.png"/>
+          <p:cNvPicPr>
+            <a:picLocks noChangeAspect="1"/>
+          </p:cNvPicPr>
+          <p:nvPr/>
+        </p:nvPicPr>
+        <p:blipFill>
+          <a:blip r:embed="rId5">
+            <a:extLst/>
+          </a:blip>
+          <a:stretch>
+            <a:fillRect/>
+          </a:stretch>
+        </p:blipFill>
+        <p:spPr>
+          <a:xfrm>
+            <a:off x="5530211" y="9816116"/>
+            <a:ext cx="5562803" cy="2781402"/>
+          </a:xfrm>
+          <a:prstGeom prst="rect">
+            <a:avLst/>
+          </a:prstGeom>
+          <a:ln w="3175">
+            <a:miter lim="400000"/>
+          </a:ln>
+        </p:spPr>
+      </p:pic>
+      <p:pic>
+        <p:nvPicPr>
+          <p:cNvPr id="203" name="Снимок экрана 2024-11-10 в 22.58.34.png" descr="Снимок экрана 2024-11-10 в 22.58.34.png"/>
+          <p:cNvPicPr>
+            <a:picLocks noChangeAspect="1"/>
+          </p:cNvPicPr>
+          <p:nvPr/>
+        </p:nvPicPr>
+        <p:blipFill>
+          <a:blip r:embed="rId6">
+            <a:extLst/>
+          </a:blip>
+          <a:stretch>
+            <a:fillRect/>
+          </a:stretch>
+        </p:blipFill>
+        <p:spPr>
+          <a:xfrm>
+            <a:off x="16360638" y="6730604"/>
+            <a:ext cx="3454401" cy="4533901"/>
+          </a:xfrm>
+          <a:prstGeom prst="rect">
+            <a:avLst/>
+          </a:prstGeom>
+          <a:ln w="3175">
+            <a:miter lim="400000"/>
+          </a:ln>
+        </p:spPr>
+      </p:pic>
+      <p:pic>
+        <p:nvPicPr>
+          <p:cNvPr id="204" name="Изображение 8.jpg" descr="Изображение 8.jpg"/>
+          <p:cNvPicPr>
+            <a:picLocks noChangeAspect="1"/>
+          </p:cNvPicPr>
+          <p:nvPr/>
+        </p:nvPicPr>
+        <p:blipFill>
+          <a:blip r:embed="rId7">
+            <a:extLst/>
+          </a:blip>
+          <a:stretch>
+            <a:fillRect/>
+          </a:stretch>
+        </p:blipFill>
+        <p:spPr>
+          <a:xfrm>
+            <a:off x="18614811" y="2987247"/>
+            <a:ext cx="1912982" cy="1912983"/>
+          </a:xfrm>
+          <a:prstGeom prst="rect">
+            <a:avLst/>
+          </a:prstGeom>
+          <a:ln w="3175">
+            <a:miter lim="400000"/>
+          </a:ln>
+        </p:spPr>
+      </p:pic>
+      <p:pic>
+        <p:nvPicPr>
+          <p:cNvPr id="205" name="Изображение 9.jpg" descr="Изображение 9.jpg"/>
+          <p:cNvPicPr>
+            <a:picLocks noChangeAspect="1"/>
+          </p:cNvPicPr>
+          <p:nvPr/>
+        </p:nvPicPr>
+        <p:blipFill>
+          <a:blip r:embed="rId8">
+            <a:extLst/>
+          </a:blip>
+          <a:stretch>
+            <a:fillRect/>
+          </a:stretch>
+        </p:blipFill>
+        <p:spPr>
+          <a:xfrm>
+            <a:off x="1691816" y="8788703"/>
+            <a:ext cx="2873173" cy="2873173"/>
+          </a:xfrm>
+          <a:prstGeom prst="rect">
+            <a:avLst/>
+          </a:prstGeom>
+          <a:ln w="3175">
+            <a:miter lim="400000"/>
+          </a:ln>
+        </p:spPr>
+      </p:pic>
+      <p:pic>
+        <p:nvPicPr>
+          <p:cNvPr id="206" name="Изображение 10.jpg" descr="Изображение 10.jpg"/>
+          <p:cNvPicPr>
+            <a:picLocks noChangeAspect="1"/>
+          </p:cNvPicPr>
+          <p:nvPr/>
+        </p:nvPicPr>
+        <p:blipFill>
+          <a:blip r:embed="rId9">
+            <a:extLst/>
+          </a:blip>
+          <a:stretch>
+            <a:fillRect/>
+          </a:stretch>
+        </p:blipFill>
+        <p:spPr>
+          <a:xfrm>
+            <a:off x="3862298" y="1089924"/>
+            <a:ext cx="2873173" cy="2873173"/>
+          </a:xfrm>
+          <a:prstGeom prst="rect">
+            <a:avLst/>
+          </a:prstGeom>
+          <a:ln w="3175">
+            <a:miter lim="400000"/>
+          </a:ln>
+        </p:spPr>
+      </p:pic>
+    </p:spTree>
+  </p:cSld>
+  <p:clrMapOvr>
+    <a:masterClrMapping/>
+  </p:clrMapOvr>
+  <p:transition spd="med"/>
+  <p:timing>
+    <p:tnLst>
+      <p:par>
+        <p:cTn id="1" dur="indefinite" restart="never" nodeType="tmRoot"/>
+      </p:par>
+    </p:tnLst>
+  </p:timing>
+</p:sld>
+</file>
+
+<file path=ppt/slides/slide5.xml><?xml version="1.0" encoding="utf-8"?>
+<p:sld xmlns:a="http://schemas.openxmlformats.org/drawingml/2006/main" xmlns:r="http://schemas.openxmlformats.org/officeDocument/2006/relationships" xmlns:p="http://schemas.openxmlformats.org/presentationml/2006/main">
+  <p:cSld>
+    <p:spTree>
+      <p:nvGrpSpPr>
+        <p:cNvPr id="1" name=""/>
+        <p:cNvGrpSpPr/>
+        <p:nvPr/>
+      </p:nvGrpSpPr>
+      <p:grpSpPr>
+        <a:xfrm>
+          <a:off x="0" y="0"/>
+          <a:ext cx="0" cy="0"/>
+          <a:chOff x="0" y="0"/>
+          <a:chExt cx="0" cy="0"/>
+        </a:xfrm>
+      </p:grpSpPr>
+      <p:pic>
+        <p:nvPicPr>
+          <p:cNvPr id="5" name="Рисунок 4"/>
+          <p:cNvPicPr>
+            <a:picLocks noChangeAspect="1"/>
+          </p:cNvPicPr>
+          <p:nvPr/>
+        </p:nvPicPr>
+        <p:blipFill>
+          <a:blip r:embed="rId2">
+            <a:extLst>
+              <a:ext uri="{28A0092B-C50C-407E-A947-70E740481C1C}">
+                <a14:useLocalDpi xmlns:a14="http://schemas.microsoft.com/office/drawing/2010/main" val="0"/>
+              </a:ext>
+            </a:extLst>
+          </a:blip>
+          <a:stretch>
+            <a:fillRect/>
+          </a:stretch>
+        </p:blipFill>
+        <p:spPr>
+          <a:xfrm>
+            <a:off x="0" y="80211"/>
+            <a:ext cx="24384000" cy="13522305"/>
+          </a:xfrm>
+          <a:prstGeom prst="rect">
+            <a:avLst/>
+          </a:prstGeom>
+        </p:spPr>
+      </p:pic>
+      <p:sp>
+        <p:nvSpPr>
+          <p:cNvPr id="7" name="Какова идея?"/>
+          <p:cNvSpPr txBox="1">
+            <a:spLocks noGrp="1"/>
+          </p:cNvSpPr>
+          <p:nvPr>
+            <p:ph type="title"/>
+          </p:nvPr>
+        </p:nvSpPr>
+        <p:spPr>
+          <a:xfrm>
+            <a:off x="7283114" y="818147"/>
+            <a:ext cx="11630527" cy="1138989"/>
+          </a:xfrm>
+          <a:prstGeom prst="rect">
+            <a:avLst/>
+          </a:prstGeom>
+        </p:spPr>
+        <p:txBody>
+          <a:bodyPr>
+            <a:normAutofit/>
+          </a:bodyPr>
+          <a:lstStyle>
+            <a:lvl1pPr defTabSz="1102816">
+              <a:defRPr sz="12540" spc="-627"/>
+            </a:lvl1pPr>
+          </a:lstStyle>
+          <a:p>
+            <a:r>
+              <a:rPr lang="ru-RU" sz="7200" dirty="0" smtClean="0"/>
+              <a:t>База                               данных</a:t>
+            </a:r>
+            <a:endParaRPr sz="7200" dirty="0"/>
+          </a:p>
+        </p:txBody>
+      </p:sp>
+    </p:spTree>
+    <p:extLst>
+      <p:ext uri="{BB962C8B-B14F-4D97-AF65-F5344CB8AC3E}">
+        <p14:creationId xmlns:p14="http://schemas.microsoft.com/office/powerpoint/2010/main" val="1185490709"/>
+      </p:ext>
+    </p:extLst>
+  </p:cSld>
+  <p:clrMapOvr>
+    <a:masterClrMapping/>
+  </p:clrMapOvr>
+  <p:transition spd="med"/>
+  <p:timing>
+    <p:tnLst>
+      <p:par>
+        <p:cTn id="1" dur="indefinite" restart="never" nodeType="tmRoot"/>
+      </p:par>
+    </p:tnLst>
+  </p:timing>
+</p:sld>
+</file>
+
+<file path=ppt/slides/slide6.xml><?xml version="1.0" encoding="utf-8"?>
+<p:sld xmlns:a="http://schemas.openxmlformats.org/drawingml/2006/main" xmlns:r="http://schemas.openxmlformats.org/officeDocument/2006/relationships" xmlns:p="http://schemas.openxmlformats.org/presentationml/2006/main">
+  <p:cSld>
+    <p:spTree>
+      <p:nvGrpSpPr>
+        <p:cNvPr id="1" name=""/>
+        <p:cNvGrpSpPr/>
+        <p:nvPr/>
+      </p:nvGrpSpPr>
+      <p:grpSpPr>
+        <a:xfrm>
+          <a:off x="0" y="0"/>
+          <a:ext cx="0" cy="0"/>
+          <a:chOff x="0" y="0"/>
+          <a:chExt cx="0" cy="0"/>
+        </a:xfrm>
+      </p:grpSpPr>
+    </p:spTree>
+    <p:extLst>
+      <p:ext uri="{BB962C8B-B14F-4D97-AF65-F5344CB8AC3E}">
+        <p14:creationId xmlns:p14="http://schemas.microsoft.com/office/powerpoint/2010/main" val="3637095845"/>
+      </p:ext>
+    </p:extLst>
+  </p:cSld>
+  <p:clrMapOvr>
+    <a:masterClrMapping/>
+  </p:clrMapOvr>
+  <p:transition spd="med"/>
+  <p:timing>
+    <p:tnLst>
+      <p:par>
+        <p:cTn id="1" dur="indefinite" restart="never" nodeType="tmRoot"/>
+      </p:par>
+    </p:tnLst>
+  </p:timing>
+</p:sld>
+</file>
+
+<file path=ppt/slides/slide7.xml><?xml version="1.0" encoding="utf-8"?>
+<p:sld xmlns:a="http://schemas.openxmlformats.org/drawingml/2006/main" xmlns:r="http://schemas.openxmlformats.org/officeDocument/2006/relationships" xmlns:p="http://schemas.openxmlformats.org/presentationml/2006/main">
   <p:cSld>
     <p:spTree>
       <p:nvGrpSpPr>
@@ -5202,7 +6366,9 @@
       <p:sp>
         <p:nvSpPr>
           <p:cNvPr id="196" name="Спасибо за внимание!"/>
-          <p:cNvSpPr txBox="1"/>
+          <p:cNvSpPr txBox="1">
+            <a:spLocks noGrp="1"/>
+          </p:cNvSpPr>
           <p:nvPr>
             <p:ph type="body" sz="quarter" idx="1"/>
           </p:nvPr>
@@ -5216,9 +6382,29 @@
           <a:bodyPr/>
           <a:lstStyle/>
           <a:p>
-            <a:pPr/>
-            <a:r>
-              <a:t>Спасибо за внимание!</a:t>
+            <a:r>
+              <a:rPr dirty="0" err="1"/>
+              <a:t>Спасибо</a:t>
+            </a:r>
+            <a:r>
+              <a:rPr dirty="0"/>
+              <a:t> </a:t>
+            </a:r>
+            <a:r>
+              <a:rPr dirty="0" err="1"/>
+              <a:t>за</a:t>
+            </a:r>
+            <a:r>
+              <a:rPr dirty="0"/>
+              <a:t> </a:t>
+            </a:r>
+            <a:r>
+              <a:rPr dirty="0" err="1"/>
+              <a:t>внимание</a:t>
+            </a:r>
+            <a:r>
+              <a:rPr dirty="0"/>
+              <a:t>!</a:t>
             </a:r>
           </a:p>
         </p:txBody>
@@ -5228,302 +6414,19 @@
   <p:clrMapOvr>
     <a:masterClrMapping/>
   </p:clrMapOvr>
-  <p:transition xmlns:p14="http://schemas.microsoft.com/office/powerpoint/2010/main" spd="med" advClick="1"/>
-</p:sld>
-</file>
-
-<file path=ppt/slides/slide5.xml><?xml version="1.0" encoding="utf-8"?>
-<p:sld xmlns:a="http://schemas.openxmlformats.org/drawingml/2006/main" xmlns:r="http://schemas.openxmlformats.org/officeDocument/2006/relationships" xmlns:p="http://schemas.openxmlformats.org/presentationml/2006/main" xmlns:m="http://schemas.openxmlformats.org/officeDocument/2006/math" xmlns:a14="http://schemas.microsoft.com/office/drawing/2010/main" showMasterSp="1" showMasterPhAnim="1">
-  <p:cSld>
-    <p:spTree>
-      <p:nvGrpSpPr>
-        <p:cNvPr id="1" name=""/>
-        <p:cNvGrpSpPr/>
-        <p:nvPr/>
-      </p:nvGrpSpPr>
-      <p:grpSpPr>
-        <a:xfrm>
-          <a:off x="0" y="0"/>
-          <a:ext cx="0" cy="0"/>
-          <a:chOff x="0" y="0"/>
-          <a:chExt cx="0" cy="0"/>
-        </a:xfrm>
-      </p:grpSpPr>
-      <p:sp>
-        <p:nvSpPr>
-          <p:cNvPr id="198" name="Используемые технологии?"/>
-          <p:cNvSpPr txBox="1"/>
-          <p:nvPr>
-            <p:ph type="title"/>
-          </p:nvPr>
-        </p:nvSpPr>
-        <p:spPr>
-          <a:xfrm>
-            <a:off x="4019549" y="4521762"/>
-            <a:ext cx="13208215" cy="4000501"/>
-          </a:xfrm>
-          <a:prstGeom prst="rect">
-            <a:avLst/>
-          </a:prstGeom>
-        </p:spPr>
-        <p:txBody>
-          <a:bodyPr/>
-          <a:lstStyle>
-            <a:lvl1pPr defTabSz="1102816">
-              <a:defRPr spc="-627" sz="12540"/>
-            </a:lvl1pPr>
-          </a:lstStyle>
-          <a:p>
-            <a:pPr/>
-            <a:r>
-              <a:t>Используемые технологии?</a:t>
-            </a:r>
-          </a:p>
-        </p:txBody>
-      </p:sp>
-      <p:pic>
-        <p:nvPicPr>
-          <p:cNvPr id="199" name="Изображение 6.jpg" descr="Изображение 6.jpg"/>
-          <p:cNvPicPr>
-            <a:picLocks noChangeAspect="1"/>
-          </p:cNvPicPr>
-          <p:nvPr/>
-        </p:nvPicPr>
-        <p:blipFill>
-          <a:blip r:embed="rId2">
-            <a:extLst/>
-          </a:blip>
-          <a:stretch>
-            <a:fillRect/>
-          </a:stretch>
-        </p:blipFill>
-        <p:spPr>
-          <a:xfrm>
-            <a:off x="13975798" y="1565971"/>
-            <a:ext cx="2397126" cy="2397126"/>
-          </a:xfrm>
-          <a:prstGeom prst="rect">
-            <a:avLst/>
-          </a:prstGeom>
-          <a:ln w="3175">
-            <a:miter lim="400000"/>
-          </a:ln>
-        </p:spPr>
-      </p:pic>
-      <p:pic>
-        <p:nvPicPr>
-          <p:cNvPr id="200" name="Изображение 7.jpg" descr="Изображение 7.jpg"/>
-          <p:cNvPicPr>
-            <a:picLocks noChangeAspect="1"/>
-          </p:cNvPicPr>
-          <p:nvPr/>
-        </p:nvPicPr>
-        <p:blipFill>
-          <a:blip r:embed="rId3">
-            <a:extLst/>
-          </a:blip>
-          <a:stretch>
-            <a:fillRect/>
-          </a:stretch>
-        </p:blipFill>
-        <p:spPr>
-          <a:xfrm>
-            <a:off x="9044825" y="1086423"/>
-            <a:ext cx="2873173" cy="2873173"/>
-          </a:xfrm>
-          <a:prstGeom prst="rect">
-            <a:avLst/>
-          </a:prstGeom>
-          <a:ln w="3175">
-            <a:miter lim="400000"/>
-          </a:ln>
-        </p:spPr>
-      </p:pic>
-      <p:pic>
-        <p:nvPicPr>
-          <p:cNvPr id="201" name="121405384-444d7300-c95d-11eb-959f-913020d3bf90.png" descr="121405384-444d7300-c95d-11eb-959f-913020d3bf90.png"/>
-          <p:cNvPicPr>
-            <a:picLocks noChangeAspect="1"/>
-          </p:cNvPicPr>
-          <p:nvPr/>
-        </p:nvPicPr>
-        <p:blipFill>
-          <a:blip r:embed="rId4">
-            <a:extLst/>
-          </a:blip>
-          <a:stretch>
-            <a:fillRect/>
-          </a:stretch>
-        </p:blipFill>
-        <p:spPr>
-          <a:xfrm>
-            <a:off x="11101761" y="9084429"/>
-            <a:ext cx="3354067" cy="3167870"/>
-          </a:xfrm>
-          <a:prstGeom prst="rect">
-            <a:avLst/>
-          </a:prstGeom>
-          <a:ln w="3175">
-            <a:miter lim="400000"/>
-          </a:ln>
-        </p:spPr>
-      </p:pic>
-      <p:pic>
-        <p:nvPicPr>
-          <p:cNvPr id="202" name="63a052fce949ec8a415b213ad03077e8.png" descr="63a052fce949ec8a415b213ad03077e8.png"/>
-          <p:cNvPicPr>
-            <a:picLocks noChangeAspect="1"/>
-          </p:cNvPicPr>
-          <p:nvPr/>
-        </p:nvPicPr>
-        <p:blipFill>
-          <a:blip r:embed="rId5">
-            <a:extLst/>
-          </a:blip>
-          <a:stretch>
-            <a:fillRect/>
-          </a:stretch>
-        </p:blipFill>
-        <p:spPr>
-          <a:xfrm>
-            <a:off x="5530211" y="9816116"/>
-            <a:ext cx="5562803" cy="2781402"/>
-          </a:xfrm>
-          <a:prstGeom prst="rect">
-            <a:avLst/>
-          </a:prstGeom>
-          <a:ln w="3175">
-            <a:miter lim="400000"/>
-          </a:ln>
-        </p:spPr>
-      </p:pic>
-      <p:pic>
-        <p:nvPicPr>
-          <p:cNvPr id="203" name="Снимок экрана 2024-11-10 в 22.58.34.png" descr="Снимок экрана 2024-11-10 в 22.58.34.png"/>
-          <p:cNvPicPr>
-            <a:picLocks noChangeAspect="1"/>
-          </p:cNvPicPr>
-          <p:nvPr/>
-        </p:nvPicPr>
-        <p:blipFill>
-          <a:blip r:embed="rId6">
-            <a:extLst/>
-          </a:blip>
-          <a:stretch>
-            <a:fillRect/>
-          </a:stretch>
-        </p:blipFill>
-        <p:spPr>
-          <a:xfrm>
-            <a:off x="16360638" y="6730604"/>
-            <a:ext cx="3454401" cy="4533901"/>
-          </a:xfrm>
-          <a:prstGeom prst="rect">
-            <a:avLst/>
-          </a:prstGeom>
-          <a:ln w="3175">
-            <a:miter lim="400000"/>
-          </a:ln>
-        </p:spPr>
-      </p:pic>
-      <p:pic>
-        <p:nvPicPr>
-          <p:cNvPr id="204" name="Изображение 8.jpg" descr="Изображение 8.jpg"/>
-          <p:cNvPicPr>
-            <a:picLocks noChangeAspect="1"/>
-          </p:cNvPicPr>
-          <p:nvPr/>
-        </p:nvPicPr>
-        <p:blipFill>
-          <a:blip r:embed="rId7">
-            <a:extLst/>
-          </a:blip>
-          <a:stretch>
-            <a:fillRect/>
-          </a:stretch>
-        </p:blipFill>
-        <p:spPr>
-          <a:xfrm>
-            <a:off x="18614811" y="2987247"/>
-            <a:ext cx="1912982" cy="1912983"/>
-          </a:xfrm>
-          <a:prstGeom prst="rect">
-            <a:avLst/>
-          </a:prstGeom>
-          <a:ln w="3175">
-            <a:miter lim="400000"/>
-          </a:ln>
-        </p:spPr>
-      </p:pic>
-      <p:pic>
-        <p:nvPicPr>
-          <p:cNvPr id="205" name="Изображение 9.jpg" descr="Изображение 9.jpg"/>
-          <p:cNvPicPr>
-            <a:picLocks noChangeAspect="1"/>
-          </p:cNvPicPr>
-          <p:nvPr/>
-        </p:nvPicPr>
-        <p:blipFill>
-          <a:blip r:embed="rId8">
-            <a:extLst/>
-          </a:blip>
-          <a:stretch>
-            <a:fillRect/>
-          </a:stretch>
-        </p:blipFill>
-        <p:spPr>
-          <a:xfrm>
-            <a:off x="1691816" y="8788703"/>
-            <a:ext cx="2873173" cy="2873173"/>
-          </a:xfrm>
-          <a:prstGeom prst="rect">
-            <a:avLst/>
-          </a:prstGeom>
-          <a:ln w="3175">
-            <a:miter lim="400000"/>
-          </a:ln>
-        </p:spPr>
-      </p:pic>
-      <p:pic>
-        <p:nvPicPr>
-          <p:cNvPr id="206" name="Изображение 10.jpg" descr="Изображение 10.jpg"/>
-          <p:cNvPicPr>
-            <a:picLocks noChangeAspect="1"/>
-          </p:cNvPicPr>
-          <p:nvPr/>
-        </p:nvPicPr>
-        <p:blipFill>
-          <a:blip r:embed="rId9">
-            <a:extLst/>
-          </a:blip>
-          <a:stretch>
-            <a:fillRect/>
-          </a:stretch>
-        </p:blipFill>
-        <p:spPr>
-          <a:xfrm>
-            <a:off x="3862298" y="1089924"/>
-            <a:ext cx="2873173" cy="2873173"/>
-          </a:xfrm>
-          <a:prstGeom prst="rect">
-            <a:avLst/>
-          </a:prstGeom>
-          <a:ln w="3175">
-            <a:miter lim="400000"/>
-          </a:ln>
-        </p:spPr>
-      </p:pic>
-    </p:spTree>
-  </p:cSld>
-  <p:clrMapOvr>
-    <a:masterClrMapping/>
-  </p:clrMapOvr>
-  <p:transition xmlns:p14="http://schemas.microsoft.com/office/powerpoint/2010/main" spd="med" advClick="1"/>
+  <p:transition spd="med"/>
+  <p:timing>
+    <p:tnLst>
+      <p:par>
+        <p:cTn id="1" dur="indefinite" restart="never" nodeType="tmRoot"/>
+      </p:par>
+    </p:tnLst>
+  </p:timing>
 </p:sld>
 </file>
 
 <file path=ppt/theme/theme1.xml><?xml version="1.0" encoding="utf-8"?>
-<a:theme xmlns:a="http://schemas.openxmlformats.org/drawingml/2006/main" xmlns:r="http://schemas.openxmlformats.org/officeDocument/2006/relationships" name="27_Showcase">
+<a:theme xmlns:a="http://schemas.openxmlformats.org/drawingml/2006/main" name="27_Showcase">
   <a:themeElements>
     <a:clrScheme name="27_Showcase">
       <a:dk1>
@@ -5722,7 +6625,7 @@
         <a:effectLst/>
         <a:sp3d/>
       </a:spPr>
-      <a:bodyPr rot="0" spcFirstLastPara="1" vertOverflow="overflow" horzOverflow="overflow" vert="horz" wrap="square" lIns="38100" tIns="38100" rIns="38100" bIns="38100" numCol="1" spcCol="38100" rtlCol="0" anchor="ctr" upright="0">
+      <a:bodyPr rot="0" spcFirstLastPara="1" vertOverflow="overflow" horzOverflow="overflow" vert="horz" wrap="square" lIns="38100" tIns="38100" rIns="38100" bIns="38100" numCol="1" spcCol="38100" rtlCol="0" anchor="ctr">
         <a:spAutoFit/>
       </a:bodyPr>
       <a:lstStyle>
@@ -5741,7 +6644,7 @@
           <a:buFontTx/>
           <a:buNone/>
           <a:tabLst/>
-          <a:defRPr b="0" baseline="0" cap="none" i="0" spc="-36" strike="noStrike" sz="1800" u="none" kumimoji="0" normalizeH="0">
+          <a:defRPr kumimoji="0" sz="1800" b="0" i="0" u="none" strike="noStrike" cap="none" spc="-36" normalizeH="0" baseline="0">
             <a:ln>
               <a:noFill/>
             </a:ln>
@@ -5771,7 +6674,7 @@
           <a:buFontTx/>
           <a:buNone/>
           <a:tabLst/>
-          <a:defRPr b="0" baseline="0" cap="none" i="0" spc="0" strike="noStrike" sz="1800" u="none" kumimoji="0" normalizeH="0">
+          <a:defRPr kumimoji="0" sz="1800" b="0" i="0" u="none" strike="noStrike" cap="none" spc="0" normalizeH="0" baseline="0">
             <a:ln>
               <a:noFill/>
             </a:ln>
@@ -5797,7 +6700,7 @@
           <a:buFontTx/>
           <a:buNone/>
           <a:tabLst/>
-          <a:defRPr b="0" baseline="0" cap="none" i="0" spc="0" strike="noStrike" sz="1800" u="none" kumimoji="0" normalizeH="0">
+          <a:defRPr kumimoji="0" sz="1800" b="0" i="0" u="none" strike="noStrike" cap="none" spc="0" normalizeH="0" baseline="0">
             <a:ln>
               <a:noFill/>
             </a:ln>
@@ -5823,7 +6726,7 @@
           <a:buFontTx/>
           <a:buNone/>
           <a:tabLst/>
-          <a:defRPr b="0" baseline="0" cap="none" i="0" spc="0" strike="noStrike" sz="1800" u="none" kumimoji="0" normalizeH="0">
+          <a:defRPr kumimoji="0" sz="1800" b="0" i="0" u="none" strike="noStrike" cap="none" spc="0" normalizeH="0" baseline="0">
             <a:ln>
               <a:noFill/>
             </a:ln>
@@ -5849,7 +6752,7 @@
           <a:buFontTx/>
           <a:buNone/>
           <a:tabLst/>
-          <a:defRPr b="0" baseline="0" cap="none" i="0" spc="0" strike="noStrike" sz="1800" u="none" kumimoji="0" normalizeH="0">
+          <a:defRPr kumimoji="0" sz="1800" b="0" i="0" u="none" strike="noStrike" cap="none" spc="0" normalizeH="0" baseline="0">
             <a:ln>
               <a:noFill/>
             </a:ln>
@@ -5875,7 +6778,7 @@
           <a:buFontTx/>
           <a:buNone/>
           <a:tabLst/>
-          <a:defRPr b="0" baseline="0" cap="none" i="0" spc="0" strike="noStrike" sz="1800" u="none" kumimoji="0" normalizeH="0">
+          <a:defRPr kumimoji="0" sz="1800" b="0" i="0" u="none" strike="noStrike" cap="none" spc="0" normalizeH="0" baseline="0">
             <a:ln>
               <a:noFill/>
             </a:ln>
@@ -5901,7 +6804,7 @@
           <a:buFontTx/>
           <a:buNone/>
           <a:tabLst/>
-          <a:defRPr b="0" baseline="0" cap="none" i="0" spc="0" strike="noStrike" sz="1800" u="none" kumimoji="0" normalizeH="0">
+          <a:defRPr kumimoji="0" sz="1800" b="0" i="0" u="none" strike="noStrike" cap="none" spc="0" normalizeH="0" baseline="0">
             <a:ln>
               <a:noFill/>
             </a:ln>
@@ -5927,7 +6830,7 @@
           <a:buFontTx/>
           <a:buNone/>
           <a:tabLst/>
-          <a:defRPr b="0" baseline="0" cap="none" i="0" spc="0" strike="noStrike" sz="1800" u="none" kumimoji="0" normalizeH="0">
+          <a:defRPr kumimoji="0" sz="1800" b="0" i="0" u="none" strike="noStrike" cap="none" spc="0" normalizeH="0" baseline="0">
             <a:ln>
               <a:noFill/>
             </a:ln>
@@ -5953,7 +6856,7 @@
           <a:buFontTx/>
           <a:buNone/>
           <a:tabLst/>
-          <a:defRPr b="0" baseline="0" cap="none" i="0" spc="0" strike="noStrike" sz="1800" u="none" kumimoji="0" normalizeH="0">
+          <a:defRPr kumimoji="0" sz="1800" b="0" i="0" u="none" strike="noStrike" cap="none" spc="0" normalizeH="0" baseline="0">
             <a:ln>
               <a:noFill/>
             </a:ln>
@@ -5979,7 +6882,7 @@
           <a:buFontTx/>
           <a:buNone/>
           <a:tabLst/>
-          <a:defRPr b="0" baseline="0" cap="none" i="0" spc="0" strike="noStrike" sz="1800" u="none" kumimoji="0" normalizeH="0">
+          <a:defRPr kumimoji="0" sz="1800" b="0" i="0" u="none" strike="noStrike" cap="none" spc="0" normalizeH="0" baseline="0">
             <a:ln>
               <a:noFill/>
             </a:ln>
@@ -5992,9 +6895,15 @@
         </a:lvl9pPr>
       </a:lstStyle>
       <a:style>
-        <a:lnRef idx="0"/>
-        <a:fillRef idx="0"/>
-        <a:effectRef idx="0"/>
+        <a:lnRef idx="0">
+          <a:scrgbClr r="0" g="0" b="0"/>
+        </a:lnRef>
+        <a:fillRef idx="0">
+          <a:scrgbClr r="0" g="0" b="0"/>
+        </a:fillRef>
+        <a:effectRef idx="0">
+          <a:scrgbClr r="0" g="0" b="0"/>
+        </a:effectRef>
         <a:fontRef idx="none"/>
       </a:style>
     </a:spDef>
@@ -6011,7 +6920,7 @@
         <a:effectLst/>
         <a:sp3d/>
       </a:spPr>
-      <a:bodyPr rot="0" spcFirstLastPara="1" vertOverflow="overflow" horzOverflow="overflow" vert="horz" wrap="square" lIns="91439" tIns="45719" rIns="91439" bIns="45719" numCol="1" spcCol="38100" rtlCol="0" anchor="t" upright="0">
+      <a:bodyPr rot="0" spcFirstLastPara="1" vertOverflow="overflow" horzOverflow="overflow" vert="horz" wrap="square" lIns="91439" tIns="45719" rIns="91439" bIns="45719" numCol="1" spcCol="38100" rtlCol="0" anchor="t">
         <a:noAutofit/>
       </a:bodyPr>
       <a:lstStyle>
@@ -6030,7 +6939,7 @@
           <a:buFontTx/>
           <a:buNone/>
           <a:tabLst/>
-          <a:defRPr b="0" baseline="0" cap="none" i="0" spc="0" strike="noStrike" sz="1800" u="none" kumimoji="0" normalizeH="0">
+          <a:defRPr kumimoji="0" sz="1800" b="0" i="0" u="none" strike="noStrike" cap="none" spc="0" normalizeH="0" baseline="0">
             <a:ln>
               <a:noFill/>
             </a:ln>
@@ -6056,7 +6965,7 @@
           <a:buFontTx/>
           <a:buNone/>
           <a:tabLst/>
-          <a:defRPr b="0" baseline="0" cap="none" i="0" spc="0" strike="noStrike" sz="1800" u="none" kumimoji="0" normalizeH="0">
+          <a:defRPr kumimoji="0" sz="1800" b="0" i="0" u="none" strike="noStrike" cap="none" spc="0" normalizeH="0" baseline="0">
             <a:ln>
               <a:noFill/>
             </a:ln>
@@ -6082,7 +6991,7 @@
           <a:buFontTx/>
           <a:buNone/>
           <a:tabLst/>
-          <a:defRPr b="0" baseline="0" cap="none" i="0" spc="0" strike="noStrike" sz="1800" u="none" kumimoji="0" normalizeH="0">
+          <a:defRPr kumimoji="0" sz="1800" b="0" i="0" u="none" strike="noStrike" cap="none" spc="0" normalizeH="0" baseline="0">
             <a:ln>
               <a:noFill/>
             </a:ln>
@@ -6108,7 +7017,7 @@
           <a:buFontTx/>
           <a:buNone/>
           <a:tabLst/>
-          <a:defRPr b="0" baseline="0" cap="none" i="0" spc="0" strike="noStrike" sz="1800" u="none" kumimoji="0" normalizeH="0">
+          <a:defRPr kumimoji="0" sz="1800" b="0" i="0" u="none" strike="noStrike" cap="none" spc="0" normalizeH="0" baseline="0">
             <a:ln>
               <a:noFill/>
             </a:ln>
@@ -6134,7 +7043,7 @@
           <a:buFontTx/>
           <a:buNone/>
           <a:tabLst/>
-          <a:defRPr b="0" baseline="0" cap="none" i="0" spc="0" strike="noStrike" sz="1800" u="none" kumimoji="0" normalizeH="0">
+          <a:defRPr kumimoji="0" sz="1800" b="0" i="0" u="none" strike="noStrike" cap="none" spc="0" normalizeH="0" baseline="0">
             <a:ln>
               <a:noFill/>
             </a:ln>
@@ -6160,7 +7069,7 @@
           <a:buFontTx/>
           <a:buNone/>
           <a:tabLst/>
-          <a:defRPr b="0" baseline="0" cap="none" i="0" spc="0" strike="noStrike" sz="1800" u="none" kumimoji="0" normalizeH="0">
+          <a:defRPr kumimoji="0" sz="1800" b="0" i="0" u="none" strike="noStrike" cap="none" spc="0" normalizeH="0" baseline="0">
             <a:ln>
               <a:noFill/>
             </a:ln>
@@ -6186,7 +7095,7 @@
           <a:buFontTx/>
           <a:buNone/>
           <a:tabLst/>
-          <a:defRPr b="0" baseline="0" cap="none" i="0" spc="0" strike="noStrike" sz="1800" u="none" kumimoji="0" normalizeH="0">
+          <a:defRPr kumimoji="0" sz="1800" b="0" i="0" u="none" strike="noStrike" cap="none" spc="0" normalizeH="0" baseline="0">
             <a:ln>
               <a:noFill/>
             </a:ln>
@@ -6212,7 +7121,7 @@
           <a:buFontTx/>
           <a:buNone/>
           <a:tabLst/>
-          <a:defRPr b="0" baseline="0" cap="none" i="0" spc="0" strike="noStrike" sz="1800" u="none" kumimoji="0" normalizeH="0">
+          <a:defRPr kumimoji="0" sz="1800" b="0" i="0" u="none" strike="noStrike" cap="none" spc="0" normalizeH="0" baseline="0">
             <a:ln>
               <a:noFill/>
             </a:ln>
@@ -6238,7 +7147,7 @@
           <a:buFontTx/>
           <a:buNone/>
           <a:tabLst/>
-          <a:defRPr b="0" baseline="0" cap="none" i="0" spc="0" strike="noStrike" sz="1800" u="none" kumimoji="0" normalizeH="0">
+          <a:defRPr kumimoji="0" sz="1800" b="0" i="0" u="none" strike="noStrike" cap="none" spc="0" normalizeH="0" baseline="0">
             <a:ln>
               <a:noFill/>
             </a:ln>
@@ -6264,7 +7173,7 @@
           <a:buFontTx/>
           <a:buNone/>
           <a:tabLst/>
-          <a:defRPr b="0" baseline="0" cap="none" i="0" spc="0" strike="noStrike" sz="1800" u="none" kumimoji="0" normalizeH="0">
+          <a:defRPr kumimoji="0" sz="1800" b="0" i="0" u="none" strike="noStrike" cap="none" spc="0" normalizeH="0" baseline="0">
             <a:ln>
               <a:noFill/>
             </a:ln>
@@ -6277,9 +7186,15 @@
         </a:lvl9pPr>
       </a:lstStyle>
       <a:style>
-        <a:lnRef idx="0"/>
-        <a:fillRef idx="0"/>
-        <a:effectRef idx="0"/>
+        <a:lnRef idx="0">
+          <a:scrgbClr r="0" g="0" b="0"/>
+        </a:lnRef>
+        <a:fillRef idx="0">
+          <a:scrgbClr r="0" g="0" b="0"/>
+        </a:fillRef>
+        <a:effectRef idx="0">
+          <a:scrgbClr r="0" g="0" b="0"/>
+        </a:effectRef>
         <a:fontRef idx="none"/>
       </a:style>
     </a:lnDef>
@@ -6293,7 +7208,7 @@
         <a:effectLst/>
         <a:sp3d/>
       </a:spPr>
-      <a:bodyPr rot="0" spcFirstLastPara="1" vertOverflow="overflow" horzOverflow="overflow" vert="horz" wrap="square" lIns="38100" tIns="38100" rIns="38100" bIns="38100" numCol="1" spcCol="38100" rtlCol="0" anchor="ctr" upright="0">
+      <a:bodyPr rot="0" spcFirstLastPara="1" vertOverflow="overflow" horzOverflow="overflow" vert="horz" wrap="square" lIns="38100" tIns="38100" rIns="38100" bIns="38100" numCol="1" spcCol="38100" rtlCol="0" anchor="ctr">
         <a:spAutoFit/>
       </a:bodyPr>
       <a:lstStyle>
@@ -6312,7 +7227,7 @@
           <a:buFontTx/>
           <a:buNone/>
           <a:tabLst/>
-          <a:defRPr b="0" baseline="0" cap="none" i="0" spc="0" strike="noStrike" sz="3800" u="none" kumimoji="0" normalizeH="0">
+          <a:defRPr kumimoji="0" sz="3800" b="0" i="0" u="none" strike="noStrike" cap="none" spc="0" normalizeH="0" baseline="0">
             <a:ln>
               <a:noFill/>
             </a:ln>
@@ -6342,7 +7257,7 @@
           <a:buFontTx/>
           <a:buNone/>
           <a:tabLst/>
-          <a:defRPr b="0" baseline="0" cap="none" i="0" spc="0" strike="noStrike" sz="1800" u="none" kumimoji="0" normalizeH="0">
+          <a:defRPr kumimoji="0" sz="1800" b="0" i="0" u="none" strike="noStrike" cap="none" spc="0" normalizeH="0" baseline="0">
             <a:ln>
               <a:noFill/>
             </a:ln>
@@ -6368,7 +7283,7 @@
           <a:buFontTx/>
           <a:buNone/>
           <a:tabLst/>
-          <a:defRPr b="0" baseline="0" cap="none" i="0" spc="0" strike="noStrike" sz="1800" u="none" kumimoji="0" normalizeH="0">
+          <a:defRPr kumimoji="0" sz="1800" b="0" i="0" u="none" strike="noStrike" cap="none" spc="0" normalizeH="0" baseline="0">
             <a:ln>
               <a:noFill/>
             </a:ln>
@@ -6394,7 +7309,7 @@
           <a:buFontTx/>
           <a:buNone/>
           <a:tabLst/>
-          <a:defRPr b="0" baseline="0" cap="none" i="0" spc="0" strike="noStrike" sz="1800" u="none" kumimoji="0" normalizeH="0">
+          <a:defRPr kumimoji="0" sz="1800" b="0" i="0" u="none" strike="noStrike" cap="none" spc="0" normalizeH="0" baseline="0">
             <a:ln>
               <a:noFill/>
             </a:ln>
@@ -6420,7 +7335,7 @@
           <a:buFontTx/>
           <a:buNone/>
           <a:tabLst/>
-          <a:defRPr b="0" baseline="0" cap="none" i="0" spc="0" strike="noStrike" sz="1800" u="none" kumimoji="0" normalizeH="0">
+          <a:defRPr kumimoji="0" sz="1800" b="0" i="0" u="none" strike="noStrike" cap="none" spc="0" normalizeH="0" baseline="0">
             <a:ln>
               <a:noFill/>
             </a:ln>
@@ -6446,7 +7361,7 @@
           <a:buFontTx/>
           <a:buNone/>
           <a:tabLst/>
-          <a:defRPr b="0" baseline="0" cap="none" i="0" spc="0" strike="noStrike" sz="1800" u="none" kumimoji="0" normalizeH="0">
+          <a:defRPr kumimoji="0" sz="1800" b="0" i="0" u="none" strike="noStrike" cap="none" spc="0" normalizeH="0" baseline="0">
             <a:ln>
               <a:noFill/>
             </a:ln>
@@ -6472,7 +7387,7 @@
           <a:buFontTx/>
           <a:buNone/>
           <a:tabLst/>
-          <a:defRPr b="0" baseline="0" cap="none" i="0" spc="0" strike="noStrike" sz="1800" u="none" kumimoji="0" normalizeH="0">
+          <a:defRPr kumimoji="0" sz="1800" b="0" i="0" u="none" strike="noStrike" cap="none" spc="0" normalizeH="0" baseline="0">
             <a:ln>
               <a:noFill/>
             </a:ln>
@@ -6498,7 +7413,7 @@
           <a:buFontTx/>
           <a:buNone/>
           <a:tabLst/>
-          <a:defRPr b="0" baseline="0" cap="none" i="0" spc="0" strike="noStrike" sz="1800" u="none" kumimoji="0" normalizeH="0">
+          <a:defRPr kumimoji="0" sz="1800" b="0" i="0" u="none" strike="noStrike" cap="none" spc="0" normalizeH="0" baseline="0">
             <a:ln>
               <a:noFill/>
             </a:ln>
@@ -6524,7 +7439,7 @@
           <a:buFontTx/>
           <a:buNone/>
           <a:tabLst/>
-          <a:defRPr b="0" baseline="0" cap="none" i="0" spc="0" strike="noStrike" sz="1800" u="none" kumimoji="0" normalizeH="0">
+          <a:defRPr kumimoji="0" sz="1800" b="0" i="0" u="none" strike="noStrike" cap="none" spc="0" normalizeH="0" baseline="0">
             <a:ln>
               <a:noFill/>
             </a:ln>
@@ -6550,7 +7465,7 @@
           <a:buFontTx/>
           <a:buNone/>
           <a:tabLst/>
-          <a:defRPr b="0" baseline="0" cap="none" i="0" spc="0" strike="noStrike" sz="1800" u="none" kumimoji="0" normalizeH="0">
+          <a:defRPr kumimoji="0" sz="1800" b="0" i="0" u="none" strike="noStrike" cap="none" spc="0" normalizeH="0" baseline="0">
             <a:ln>
               <a:noFill/>
             </a:ln>
@@ -6563,18 +7478,25 @@
         </a:lvl9pPr>
       </a:lstStyle>
       <a:style>
-        <a:lnRef idx="0"/>
-        <a:fillRef idx="0"/>
-        <a:effectRef idx="0"/>
+        <a:lnRef idx="0">
+          <a:scrgbClr r="0" g="0" b="0"/>
+        </a:lnRef>
+        <a:fillRef idx="0">
+          <a:scrgbClr r="0" g="0" b="0"/>
+        </a:fillRef>
+        <a:effectRef idx="0">
+          <a:scrgbClr r="0" g="0" b="0"/>
+        </a:effectRef>
         <a:fontRef idx="none"/>
       </a:style>
     </a:txDef>
   </a:objectDefaults>
+  <a:extraClrSchemeLst/>
 </a:theme>
 </file>
 
 <file path=ppt/theme/theme2.xml><?xml version="1.0" encoding="utf-8"?>
-<a:theme xmlns:a="http://schemas.openxmlformats.org/drawingml/2006/main" xmlns:r="http://schemas.openxmlformats.org/officeDocument/2006/relationships" name="27_Showcase">
+<a:theme xmlns:a="http://schemas.openxmlformats.org/drawingml/2006/main" name="27_Showcase">
   <a:themeElements>
     <a:clrScheme name="27_Showcase">
       <a:dk1>
@@ -6773,7 +7695,7 @@
         <a:effectLst/>
         <a:sp3d/>
       </a:spPr>
-      <a:bodyPr rot="0" spcFirstLastPara="1" vertOverflow="overflow" horzOverflow="overflow" vert="horz" wrap="square" lIns="38100" tIns="38100" rIns="38100" bIns="38100" numCol="1" spcCol="38100" rtlCol="0" anchor="ctr" upright="0">
+      <a:bodyPr rot="0" spcFirstLastPara="1" vertOverflow="overflow" horzOverflow="overflow" vert="horz" wrap="square" lIns="38100" tIns="38100" rIns="38100" bIns="38100" numCol="1" spcCol="38100" rtlCol="0" anchor="ctr">
         <a:spAutoFit/>
       </a:bodyPr>
       <a:lstStyle>
@@ -6792,7 +7714,7 @@
           <a:buFontTx/>
           <a:buNone/>
           <a:tabLst/>
-          <a:defRPr b="0" baseline="0" cap="none" i="0" spc="-36" strike="noStrike" sz="1800" u="none" kumimoji="0" normalizeH="0">
+          <a:defRPr kumimoji="0" sz="1800" b="0" i="0" u="none" strike="noStrike" cap="none" spc="-36" normalizeH="0" baseline="0">
             <a:ln>
               <a:noFill/>
             </a:ln>
@@ -6822,7 +7744,7 @@
           <a:buFontTx/>
           <a:buNone/>
           <a:tabLst/>
-          <a:defRPr b="0" baseline="0" cap="none" i="0" spc="0" strike="noStrike" sz="1800" u="none" kumimoji="0" normalizeH="0">
+          <a:defRPr kumimoji="0" sz="1800" b="0" i="0" u="none" strike="noStrike" cap="none" spc="0" normalizeH="0" baseline="0">
             <a:ln>
               <a:noFill/>
             </a:ln>
@@ -6848,7 +7770,7 @@
           <a:buFontTx/>
           <a:buNone/>
           <a:tabLst/>
-          <a:defRPr b="0" baseline="0" cap="none" i="0" spc="0" strike="noStrike" sz="1800" u="none" kumimoji="0" normalizeH="0">
+          <a:defRPr kumimoji="0" sz="1800" b="0" i="0" u="none" strike="noStrike" cap="none" spc="0" normalizeH="0" baseline="0">
             <a:ln>
               <a:noFill/>
             </a:ln>
@@ -6874,7 +7796,7 @@
           <a:buFontTx/>
           <a:buNone/>
           <a:tabLst/>
-          <a:defRPr b="0" baseline="0" cap="none" i="0" spc="0" strike="noStrike" sz="1800" u="none" kumimoji="0" normalizeH="0">
+          <a:defRPr kumimoji="0" sz="1800" b="0" i="0" u="none" strike="noStrike" cap="none" spc="0" normalizeH="0" baseline="0">
             <a:ln>
               <a:noFill/>
             </a:ln>
@@ -6900,7 +7822,7 @@
           <a:buFontTx/>
           <a:buNone/>
           <a:tabLst/>
-          <a:defRPr b="0" baseline="0" cap="none" i="0" spc="0" strike="noStrike" sz="1800" u="none" kumimoji="0" normalizeH="0">
+          <a:defRPr kumimoji="0" sz="1800" b="0" i="0" u="none" strike="noStrike" cap="none" spc="0" normalizeH="0" baseline="0">
             <a:ln>
               <a:noFill/>
             </a:ln>
@@ -6926,7 +7848,7 @@
           <a:buFontTx/>
           <a:buNone/>
           <a:tabLst/>
-          <a:defRPr b="0" baseline="0" cap="none" i="0" spc="0" strike="noStrike" sz="1800" u="none" kumimoji="0" normalizeH="0">
+          <a:defRPr kumimoji="0" sz="1800" b="0" i="0" u="none" strike="noStrike" cap="none" spc="0" normalizeH="0" baseline="0">
             <a:ln>
               <a:noFill/>
             </a:ln>
@@ -6952,7 +7874,7 @@
           <a:buFontTx/>
           <a:buNone/>
           <a:tabLst/>
-          <a:defRPr b="0" baseline="0" cap="none" i="0" spc="0" strike="noStrike" sz="1800" u="none" kumimoji="0" normalizeH="0">
+          <a:defRPr kumimoji="0" sz="1800" b="0" i="0" u="none" strike="noStrike" cap="none" spc="0" normalizeH="0" baseline="0">
             <a:ln>
               <a:noFill/>
             </a:ln>
@@ -6978,7 +7900,7 @@
           <a:buFontTx/>
           <a:buNone/>
           <a:tabLst/>
-          <a:defRPr b="0" baseline="0" cap="none" i="0" spc="0" strike="noStrike" sz="1800" u="none" kumimoji="0" normalizeH="0">
+          <a:defRPr kumimoji="0" sz="1800" b="0" i="0" u="none" strike="noStrike" cap="none" spc="0" normalizeH="0" baseline="0">
             <a:ln>
               <a:noFill/>
             </a:ln>
@@ -7004,7 +7926,7 @@
           <a:buFontTx/>
           <a:buNone/>
           <a:tabLst/>
-          <a:defRPr b="0" baseline="0" cap="none" i="0" spc="0" strike="noStrike" sz="1800" u="none" kumimoji="0" normalizeH="0">
+          <a:defRPr kumimoji="0" sz="1800" b="0" i="0" u="none" strike="noStrike" cap="none" spc="0" normalizeH="0" baseline="0">
             <a:ln>
               <a:noFill/>
             </a:ln>
@@ -7030,7 +7952,7 @@
           <a:buFontTx/>
           <a:buNone/>
           <a:tabLst/>
-          <a:defRPr b="0" baseline="0" cap="none" i="0" spc="0" strike="noStrike" sz="1800" u="none" kumimoji="0" normalizeH="0">
+          <a:defRPr kumimoji="0" sz="1800" b="0" i="0" u="none" strike="noStrike" cap="none" spc="0" normalizeH="0" baseline="0">
             <a:ln>
               <a:noFill/>
             </a:ln>
@@ -7043,9 +7965,15 @@
         </a:lvl9pPr>
       </a:lstStyle>
       <a:style>
-        <a:lnRef idx="0"/>
-        <a:fillRef idx="0"/>
-        <a:effectRef idx="0"/>
+        <a:lnRef idx="0">
+          <a:scrgbClr r="0" g="0" b="0"/>
+        </a:lnRef>
+        <a:fillRef idx="0">
+          <a:scrgbClr r="0" g="0" b="0"/>
+        </a:fillRef>
+        <a:effectRef idx="0">
+          <a:scrgbClr r="0" g="0" b="0"/>
+        </a:effectRef>
         <a:fontRef idx="none"/>
       </a:style>
     </a:spDef>
@@ -7062,7 +7990,7 @@
         <a:effectLst/>
         <a:sp3d/>
       </a:spPr>
-      <a:bodyPr rot="0" spcFirstLastPara="1" vertOverflow="overflow" horzOverflow="overflow" vert="horz" wrap="square" lIns="91439" tIns="45719" rIns="91439" bIns="45719" numCol="1" spcCol="38100" rtlCol="0" anchor="t" upright="0">
+      <a:bodyPr rot="0" spcFirstLastPara="1" vertOverflow="overflow" horzOverflow="overflow" vert="horz" wrap="square" lIns="91439" tIns="45719" rIns="91439" bIns="45719" numCol="1" spcCol="38100" rtlCol="0" anchor="t">
         <a:noAutofit/>
       </a:bodyPr>
       <a:lstStyle>
@@ -7081,7 +8009,7 @@
           <a:buFontTx/>
           <a:buNone/>
           <a:tabLst/>
-          <a:defRPr b="0" baseline="0" cap="none" i="0" spc="0" strike="noStrike" sz="1800" u="none" kumimoji="0" normalizeH="0">
+          <a:defRPr kumimoji="0" sz="1800" b="0" i="0" u="none" strike="noStrike" cap="none" spc="0" normalizeH="0" baseline="0">
             <a:ln>
               <a:noFill/>
             </a:ln>
@@ -7107,7 +8035,7 @@
           <a:buFontTx/>
           <a:buNone/>
           <a:tabLst/>
-          <a:defRPr b="0" baseline="0" cap="none" i="0" spc="0" strike="noStrike" sz="1800" u="none" kumimoji="0" normalizeH="0">
+          <a:defRPr kumimoji="0" sz="1800" b="0" i="0" u="none" strike="noStrike" cap="none" spc="0" normalizeH="0" baseline="0">
             <a:ln>
               <a:noFill/>
             </a:ln>
@@ -7133,7 +8061,7 @@
           <a:buFontTx/>
           <a:buNone/>
           <a:tabLst/>
-          <a:defRPr b="0" baseline="0" cap="none" i="0" spc="0" strike="noStrike" sz="1800" u="none" kumimoji="0" normalizeH="0">
+          <a:defRPr kumimoji="0" sz="1800" b="0" i="0" u="none" strike="noStrike" cap="none" spc="0" normalizeH="0" baseline="0">
             <a:ln>
               <a:noFill/>
             </a:ln>
@@ -7159,7 +8087,7 @@
           <a:buFontTx/>
           <a:buNone/>
           <a:tabLst/>
-          <a:defRPr b="0" baseline="0" cap="none" i="0" spc="0" strike="noStrike" sz="1800" u="none" kumimoji="0" normalizeH="0">
+          <a:defRPr kumimoji="0" sz="1800" b="0" i="0" u="none" strike="noStrike" cap="none" spc="0" normalizeH="0" baseline="0">
             <a:ln>
               <a:noFill/>
             </a:ln>
@@ -7185,7 +8113,7 @@
           <a:buFontTx/>
           <a:buNone/>
           <a:tabLst/>
-          <a:defRPr b="0" baseline="0" cap="none" i="0" spc="0" strike="noStrike" sz="1800" u="none" kumimoji="0" normalizeH="0">
+          <a:defRPr kumimoji="0" sz="1800" b="0" i="0" u="none" strike="noStrike" cap="none" spc="0" normalizeH="0" baseline="0">
             <a:ln>
               <a:noFill/>
             </a:ln>
@@ -7211,7 +8139,7 @@
           <a:buFontTx/>
           <a:buNone/>
           <a:tabLst/>
-          <a:defRPr b="0" baseline="0" cap="none" i="0" spc="0" strike="noStrike" sz="1800" u="none" kumimoji="0" normalizeH="0">
+          <a:defRPr kumimoji="0" sz="1800" b="0" i="0" u="none" strike="noStrike" cap="none" spc="0" normalizeH="0" baseline="0">
             <a:ln>
               <a:noFill/>
             </a:ln>
@@ -7237,7 +8165,7 @@
           <a:buFontTx/>
           <a:buNone/>
           <a:tabLst/>
-          <a:defRPr b="0" baseline="0" cap="none" i="0" spc="0" strike="noStrike" sz="1800" u="none" kumimoji="0" normalizeH="0">
+          <a:defRPr kumimoji="0" sz="1800" b="0" i="0" u="none" strike="noStrike" cap="none" spc="0" normalizeH="0" baseline="0">
             <a:ln>
               <a:noFill/>
             </a:ln>
@@ -7263,7 +8191,7 @@
           <a:buFontTx/>
           <a:buNone/>
           <a:tabLst/>
-          <a:defRPr b="0" baseline="0" cap="none" i="0" spc="0" strike="noStrike" sz="1800" u="none" kumimoji="0" normalizeH="0">
+          <a:defRPr kumimoji="0" sz="1800" b="0" i="0" u="none" strike="noStrike" cap="none" spc="0" normalizeH="0" baseline="0">
             <a:ln>
               <a:noFill/>
             </a:ln>
@@ -7289,7 +8217,7 @@
           <a:buFontTx/>
           <a:buNone/>
           <a:tabLst/>
-          <a:defRPr b="0" baseline="0" cap="none" i="0" spc="0" strike="noStrike" sz="1800" u="none" kumimoji="0" normalizeH="0">
+          <a:defRPr kumimoji="0" sz="1800" b="0" i="0" u="none" strike="noStrike" cap="none" spc="0" normalizeH="0" baseline="0">
             <a:ln>
               <a:noFill/>
             </a:ln>
@@ -7315,7 +8243,7 @@
           <a:buFontTx/>
           <a:buNone/>
           <a:tabLst/>
-          <a:defRPr b="0" baseline="0" cap="none" i="0" spc="0" strike="noStrike" sz="1800" u="none" kumimoji="0" normalizeH="0">
+          <a:defRPr kumimoji="0" sz="1800" b="0" i="0" u="none" strike="noStrike" cap="none" spc="0" normalizeH="0" baseline="0">
             <a:ln>
               <a:noFill/>
             </a:ln>
@@ -7328,9 +8256,15 @@
         </a:lvl9pPr>
       </a:lstStyle>
       <a:style>
-        <a:lnRef idx="0"/>
-        <a:fillRef idx="0"/>
-        <a:effectRef idx="0"/>
+        <a:lnRef idx="0">
+          <a:scrgbClr r="0" g="0" b="0"/>
+        </a:lnRef>
+        <a:fillRef idx="0">
+          <a:scrgbClr r="0" g="0" b="0"/>
+        </a:fillRef>
+        <a:effectRef idx="0">
+          <a:scrgbClr r="0" g="0" b="0"/>
+        </a:effectRef>
         <a:fontRef idx="none"/>
       </a:style>
     </a:lnDef>
@@ -7344,7 +8278,7 @@
         <a:effectLst/>
         <a:sp3d/>
       </a:spPr>
-      <a:bodyPr rot="0" spcFirstLastPara="1" vertOverflow="overflow" horzOverflow="overflow" vert="horz" wrap="square" lIns="38100" tIns="38100" rIns="38100" bIns="38100" numCol="1" spcCol="38100" rtlCol="0" anchor="ctr" upright="0">
+      <a:bodyPr rot="0" spcFirstLastPara="1" vertOverflow="overflow" horzOverflow="overflow" vert="horz" wrap="square" lIns="38100" tIns="38100" rIns="38100" bIns="38100" numCol="1" spcCol="38100" rtlCol="0" anchor="ctr">
         <a:spAutoFit/>
       </a:bodyPr>
       <a:lstStyle>
@@ -7363,7 +8297,7 @@
           <a:buFontTx/>
           <a:buNone/>
           <a:tabLst/>
-          <a:defRPr b="0" baseline="0" cap="none" i="0" spc="0" strike="noStrike" sz="3800" u="none" kumimoji="0" normalizeH="0">
+          <a:defRPr kumimoji="0" sz="3800" b="0" i="0" u="none" strike="noStrike" cap="none" spc="0" normalizeH="0" baseline="0">
             <a:ln>
               <a:noFill/>
             </a:ln>
@@ -7393,7 +8327,7 @@
           <a:buFontTx/>
           <a:buNone/>
           <a:tabLst/>
-          <a:defRPr b="0" baseline="0" cap="none" i="0" spc="0" strike="noStrike" sz="1800" u="none" kumimoji="0" normalizeH="0">
+          <a:defRPr kumimoji="0" sz="1800" b="0" i="0" u="none" strike="noStrike" cap="none" spc="0" normalizeH="0" baseline="0">
             <a:ln>
               <a:noFill/>
             </a:ln>
@@ -7419,7 +8353,7 @@
           <a:buFontTx/>
           <a:buNone/>
           <a:tabLst/>
-          <a:defRPr b="0" baseline="0" cap="none" i="0" spc="0" strike="noStrike" sz="1800" u="none" kumimoji="0" normalizeH="0">
+          <a:defRPr kumimoji="0" sz="1800" b="0" i="0" u="none" strike="noStrike" cap="none" spc="0" normalizeH="0" baseline="0">
             <a:ln>
               <a:noFill/>
             </a:ln>
@@ -7445,7 +8379,7 @@
           <a:buFontTx/>
           <a:buNone/>
           <a:tabLst/>
-          <a:defRPr b="0" baseline="0" cap="none" i="0" spc="0" strike="noStrike" sz="1800" u="none" kumimoji="0" normalizeH="0">
+          <a:defRPr kumimoji="0" sz="1800" b="0" i="0" u="none" strike="noStrike" cap="none" spc="0" normalizeH="0" baseline="0">
             <a:ln>
               <a:noFill/>
             </a:ln>
@@ -7471,7 +8405,7 @@
           <a:buFontTx/>
           <a:buNone/>
           <a:tabLst/>
-          <a:defRPr b="0" baseline="0" cap="none" i="0" spc="0" strike="noStrike" sz="1800" u="none" kumimoji="0" normalizeH="0">
+          <a:defRPr kumimoji="0" sz="1800" b="0" i="0" u="none" strike="noStrike" cap="none" spc="0" normalizeH="0" baseline="0">
             <a:ln>
               <a:noFill/>
             </a:ln>
@@ -7497,7 +8431,7 @@
           <a:buFontTx/>
           <a:buNone/>
           <a:tabLst/>
-          <a:defRPr b="0" baseline="0" cap="none" i="0" spc="0" strike="noStrike" sz="1800" u="none" kumimoji="0" normalizeH="0">
+          <a:defRPr kumimoji="0" sz="1800" b="0" i="0" u="none" strike="noStrike" cap="none" spc="0" normalizeH="0" baseline="0">
             <a:ln>
               <a:noFill/>
             </a:ln>
@@ -7523,7 +8457,7 @@
           <a:buFontTx/>
           <a:buNone/>
           <a:tabLst/>
-          <a:defRPr b="0" baseline="0" cap="none" i="0" spc="0" strike="noStrike" sz="1800" u="none" kumimoji="0" normalizeH="0">
+          <a:defRPr kumimoji="0" sz="1800" b="0" i="0" u="none" strike="noStrike" cap="none" spc="0" normalizeH="0" baseline="0">
             <a:ln>
               <a:noFill/>
             </a:ln>
@@ -7549,7 +8483,7 @@
           <a:buFontTx/>
           <a:buNone/>
           <a:tabLst/>
-          <a:defRPr b="0" baseline="0" cap="none" i="0" spc="0" strike="noStrike" sz="1800" u="none" kumimoji="0" normalizeH="0">
+          <a:defRPr kumimoji="0" sz="1800" b="0" i="0" u="none" strike="noStrike" cap="none" spc="0" normalizeH="0" baseline="0">
             <a:ln>
               <a:noFill/>
             </a:ln>
@@ -7575,7 +8509,7 @@
           <a:buFontTx/>
           <a:buNone/>
           <a:tabLst/>
-          <a:defRPr b="0" baseline="0" cap="none" i="0" spc="0" strike="noStrike" sz="1800" u="none" kumimoji="0" normalizeH="0">
+          <a:defRPr kumimoji="0" sz="1800" b="0" i="0" u="none" strike="noStrike" cap="none" spc="0" normalizeH="0" baseline="0">
             <a:ln>
               <a:noFill/>
             </a:ln>
@@ -7601,7 +8535,7 @@
           <a:buFontTx/>
           <a:buNone/>
           <a:tabLst/>
-          <a:defRPr b="0" baseline="0" cap="none" i="0" spc="0" strike="noStrike" sz="1800" u="none" kumimoji="0" normalizeH="0">
+          <a:defRPr kumimoji="0" sz="1800" b="0" i="0" u="none" strike="noStrike" cap="none" spc="0" normalizeH="0" baseline="0">
             <a:ln>
               <a:noFill/>
             </a:ln>
@@ -7614,12 +8548,19 @@
         </a:lvl9pPr>
       </a:lstStyle>
       <a:style>
-        <a:lnRef idx="0"/>
-        <a:fillRef idx="0"/>
-        <a:effectRef idx="0"/>
+        <a:lnRef idx="0">
+          <a:scrgbClr r="0" g="0" b="0"/>
+        </a:lnRef>
+        <a:fillRef idx="0">
+          <a:scrgbClr r="0" g="0" b="0"/>
+        </a:fillRef>
+        <a:effectRef idx="0">
+          <a:scrgbClr r="0" g="0" b="0"/>
+        </a:effectRef>
         <a:fontRef idx="none"/>
       </a:style>
     </a:txDef>
   </a:objectDefaults>
+  <a:extraClrSchemeLst/>
 </a:theme>
 </file>
--- a/преза колледж.pptx
+++ b/преза колледж.pptx
@@ -5,7 +5,7 @@
     <p:sldMasterId id="2147483648" r:id="rId1"/>
   </p:sldMasterIdLst>
   <p:notesMasterIdLst>
-    <p:notesMasterId r:id="rId9"/>
+    <p:notesMasterId r:id="rId12"/>
   </p:notesMasterIdLst>
   <p:sldIdLst>
     <p:sldId id="256" r:id="rId2"/>
@@ -14,7 +14,10 @@
     <p:sldId id="260" r:id="rId5"/>
     <p:sldId id="261" r:id="rId6"/>
     <p:sldId id="262" r:id="rId7"/>
-    <p:sldId id="259" r:id="rId8"/>
+    <p:sldId id="263" r:id="rId8"/>
+    <p:sldId id="264" r:id="rId9"/>
+    <p:sldId id="265" r:id="rId10"/>
+    <p:sldId id="259" r:id="rId11"/>
   </p:sldIdLst>
   <p:sldSz cx="24384000" cy="13716000"/>
   <p:notesSz cx="6858000" cy="9144000"/>
@@ -316,6 +319,11 @@
       </a:defRPr>
     </a:lvl9pPr>
   </p:defaultTextStyle>
+  <p:extLst>
+    <p:ext uri="{EFAFB233-063F-42B5-8137-9DF3F51BA10A}">
+      <p15:sldGuideLst xmlns:p15="http://schemas.microsoft.com/office/powerpoint/2012/main"/>
+    </p:ext>
+  </p:extLst>
 </p:presentation>
 </file>
 
@@ -4031,7 +4039,7 @@
           </a:ln>
           <a:extLst>
             <a:ext uri="{C572A759-6A51-4108-AA02-DFA0A04FC94B}">
-              <ma14:wrappingTextBoxFlag xmlns:ma14="http://schemas.microsoft.com/office/mac/drawingml/2011/main" xmlns:a14="http://schemas.microsoft.com/office/drawing/2010/main" xmlns:m="http://schemas.openxmlformats.org/officeDocument/2006/math" xmlns="" val="1"/>
+              <ma14:wrappingTextBoxFlag xmlns="" xmlns:m="http://schemas.openxmlformats.org/officeDocument/2006/math" xmlns:a14="http://schemas.microsoft.com/office/drawing/2010/main" xmlns:ma14="http://schemas.microsoft.com/office/mac/drawingml/2011/main" val="1"/>
             </a:ext>
           </a:extLst>
         </p:spPr>
@@ -4070,7 +4078,7 @@
           </a:ln>
           <a:extLst>
             <a:ext uri="{C572A759-6A51-4108-AA02-DFA0A04FC94B}">
-              <ma14:wrappingTextBoxFlag xmlns:ma14="http://schemas.microsoft.com/office/mac/drawingml/2011/main" xmlns:a14="http://schemas.microsoft.com/office/drawing/2010/main" xmlns:m="http://schemas.openxmlformats.org/officeDocument/2006/math" xmlns="" val="1"/>
+              <ma14:wrappingTextBoxFlag xmlns="" xmlns:m="http://schemas.openxmlformats.org/officeDocument/2006/math" xmlns:a14="http://schemas.microsoft.com/office/drawing/2010/main" xmlns:ma14="http://schemas.microsoft.com/office/mac/drawingml/2011/main" val="1"/>
             </a:ext>
           </a:extLst>
         </p:spPr>
@@ -4954,7 +4962,7 @@
           </a:ln>
           <a:extLst>
             <a:ext uri="{C572A759-6A51-4108-AA02-DFA0A04FC94B}">
-              <ma14:wrappingTextBoxFlag xmlns:ma14="http://schemas.microsoft.com/office/mac/drawingml/2011/main" xmlns:a14="http://schemas.microsoft.com/office/drawing/2010/main" xmlns:m="http://schemas.openxmlformats.org/officeDocument/2006/math" xmlns="" val="1"/>
+              <ma14:wrappingTextBoxFlag xmlns="" xmlns:m="http://schemas.openxmlformats.org/officeDocument/2006/math" xmlns:a14="http://schemas.microsoft.com/office/drawing/2010/main" xmlns:ma14="http://schemas.microsoft.com/office/mac/drawingml/2011/main" val="1"/>
             </a:ext>
           </a:extLst>
         </p:spPr>
@@ -4984,6 +4992,85 @@
                 <a:schemeClr val="bg1"/>
               </a:solidFill>
             </a:endParaRPr>
+          </a:p>
+        </p:txBody>
+      </p:sp>
+    </p:spTree>
+  </p:cSld>
+  <p:clrMapOvr>
+    <a:masterClrMapping/>
+  </p:clrMapOvr>
+  <p:transition spd="med"/>
+  <p:timing>
+    <p:tnLst>
+      <p:par>
+        <p:cTn id="1" dur="indefinite" restart="never" nodeType="tmRoot"/>
+      </p:par>
+    </p:tnLst>
+  </p:timing>
+</p:sld>
+</file>
+
+<file path=ppt/slides/slide10.xml><?xml version="1.0" encoding="utf-8"?>
+<p:sld xmlns:a="http://schemas.openxmlformats.org/drawingml/2006/main" xmlns:r="http://schemas.openxmlformats.org/officeDocument/2006/relationships" xmlns:p="http://schemas.openxmlformats.org/presentationml/2006/main">
+  <p:cSld>
+    <p:spTree>
+      <p:nvGrpSpPr>
+        <p:cNvPr id="1" name=""/>
+        <p:cNvGrpSpPr/>
+        <p:nvPr/>
+      </p:nvGrpSpPr>
+      <p:grpSpPr>
+        <a:xfrm>
+          <a:off x="0" y="0"/>
+          <a:ext cx="0" cy="0"/>
+          <a:chOff x="0" y="0"/>
+          <a:chExt cx="0" cy="0"/>
+        </a:xfrm>
+      </p:grpSpPr>
+      <p:sp>
+        <p:nvSpPr>
+          <p:cNvPr id="196" name="Спасибо за внимание!"/>
+          <p:cNvSpPr txBox="1">
+            <a:spLocks noGrp="1"/>
+          </p:cNvSpPr>
+          <p:nvPr>
+            <p:ph type="body" sz="quarter" idx="1"/>
+          </p:nvPr>
+        </p:nvSpPr>
+        <p:spPr>
+          <a:prstGeom prst="rect">
+            <a:avLst/>
+          </a:prstGeom>
+        </p:spPr>
+        <p:txBody>
+          <a:bodyPr/>
+          <a:lstStyle/>
+          <a:p>
+            <a:r>
+              <a:rPr dirty="0" err="1"/>
+              <a:t>Спасибо</a:t>
+            </a:r>
+            <a:r>
+              <a:rPr dirty="0"/>
+              <a:t> </a:t>
+            </a:r>
+            <a:r>
+              <a:rPr dirty="0" err="1"/>
+              <a:t>за</a:t>
+            </a:r>
+            <a:r>
+              <a:rPr dirty="0"/>
+              <a:t> </a:t>
+            </a:r>
+            <a:r>
+              <a:rPr dirty="0" err="1"/>
+              <a:t>внимание</a:t>
+            </a:r>
+            <a:r>
+              <a:rPr dirty="0"/>
+              <a:t>!</a:t>
+            </a:r>
           </a:p>
         </p:txBody>
       </p:sp>
@@ -5805,7 +5892,7 @@
           </a:ln>
           <a:extLst>
             <a:ext uri="{C572A759-6A51-4108-AA02-DFA0A04FC94B}">
-              <ma14:wrappingTextBoxFlag xmlns:ma14="http://schemas.microsoft.com/office/mac/drawingml/2011/main" xmlns:a14="http://schemas.microsoft.com/office/drawing/2010/main" xmlns:m="http://schemas.openxmlformats.org/officeDocument/2006/math" xmlns="" val="1"/>
+              <ma14:wrappingTextBoxFlag xmlns="" xmlns:m="http://schemas.openxmlformats.org/officeDocument/2006/math" xmlns:a14="http://schemas.microsoft.com/office/drawing/2010/main" xmlns:ma14="http://schemas.microsoft.com/office/mac/drawingml/2011/main" val="1"/>
             </a:ext>
           </a:extLst>
         </p:spPr>
@@ -5921,7 +6008,7 @@
         </p:nvSpPr>
         <p:spPr>
           <a:xfrm>
-            <a:off x="4019549" y="4521762"/>
+            <a:off x="4454191" y="4520011"/>
             <a:ext cx="13208215" cy="4000501"/>
           </a:xfrm>
           <a:prstGeom prst="rect">
@@ -6002,7 +6089,7 @@
         </p:blipFill>
         <p:spPr>
           <a:xfrm>
-            <a:off x="9044825" y="1086423"/>
+            <a:off x="9365667" y="861834"/>
             <a:ext cx="2873173" cy="2873173"/>
           </a:xfrm>
           <a:prstGeom prst="rect">
@@ -6176,7 +6263,7 @@
         </p:blipFill>
         <p:spPr>
           <a:xfrm>
-            <a:off x="3862298" y="1089924"/>
+            <a:off x="954747" y="2494068"/>
             <a:ext cx="2873173" cy="2873173"/>
           </a:xfrm>
           <a:prstGeom prst="rect">
@@ -6185,6 +6272,36 @@
           <a:ln w="3175">
             <a:miter lim="400000"/>
           </a:ln>
+        </p:spPr>
+      </p:pic>
+      <p:pic>
+        <p:nvPicPr>
+          <p:cNvPr id="2" name="Рисунок 1"/>
+          <p:cNvPicPr>
+            <a:picLocks noChangeAspect="1"/>
+          </p:cNvPicPr>
+          <p:nvPr/>
+        </p:nvPicPr>
+        <p:blipFill>
+          <a:blip r:embed="rId10" cstate="print">
+            <a:extLst>
+              <a:ext uri="{28A0092B-C50C-407E-A947-70E740481C1C}">
+                <a14:useLocalDpi xmlns:a14="http://schemas.microsoft.com/office/drawing/2010/main" val="0"/>
+              </a:ext>
+            </a:extLst>
+          </a:blip>
+          <a:stretch>
+            <a:fillRect/>
+          </a:stretch>
+        </p:blipFill>
+        <p:spPr>
+          <a:xfrm>
+            <a:off x="5530211" y="1565971"/>
+            <a:ext cx="2539258" cy="2364684"/>
+          </a:xfrm>
+          <a:prstGeom prst="rect">
+            <a:avLst/>
+          </a:prstGeom>
         </p:spPr>
       </p:pic>
     </p:spTree>
@@ -6325,6 +6442,75 @@
           <a:chExt cx="0" cy="0"/>
         </a:xfrm>
       </p:grpSpPr>
+      <p:pic>
+        <p:nvPicPr>
+          <p:cNvPr id="4" name="Рисунок 3"/>
+          <p:cNvPicPr>
+            <a:picLocks noChangeAspect="1"/>
+          </p:cNvPicPr>
+          <p:nvPr/>
+        </p:nvPicPr>
+        <p:blipFill>
+          <a:blip r:embed="rId3" cstate="print">
+            <a:extLst>
+              <a:ext uri="{28A0092B-C50C-407E-A947-70E740481C1C}">
+                <a14:useLocalDpi xmlns:a14="http://schemas.microsoft.com/office/drawing/2010/main" val="0"/>
+              </a:ext>
+            </a:extLst>
+          </a:blip>
+          <a:stretch>
+            <a:fillRect/>
+          </a:stretch>
+        </p:blipFill>
+        <p:spPr>
+          <a:xfrm>
+            <a:off x="433137" y="0"/>
+            <a:ext cx="23742316" cy="13716000"/>
+          </a:xfrm>
+          <a:prstGeom prst="rect">
+            <a:avLst/>
+          </a:prstGeom>
+        </p:spPr>
+      </p:pic>
+      <p:sp>
+        <p:nvSpPr>
+          <p:cNvPr id="3" name="Используемые технологии?"/>
+          <p:cNvSpPr txBox="1">
+            <a:spLocks noGrp="1"/>
+          </p:cNvSpPr>
+          <p:nvPr>
+            <p:ph type="title"/>
+          </p:nvPr>
+        </p:nvSpPr>
+        <p:spPr>
+          <a:xfrm>
+            <a:off x="13388140" y="495193"/>
+            <a:ext cx="9471862" cy="4000501"/>
+          </a:xfrm>
+          <a:prstGeom prst="rect">
+            <a:avLst/>
+          </a:prstGeom>
+        </p:spPr>
+        <p:txBody>
+          <a:bodyPr/>
+          <a:lstStyle>
+            <a:lvl1pPr defTabSz="1102816">
+              <a:defRPr sz="12540" spc="-627"/>
+            </a:lvl1pPr>
+          </a:lstStyle>
+          <a:p>
+            <a:r>
+              <a:rPr lang="ru-RU" dirty="0" smtClean="0"/>
+              <a:t>Как оно работает</a:t>
+            </a:r>
+            <a:r>
+              <a:rPr lang="en-US" dirty="0" smtClean="0"/>
+              <a:t>?</a:t>
+            </a:r>
+            <a:endParaRPr dirty="0"/>
+          </a:p>
+        </p:txBody>
+      </p:sp>
     </p:spTree>
     <p:extLst>
       <p:ext uri="{BB962C8B-B14F-4D97-AF65-F5344CB8AC3E}">
@@ -6365,63 +6551,177 @@
       </p:grpSpPr>
       <p:sp>
         <p:nvSpPr>
-          <p:cNvPr id="196" name="Спасибо за внимание!"/>
-          <p:cNvSpPr txBox="1">
+          <p:cNvPr id="2" name="Рисунок 1"/>
+          <p:cNvSpPr>
+            <a:spLocks noGrp="1"/>
+          </p:cNvSpPr>
+          <p:nvPr>
+            <p:ph type="pic" idx="21"/>
+          </p:nvPr>
+        </p:nvSpPr>
+        <p:spPr/>
+      </p:sp>
+      <p:sp>
+        <p:nvSpPr>
+          <p:cNvPr id="3" name="Заголовок 2"/>
+          <p:cNvSpPr>
+            <a:spLocks noGrp="1"/>
+          </p:cNvSpPr>
+          <p:nvPr>
+            <p:ph type="title"/>
+          </p:nvPr>
+        </p:nvSpPr>
+        <p:spPr/>
+        <p:txBody>
+          <a:bodyPr/>
+          <a:lstStyle/>
+          <a:p>
+            <a:endParaRPr lang="ru-RU"/>
+          </a:p>
+        </p:txBody>
+      </p:sp>
+      <p:sp>
+        <p:nvSpPr>
+          <p:cNvPr id="4" name="Текст 3"/>
+          <p:cNvSpPr>
             <a:spLocks noGrp="1"/>
           </p:cNvSpPr>
           <p:nvPr>
             <p:ph type="body" sz="quarter" idx="1"/>
           </p:nvPr>
         </p:nvSpPr>
-        <p:spPr>
-          <a:prstGeom prst="rect">
-            <a:avLst/>
-          </a:prstGeom>
-        </p:spPr>
+        <p:spPr/>
         <p:txBody>
           <a:bodyPr/>
           <a:lstStyle/>
           <a:p>
-            <a:r>
-              <a:rPr dirty="0" err="1"/>
-              <a:t>Спасибо</a:t>
-            </a:r>
-            <a:r>
-              <a:rPr dirty="0"/>
-              <a:t> </a:t>
-            </a:r>
-            <a:r>
-              <a:rPr dirty="0" err="1"/>
-              <a:t>за</a:t>
-            </a:r>
-            <a:r>
-              <a:rPr dirty="0"/>
-              <a:t> </a:t>
-            </a:r>
-            <a:r>
-              <a:rPr dirty="0" err="1"/>
-              <a:t>внимание</a:t>
-            </a:r>
-            <a:r>
-              <a:rPr dirty="0"/>
-              <a:t>!</a:t>
-            </a:r>
+            <a:endParaRPr lang="ru-RU"/>
           </a:p>
         </p:txBody>
       </p:sp>
     </p:spTree>
+    <p:extLst>
+      <p:ext uri="{BB962C8B-B14F-4D97-AF65-F5344CB8AC3E}">
+        <p14:creationId xmlns:p14="http://schemas.microsoft.com/office/powerpoint/2010/main" val="2090407853"/>
+      </p:ext>
+    </p:extLst>
   </p:cSld>
   <p:clrMapOvr>
     <a:masterClrMapping/>
   </p:clrMapOvr>
   <p:transition spd="med"/>
-  <p:timing>
-    <p:tnLst>
-      <p:par>
-        <p:cTn id="1" dur="indefinite" restart="never" nodeType="tmRoot"/>
-      </p:par>
-    </p:tnLst>
-  </p:timing>
+</p:sld>
+</file>
+
+<file path=ppt/slides/slide8.xml><?xml version="1.0" encoding="utf-8"?>
+<p:sld xmlns:a="http://schemas.openxmlformats.org/drawingml/2006/main" xmlns:r="http://schemas.openxmlformats.org/officeDocument/2006/relationships" xmlns:p="http://schemas.openxmlformats.org/presentationml/2006/main">
+  <p:cSld>
+    <p:spTree>
+      <p:nvGrpSpPr>
+        <p:cNvPr id="1" name=""/>
+        <p:cNvGrpSpPr/>
+        <p:nvPr/>
+      </p:nvGrpSpPr>
+      <p:grpSpPr>
+        <a:xfrm>
+          <a:off x="0" y="0"/>
+          <a:ext cx="0" cy="0"/>
+          <a:chOff x="0" y="0"/>
+          <a:chExt cx="0" cy="0"/>
+        </a:xfrm>
+      </p:grpSpPr>
+      <p:sp>
+        <p:nvSpPr>
+          <p:cNvPr id="2" name="Рисунок 1"/>
+          <p:cNvSpPr>
+            <a:spLocks noGrp="1"/>
+          </p:cNvSpPr>
+          <p:nvPr>
+            <p:ph type="pic" idx="21"/>
+          </p:nvPr>
+        </p:nvSpPr>
+        <p:spPr/>
+      </p:sp>
+      <p:sp>
+        <p:nvSpPr>
+          <p:cNvPr id="3" name="Заголовок 2"/>
+          <p:cNvSpPr>
+            <a:spLocks noGrp="1"/>
+          </p:cNvSpPr>
+          <p:nvPr>
+            <p:ph type="title"/>
+          </p:nvPr>
+        </p:nvSpPr>
+        <p:spPr/>
+        <p:txBody>
+          <a:bodyPr/>
+          <a:lstStyle/>
+          <a:p>
+            <a:endParaRPr lang="ru-RU"/>
+          </a:p>
+        </p:txBody>
+      </p:sp>
+      <p:sp>
+        <p:nvSpPr>
+          <p:cNvPr id="4" name="Текст 3"/>
+          <p:cNvSpPr>
+            <a:spLocks noGrp="1"/>
+          </p:cNvSpPr>
+          <p:nvPr>
+            <p:ph type="body" sz="quarter" idx="1"/>
+          </p:nvPr>
+        </p:nvSpPr>
+        <p:spPr/>
+        <p:txBody>
+          <a:bodyPr/>
+          <a:lstStyle/>
+          <a:p>
+            <a:endParaRPr lang="ru-RU"/>
+          </a:p>
+        </p:txBody>
+      </p:sp>
+    </p:spTree>
+    <p:extLst>
+      <p:ext uri="{BB962C8B-B14F-4D97-AF65-F5344CB8AC3E}">
+        <p14:creationId xmlns:p14="http://schemas.microsoft.com/office/powerpoint/2010/main" val="2364455617"/>
+      </p:ext>
+    </p:extLst>
+  </p:cSld>
+  <p:clrMapOvr>
+    <a:masterClrMapping/>
+  </p:clrMapOvr>
+  <p:transition spd="med"/>
+</p:sld>
+</file>
+
+<file path=ppt/slides/slide9.xml><?xml version="1.0" encoding="utf-8"?>
+<p:sld xmlns:a="http://schemas.openxmlformats.org/drawingml/2006/main" xmlns:r="http://schemas.openxmlformats.org/officeDocument/2006/relationships" xmlns:p="http://schemas.openxmlformats.org/presentationml/2006/main">
+  <p:cSld>
+    <p:spTree>
+      <p:nvGrpSpPr>
+        <p:cNvPr id="1" name=""/>
+        <p:cNvGrpSpPr/>
+        <p:nvPr/>
+      </p:nvGrpSpPr>
+      <p:grpSpPr>
+        <a:xfrm>
+          <a:off x="0" y="0"/>
+          <a:ext cx="0" cy="0"/>
+          <a:chOff x="0" y="0"/>
+          <a:chExt cx="0" cy="0"/>
+        </a:xfrm>
+      </p:grpSpPr>
+    </p:spTree>
+    <p:extLst>
+      <p:ext uri="{BB962C8B-B14F-4D97-AF65-F5344CB8AC3E}">
+        <p14:creationId xmlns:p14="http://schemas.microsoft.com/office/powerpoint/2010/main" val="4286464892"/>
+      </p:ext>
+    </p:extLst>
+  </p:cSld>
+  <p:clrMapOvr>
+    <a:masterClrMapping/>
+  </p:clrMapOvr>
+  <p:transition spd="med"/>
 </p:sld>
 </file>
 
